--- a/AIvenX-Demo-Deck.pptx
+++ b/AIvenX-Demo-Deck.pptx
@@ -17391,7 +17391,7 @@
                 <a:ea typeface="Inter" pitchFamily="34" charset="-122"/>
                 <a:cs typeface="Inter" pitchFamily="34" charset="-120"/>
               </a:rPr>
-              <a:t>Don't see yours? Cortex AI adapts to any framework — we've onboarded a Steiner / Waldorf school using a custom rubric in 5 days.</a:t>
+              <a:t>Don't see yours? Cortex AI is built to adapt to any framework — share your school's rubric and we'll configure it during onboarding.</a:t>
             </a:r>
             <a:endParaRPr lang="en-US" sz="1200" dirty="0"/>
           </a:p>

--- a/AIvenX-Demo-Deck.pptx
+++ b/AIvenX-Demo-Deck.pptx
@@ -30,9 +30,13 @@
     <p:sldId id="278" r:id="rId24"/>
     <p:sldId id="279" r:id="rId25"/>
     <p:sldId id="280" r:id="rId26"/>
+    <p:sldId id="281" r:id="rId27"/>
+    <p:sldId id="282" r:id="rId28"/>
+    <p:sldId id="283" r:id="rId29"/>
+    <p:sldId id="284" r:id="rId30"/>
   </p:sldIdLst>
   <p:notesMasterIdLst>
-    <p:notesMasterId r:id="rId27"/>
+    <p:notesMasterId r:id="rId31"/>
   </p:notesMasterIdLst>
   <p:sldSz cx="12192000" cy="6858000"/>
   <p:notesSz cx="6858000" cy="12192000"/>
@@ -2046,6 +2050,358 @@
             <a:fld id="{F7021451-1387-4CA6-816F-3879F97B5CBC}" type="slidenum">
               <a:rPr lang="en-US"/>
               <a:t>25</a:t>
+            </a:fld>
+            <a:endParaRPr lang="en-US"/>
+          </a:p>
+        </p:txBody>
+      </p:sp>
+    </p:spTree>
+    <p:extLst>
+      <p:ext uri="{BB962C8B-B14F-4D97-AF65-F5344CB8AC3E}">
+        <p14:creationId xmlns:p14="http://schemas.microsoft.com/office/powerpoint/2010/main" val="1024086991"/>
+      </p:ext>
+    </p:extLst>
+  </p:cSld>
+  <p:clrMapOvr>
+    <a:masterClrMapping/>
+  </p:clrMapOvr>
+</p:notes>
+</file>
+
+<file path=ppt/notesSlides/notesSlide26.xml><?xml version="1.0" encoding="utf-8"?>
+<p:notes xmlns:a="http://schemas.openxmlformats.org/drawingml/2006/main" xmlns:r="http://schemas.openxmlformats.org/officeDocument/2006/relationships" xmlns:p="http://schemas.openxmlformats.org/presentationml/2006/main">
+  <p:cSld>
+    <p:spTree>
+      <p:nvGrpSpPr>
+        <p:cNvPr id="1" name=""/>
+        <p:cNvGrpSpPr/>
+        <p:nvPr/>
+      </p:nvGrpSpPr>
+      <p:grpSpPr>
+        <a:xfrm>
+          <a:off x="0" y="0"/>
+          <a:ext cx="0" cy="0"/>
+          <a:chOff x="0" y="0"/>
+          <a:chExt cx="0" cy="0"/>
+        </a:xfrm>
+      </p:grpSpPr>
+      <p:sp>
+        <p:nvSpPr>
+          <p:cNvPr id="2" name="Slide Image Placeholder 1"/>
+          <p:cNvSpPr>
+            <a:spLocks noGrp="1" noRot="1" noChangeAspect="1"/>
+          </p:cNvSpPr>
+          <p:nvPr>
+            <p:ph type="sldImg"/>
+          </p:nvPr>
+        </p:nvSpPr>
+        <p:spPr/>
+      </p:sp>
+      <p:sp>
+        <p:nvSpPr>
+          <p:cNvPr id="3" name="Notes Placeholder 2"/>
+          <p:cNvSpPr>
+            <a:spLocks noGrp="1"/>
+          </p:cNvSpPr>
+          <p:nvPr>
+            <p:ph type="body" idx="1"/>
+          </p:nvPr>
+        </p:nvSpPr>
+        <p:spPr/>
+        <p:txBody>
+          <a:bodyPr/>
+          <a:lstStyle/>
+          <a:p>
+            <a:r>
+              <a:rPr lang="en-US" dirty="0"/>
+              <a:t/>
+            </a:r>
+            <a:endParaRPr lang="en-US" dirty="0"/>
+          </a:p>
+        </p:txBody>
+      </p:sp>
+      <p:sp>
+        <p:nvSpPr>
+          <p:cNvPr id="4" name="Slide Number Placeholder 3"/>
+          <p:cNvSpPr>
+            <a:spLocks noGrp="1"/>
+          </p:cNvSpPr>
+          <p:nvPr>
+            <p:ph type="sldNum" sz="quarter" idx="10"/>
+          </p:nvPr>
+        </p:nvSpPr>
+        <p:spPr/>
+        <p:txBody>
+          <a:bodyPr/>
+          <a:lstStyle/>
+          <a:p>
+            <a:fld id="{F7021451-1387-4CA6-816F-3879F97B5CBC}" type="slidenum">
+              <a:rPr lang="en-US"/>
+              <a:t>26</a:t>
+            </a:fld>
+            <a:endParaRPr lang="en-US"/>
+          </a:p>
+        </p:txBody>
+      </p:sp>
+    </p:spTree>
+    <p:extLst>
+      <p:ext uri="{BB962C8B-B14F-4D97-AF65-F5344CB8AC3E}">
+        <p14:creationId xmlns:p14="http://schemas.microsoft.com/office/powerpoint/2010/main" val="1024086991"/>
+      </p:ext>
+    </p:extLst>
+  </p:cSld>
+  <p:clrMapOvr>
+    <a:masterClrMapping/>
+  </p:clrMapOvr>
+</p:notes>
+</file>
+
+<file path=ppt/notesSlides/notesSlide27.xml><?xml version="1.0" encoding="utf-8"?>
+<p:notes xmlns:a="http://schemas.openxmlformats.org/drawingml/2006/main" xmlns:r="http://schemas.openxmlformats.org/officeDocument/2006/relationships" xmlns:p="http://schemas.openxmlformats.org/presentationml/2006/main">
+  <p:cSld>
+    <p:spTree>
+      <p:nvGrpSpPr>
+        <p:cNvPr id="1" name=""/>
+        <p:cNvGrpSpPr/>
+        <p:nvPr/>
+      </p:nvGrpSpPr>
+      <p:grpSpPr>
+        <a:xfrm>
+          <a:off x="0" y="0"/>
+          <a:ext cx="0" cy="0"/>
+          <a:chOff x="0" y="0"/>
+          <a:chExt cx="0" cy="0"/>
+        </a:xfrm>
+      </p:grpSpPr>
+      <p:sp>
+        <p:nvSpPr>
+          <p:cNvPr id="2" name="Slide Image Placeholder 1"/>
+          <p:cNvSpPr>
+            <a:spLocks noGrp="1" noRot="1" noChangeAspect="1"/>
+          </p:cNvSpPr>
+          <p:nvPr>
+            <p:ph type="sldImg"/>
+          </p:nvPr>
+        </p:nvSpPr>
+        <p:spPr/>
+      </p:sp>
+      <p:sp>
+        <p:nvSpPr>
+          <p:cNvPr id="3" name="Notes Placeholder 2"/>
+          <p:cNvSpPr>
+            <a:spLocks noGrp="1"/>
+          </p:cNvSpPr>
+          <p:nvPr>
+            <p:ph type="body" idx="1"/>
+          </p:nvPr>
+        </p:nvSpPr>
+        <p:spPr/>
+        <p:txBody>
+          <a:bodyPr/>
+          <a:lstStyle/>
+          <a:p>
+            <a:r>
+              <a:rPr lang="en-US" dirty="0"/>
+              <a:t/>
+            </a:r>
+            <a:endParaRPr lang="en-US" dirty="0"/>
+          </a:p>
+        </p:txBody>
+      </p:sp>
+      <p:sp>
+        <p:nvSpPr>
+          <p:cNvPr id="4" name="Slide Number Placeholder 3"/>
+          <p:cNvSpPr>
+            <a:spLocks noGrp="1"/>
+          </p:cNvSpPr>
+          <p:nvPr>
+            <p:ph type="sldNum" sz="quarter" idx="10"/>
+          </p:nvPr>
+        </p:nvSpPr>
+        <p:spPr/>
+        <p:txBody>
+          <a:bodyPr/>
+          <a:lstStyle/>
+          <a:p>
+            <a:fld id="{F7021451-1387-4CA6-816F-3879F97B5CBC}" type="slidenum">
+              <a:rPr lang="en-US"/>
+              <a:t>27</a:t>
+            </a:fld>
+            <a:endParaRPr lang="en-US"/>
+          </a:p>
+        </p:txBody>
+      </p:sp>
+    </p:spTree>
+    <p:extLst>
+      <p:ext uri="{BB962C8B-B14F-4D97-AF65-F5344CB8AC3E}">
+        <p14:creationId xmlns:p14="http://schemas.microsoft.com/office/powerpoint/2010/main" val="1024086991"/>
+      </p:ext>
+    </p:extLst>
+  </p:cSld>
+  <p:clrMapOvr>
+    <a:masterClrMapping/>
+  </p:clrMapOvr>
+</p:notes>
+</file>
+
+<file path=ppt/notesSlides/notesSlide28.xml><?xml version="1.0" encoding="utf-8"?>
+<p:notes xmlns:a="http://schemas.openxmlformats.org/drawingml/2006/main" xmlns:r="http://schemas.openxmlformats.org/officeDocument/2006/relationships" xmlns:p="http://schemas.openxmlformats.org/presentationml/2006/main">
+  <p:cSld>
+    <p:spTree>
+      <p:nvGrpSpPr>
+        <p:cNvPr id="1" name=""/>
+        <p:cNvGrpSpPr/>
+        <p:nvPr/>
+      </p:nvGrpSpPr>
+      <p:grpSpPr>
+        <a:xfrm>
+          <a:off x="0" y="0"/>
+          <a:ext cx="0" cy="0"/>
+          <a:chOff x="0" y="0"/>
+          <a:chExt cx="0" cy="0"/>
+        </a:xfrm>
+      </p:grpSpPr>
+      <p:sp>
+        <p:nvSpPr>
+          <p:cNvPr id="2" name="Slide Image Placeholder 1"/>
+          <p:cNvSpPr>
+            <a:spLocks noGrp="1" noRot="1" noChangeAspect="1"/>
+          </p:cNvSpPr>
+          <p:nvPr>
+            <p:ph type="sldImg"/>
+          </p:nvPr>
+        </p:nvSpPr>
+        <p:spPr/>
+      </p:sp>
+      <p:sp>
+        <p:nvSpPr>
+          <p:cNvPr id="3" name="Notes Placeholder 2"/>
+          <p:cNvSpPr>
+            <a:spLocks noGrp="1"/>
+          </p:cNvSpPr>
+          <p:nvPr>
+            <p:ph type="body" idx="1"/>
+          </p:nvPr>
+        </p:nvSpPr>
+        <p:spPr/>
+        <p:txBody>
+          <a:bodyPr/>
+          <a:lstStyle/>
+          <a:p>
+            <a:r>
+              <a:rPr lang="en-US" dirty="0"/>
+              <a:t/>
+            </a:r>
+            <a:endParaRPr lang="en-US" dirty="0"/>
+          </a:p>
+        </p:txBody>
+      </p:sp>
+      <p:sp>
+        <p:nvSpPr>
+          <p:cNvPr id="4" name="Slide Number Placeholder 3"/>
+          <p:cNvSpPr>
+            <a:spLocks noGrp="1"/>
+          </p:cNvSpPr>
+          <p:nvPr>
+            <p:ph type="sldNum" sz="quarter" idx="10"/>
+          </p:nvPr>
+        </p:nvSpPr>
+        <p:spPr/>
+        <p:txBody>
+          <a:bodyPr/>
+          <a:lstStyle/>
+          <a:p>
+            <a:fld id="{F7021451-1387-4CA6-816F-3879F97B5CBC}" type="slidenum">
+              <a:rPr lang="en-US"/>
+              <a:t>28</a:t>
+            </a:fld>
+            <a:endParaRPr lang="en-US"/>
+          </a:p>
+        </p:txBody>
+      </p:sp>
+    </p:spTree>
+    <p:extLst>
+      <p:ext uri="{BB962C8B-B14F-4D97-AF65-F5344CB8AC3E}">
+        <p14:creationId xmlns:p14="http://schemas.microsoft.com/office/powerpoint/2010/main" val="1024086991"/>
+      </p:ext>
+    </p:extLst>
+  </p:cSld>
+  <p:clrMapOvr>
+    <a:masterClrMapping/>
+  </p:clrMapOvr>
+</p:notes>
+</file>
+
+<file path=ppt/notesSlides/notesSlide29.xml><?xml version="1.0" encoding="utf-8"?>
+<p:notes xmlns:a="http://schemas.openxmlformats.org/drawingml/2006/main" xmlns:r="http://schemas.openxmlformats.org/officeDocument/2006/relationships" xmlns:p="http://schemas.openxmlformats.org/presentationml/2006/main">
+  <p:cSld>
+    <p:spTree>
+      <p:nvGrpSpPr>
+        <p:cNvPr id="1" name=""/>
+        <p:cNvGrpSpPr/>
+        <p:nvPr/>
+      </p:nvGrpSpPr>
+      <p:grpSpPr>
+        <a:xfrm>
+          <a:off x="0" y="0"/>
+          <a:ext cx="0" cy="0"/>
+          <a:chOff x="0" y="0"/>
+          <a:chExt cx="0" cy="0"/>
+        </a:xfrm>
+      </p:grpSpPr>
+      <p:sp>
+        <p:nvSpPr>
+          <p:cNvPr id="2" name="Slide Image Placeholder 1"/>
+          <p:cNvSpPr>
+            <a:spLocks noGrp="1" noRot="1" noChangeAspect="1"/>
+          </p:cNvSpPr>
+          <p:nvPr>
+            <p:ph type="sldImg"/>
+          </p:nvPr>
+        </p:nvSpPr>
+        <p:spPr/>
+      </p:sp>
+      <p:sp>
+        <p:nvSpPr>
+          <p:cNvPr id="3" name="Notes Placeholder 2"/>
+          <p:cNvSpPr>
+            <a:spLocks noGrp="1"/>
+          </p:cNvSpPr>
+          <p:nvPr>
+            <p:ph type="body" idx="1"/>
+          </p:nvPr>
+        </p:nvSpPr>
+        <p:spPr/>
+        <p:txBody>
+          <a:bodyPr/>
+          <a:lstStyle/>
+          <a:p>
+            <a:r>
+              <a:rPr lang="en-US" dirty="0"/>
+              <a:t/>
+            </a:r>
+            <a:endParaRPr lang="en-US" dirty="0"/>
+          </a:p>
+        </p:txBody>
+      </p:sp>
+      <p:sp>
+        <p:nvSpPr>
+          <p:cNvPr id="4" name="Slide Number Placeholder 3"/>
+          <p:cNvSpPr>
+            <a:spLocks noGrp="1"/>
+          </p:cNvSpPr>
+          <p:nvPr>
+            <p:ph type="sldNum" sz="quarter" idx="10"/>
+          </p:nvPr>
+        </p:nvSpPr>
+        <p:spPr/>
+        <p:txBody>
+          <a:bodyPr/>
+          <a:lstStyle/>
+          <a:p>
+            <a:fld id="{F7021451-1387-4CA6-816F-3879F97B5CBC}" type="slidenum">
+              <a:rPr lang="en-US"/>
+              <a:t>29</a:t>
             </a:fld>
             <a:endParaRPr lang="en-US"/>
           </a:p>
@@ -10054,6 +10410,13 @@
 <file path=ppt/slides/slide21.xml><?xml version="1.0" encoding="utf-8"?>
 <p:sld xmlns:a="http://schemas.openxmlformats.org/drawingml/2006/main" xmlns:r="http://schemas.openxmlformats.org/officeDocument/2006/relationships" xmlns:p="http://schemas.openxmlformats.org/presentationml/2006/main">
   <p:cSld name="Slide 21">
+    <p:bg>
+      <p:bgPr>
+        <a:solidFill>
+          <a:srgbClr val="A855F7"/>
+        </a:solidFill>
+      </p:bgPr>
+    </p:bg>
     <p:spTree>
       <p:nvGrpSpPr>
         <p:cNvPr id="1" name=""/>
@@ -10070,147 +10433,106 @@
       </p:grpSpPr>
       <p:sp>
         <p:nvSpPr>
-          <p:cNvPr id="2" name="Text 0"/>
-          <p:cNvSpPr/>
-          <p:nvPr/>
-        </p:nvSpPr>
-        <p:spPr>
-          <a:xfrm>
-            <a:off x="457200" y="365760"/>
-            <a:ext cx="11247120" cy="274320"/>
-          </a:xfrm>
-          <a:prstGeom prst="rect">
-            <a:avLst/>
-          </a:prstGeom>
-          <a:noFill/>
-          <a:ln/>
-        </p:spPr>
-        <p:txBody>
-          <a:bodyPr wrap="square" rtlCol="0" anchor="ctr"/>
-          <a:lstStyle/>
-          <a:p>
-            <a:pPr indent="0" marL="0">
-              <a:buNone/>
-            </a:pPr>
-            <a:r>
-              <a:rPr lang="en-US" sz="1100" b="1" spc="600" kern="0" dirty="0">
-                <a:solidFill>
-                  <a:srgbClr val="A855F7"/>
-                </a:solidFill>
-                <a:latin typeface="Inter" pitchFamily="34" charset="0"/>
-                <a:ea typeface="Inter" pitchFamily="34" charset="-122"/>
-                <a:cs typeface="Inter" pitchFamily="34" charset="-120"/>
-              </a:rPr>
-              <a:t>FEATURE 14 · SECURITY &amp; DATA</a:t>
-            </a:r>
-            <a:endParaRPr lang="en-US" sz="1100" dirty="0"/>
-          </a:p>
-        </p:txBody>
-      </p:sp>
-      <p:sp>
-        <p:nvSpPr>
-          <p:cNvPr id="3" name="Text 1"/>
-          <p:cNvSpPr/>
-          <p:nvPr/>
-        </p:nvSpPr>
-        <p:spPr>
-          <a:xfrm>
-            <a:off x="457200" y="640080"/>
-            <a:ext cx="11247120" cy="1280160"/>
-          </a:xfrm>
-          <a:prstGeom prst="rect">
-            <a:avLst/>
-          </a:prstGeom>
-          <a:noFill/>
-          <a:ln/>
-        </p:spPr>
-        <p:txBody>
-          <a:bodyPr wrap="square" rtlCol="0" anchor="ctr"/>
-          <a:lstStyle/>
-          <a:p>
-            <a:pPr indent="0" marL="0">
-              <a:buNone/>
-            </a:pPr>
-            <a:r>
-              <a:rPr lang="en-US" sz="3600" b="1" dirty="0">
-                <a:solidFill>
-                  <a:srgbClr val="0F172A"/>
-                </a:solidFill>
-                <a:latin typeface="Inter" pitchFamily="34" charset="0"/>
-                <a:ea typeface="Inter" pitchFamily="34" charset="-122"/>
-                <a:cs typeface="Inter" pitchFamily="34" charset="-120"/>
-              </a:rPr>
-              <a:t>Built for the data you can't lose.</a:t>
-            </a:r>
-            <a:endParaRPr lang="en-US" sz="3600" dirty="0"/>
-          </a:p>
-        </p:txBody>
-      </p:sp>
-      <p:sp>
-        <p:nvSpPr>
-          <p:cNvPr id="4" name="Text 2"/>
-          <p:cNvSpPr/>
-          <p:nvPr/>
-        </p:nvSpPr>
-        <p:spPr>
-          <a:xfrm>
-            <a:off x="457200" y="1828800"/>
-            <a:ext cx="10515600" cy="822960"/>
-          </a:xfrm>
-          <a:prstGeom prst="rect">
-            <a:avLst/>
-          </a:prstGeom>
-          <a:noFill/>
-          <a:ln/>
-        </p:spPr>
-        <p:txBody>
-          <a:bodyPr wrap="square" rtlCol="0" anchor="ctr"/>
-          <a:lstStyle/>
-          <a:p>
-            <a:pPr indent="0" marL="0">
-              <a:buNone/>
-            </a:pPr>
-            <a:r>
-              <a:rPr lang="en-US" sz="1600" dirty="0">
-                <a:solidFill>
-                  <a:srgbClr val="475569"/>
-                </a:solidFill>
-                <a:latin typeface="Inter" pitchFamily="34" charset="0"/>
-                <a:ea typeface="Inter" pitchFamily="34" charset="-122"/>
-                <a:cs typeface="Inter" pitchFamily="34" charset="-120"/>
-              </a:rPr>
-              <a:t>Schools handle minors' photos, medical records, fee histories. AIvenX is engineered around that responsibility.</a:t>
-            </a:r>
-            <a:endParaRPr lang="en-US" sz="1600" dirty="0"/>
-          </a:p>
-        </p:txBody>
-      </p:sp>
-      <p:sp>
-        <p:nvSpPr>
-          <p:cNvPr id="5" name="Shape 3"/>
-          <p:cNvSpPr/>
-          <p:nvPr/>
-        </p:nvSpPr>
-        <p:spPr>
-          <a:xfrm>
-            <a:off x="457200" y="3017520"/>
-            <a:ext cx="3657600" cy="1508760"/>
-          </a:xfrm>
-          <a:prstGeom prst="roundRect">
-            <a:avLst>
-              <a:gd name="adj" fmla="val 6061"/>
-            </a:avLst>
+          <p:cNvPr id="2" name="Shape 0"/>
+          <p:cNvSpPr/>
+          <p:nvPr/>
+        </p:nvSpPr>
+        <p:spPr>
+          <a:xfrm>
+            <a:off x="0" y="0"/>
+            <a:ext cx="12188952" cy="6858000"/>
+          </a:xfrm>
+          <a:prstGeom prst="rect">
+            <a:avLst/>
           </a:prstGeom>
           <a:solidFill>
-            <a:srgbClr val="FFFFFF"/>
+            <a:srgbClr val="22D3EE"/>
           </a:solidFill>
-          <a:ln w="12700">
-            <a:solidFill>
-              <a:srgbClr val="E2E8F0"/>
-            </a:solidFill>
-            <a:prstDash val="solid"/>
-          </a:ln>
-        </p:spPr>
+          <a:ln/>
+        </p:spPr>
+      </p:sp>
+      <p:sp>
+        <p:nvSpPr>
+          <p:cNvPr id="3" name="Shape 1"/>
+          <p:cNvSpPr/>
+          <p:nvPr/>
+        </p:nvSpPr>
+        <p:spPr>
+          <a:xfrm>
+            <a:off x="5486400" y="0"/>
+            <a:ext cx="6702552" cy="6858000"/>
+          </a:xfrm>
+          <a:prstGeom prst="rect">
+            <a:avLst/>
+          </a:prstGeom>
+          <a:solidFill>
+            <a:srgbClr val="A855F7">
+              <a:alpha val="70000"/>
+            </a:srgbClr>
+          </a:solidFill>
+          <a:ln/>
+        </p:spPr>
+      </p:sp>
+      <p:sp>
+        <p:nvSpPr>
+          <p:cNvPr id="4" name="Shape 2"/>
+          <p:cNvSpPr/>
+          <p:nvPr/>
+        </p:nvSpPr>
+        <p:spPr>
+          <a:xfrm>
+            <a:off x="0" y="0"/>
+            <a:ext cx="12188952" cy="6858000"/>
+          </a:xfrm>
+          <a:prstGeom prst="rect">
+            <a:avLst/>
+          </a:prstGeom>
+          <a:solidFill>
+            <a:srgbClr val="0F172A">
+              <a:alpha val="20000"/>
+            </a:srgbClr>
+          </a:solidFill>
+          <a:ln/>
+        </p:spPr>
+      </p:sp>
+      <p:sp>
+        <p:nvSpPr>
+          <p:cNvPr id="5" name="Text 3"/>
+          <p:cNvSpPr/>
+          <p:nvPr/>
+        </p:nvSpPr>
+        <p:spPr>
+          <a:xfrm>
+            <a:off x="548640" y="1463040"/>
+            <a:ext cx="10972800" cy="365760"/>
+          </a:xfrm>
+          <a:prstGeom prst="rect">
+            <a:avLst/>
+          </a:prstGeom>
+          <a:noFill/>
+          <a:ln/>
+        </p:spPr>
+        <p:txBody>
+          <a:bodyPr wrap="square" rtlCol="0" anchor="ctr"/>
+          <a:lstStyle/>
+          <a:p>
+            <a:pPr indent="0" marL="0">
+              <a:buNone/>
+            </a:pPr>
+            <a:r>
+              <a:rPr lang="en-US" sz="1200" b="1" spc="800" kern="0" dirty="0">
+                <a:solidFill>
+                  <a:srgbClr val="FFFFFF"/>
+                </a:solidFill>
+                <a:latin typeface="Inter" pitchFamily="34" charset="0"/>
+                <a:ea typeface="Inter" pitchFamily="34" charset="-122"/>
+                <a:cs typeface="Inter" pitchFamily="34" charset="-120"/>
+              </a:rPr>
+              <a:t>2026 — 2027 ROADMAP</a:t>
+            </a:r>
+            <a:endParaRPr lang="en-US" sz="1200" dirty="0"/>
+          </a:p>
+        </p:txBody>
       </p:sp>
       <p:sp>
         <p:nvSpPr>
@@ -10220,34 +10542,51 @@
         </p:nvSpPr>
         <p:spPr>
           <a:xfrm>
-            <a:off x="640080" y="3200400"/>
-            <a:ext cx="3291840" cy="365760"/>
-          </a:xfrm>
-          <a:prstGeom prst="rect">
-            <a:avLst/>
-          </a:prstGeom>
-          <a:noFill/>
-          <a:ln/>
-        </p:spPr>
-        <p:txBody>
-          <a:bodyPr wrap="square" rtlCol="0" anchor="ctr"/>
-          <a:lstStyle/>
-          <a:p>
-            <a:pPr indent="0" marL="0">
-              <a:buNone/>
-            </a:pPr>
-            <a:r>
-              <a:rPr lang="en-US" sz="1400" b="1" dirty="0">
-                <a:solidFill>
-                  <a:srgbClr val="0F172A"/>
-                </a:solidFill>
-                <a:latin typeface="Inter" pitchFamily="34" charset="0"/>
-                <a:ea typeface="Inter" pitchFamily="34" charset="-122"/>
-                <a:cs typeface="Inter" pitchFamily="34" charset="-120"/>
-              </a:rPr>
-              <a:t>🔒 Multi-tenant secure</a:t>
-            </a:r>
-            <a:endParaRPr lang="en-US" sz="1400" dirty="0"/>
+            <a:off x="548640" y="2011680"/>
+            <a:ext cx="10972800" cy="2286000"/>
+          </a:xfrm>
+          <a:prstGeom prst="rect">
+            <a:avLst/>
+          </a:prstGeom>
+          <a:noFill/>
+          <a:ln/>
+        </p:spPr>
+        <p:txBody>
+          <a:bodyPr wrap="square" rtlCol="0" anchor="ctr"/>
+          <a:lstStyle/>
+          <a:p>
+            <a:pPr indent="0" marL="0">
+              <a:buNone/>
+            </a:pPr>
+            <a:r>
+              <a:rPr lang="en-US" sz="5600" b="1" dirty="0">
+                <a:solidFill>
+                  <a:srgbClr val="FFFFFF"/>
+                </a:solidFill>
+                <a:latin typeface="Inter" pitchFamily="34" charset="0"/>
+                <a:ea typeface="Inter" pitchFamily="34" charset="-122"/>
+                <a:cs typeface="Inter" pitchFamily="34" charset="-120"/>
+              </a:rPr>
+              <a:t>Three new pillars,</a:t>
+            </a:r>
+            <a:endParaRPr lang="en-US" sz="5600" dirty="0"/>
+          </a:p>
+          <a:p>
+            <a:pPr indent="0" marL="0">
+              <a:buNone/>
+            </a:pPr>
+            <a:r>
+              <a:rPr lang="en-US" sz="5600" b="1" dirty="0">
+                <a:solidFill>
+                  <a:srgbClr val="FFFFFF"/>
+                </a:solidFill>
+                <a:latin typeface="Inter" pitchFamily="34" charset="0"/>
+                <a:ea typeface="Inter" pitchFamily="34" charset="-122"/>
+                <a:cs typeface="Inter" pitchFamily="34" charset="-120"/>
+              </a:rPr>
+              <a:t>already on the way.</a:t>
+            </a:r>
+            <a:endParaRPr lang="en-US" sz="5600" dirty="0"/>
           </a:p>
         </p:txBody>
       </p:sp>
@@ -10259,577 +10598,34 @@
         </p:nvSpPr>
         <p:spPr>
           <a:xfrm>
-            <a:off x="640080" y="3566160"/>
-            <a:ext cx="3291840" cy="822960"/>
-          </a:xfrm>
-          <a:prstGeom prst="rect">
-            <a:avLst/>
-          </a:prstGeom>
-          <a:noFill/>
-          <a:ln/>
-        </p:spPr>
-        <p:txBody>
-          <a:bodyPr wrap="square" rtlCol="0" anchor="ctr"/>
-          <a:lstStyle/>
-          <a:p>
-            <a:pPr indent="0" marL="0">
-              <a:lnSpc>
-                <a:spcPts val="1600"/>
-              </a:lnSpc>
-              <a:buNone/>
-            </a:pPr>
-            <a:r>
-              <a:rPr lang="en-US" sz="1100" dirty="0">
-                <a:solidFill>
-                  <a:srgbClr val="475569"/>
-                </a:solidFill>
-                <a:latin typeface="Inter" pitchFamily="34" charset="0"/>
-                <a:ea typeface="Inter" pitchFamily="34" charset="-122"/>
-                <a:cs typeface="Inter" pitchFamily="34" charset="-120"/>
-              </a:rPr>
-              <a:t>Each school is fully isolated at the database level. No cross-tenant leakage.</a:t>
-            </a:r>
-            <a:endParaRPr lang="en-US" sz="1100" dirty="0"/>
-          </a:p>
-        </p:txBody>
-      </p:sp>
-      <p:sp>
-        <p:nvSpPr>
-          <p:cNvPr id="8" name="Shape 6"/>
-          <p:cNvSpPr/>
-          <p:nvPr/>
-        </p:nvSpPr>
-        <p:spPr>
-          <a:xfrm>
-            <a:off x="4343400" y="3017520"/>
-            <a:ext cx="3657600" cy="1508760"/>
-          </a:xfrm>
-          <a:prstGeom prst="roundRect">
-            <a:avLst>
-              <a:gd name="adj" fmla="val 6061"/>
-            </a:avLst>
-          </a:prstGeom>
-          <a:solidFill>
-            <a:srgbClr val="FFFFFF"/>
-          </a:solidFill>
-          <a:ln w="12700">
-            <a:solidFill>
-              <a:srgbClr val="E2E8F0"/>
-            </a:solidFill>
-            <a:prstDash val="solid"/>
-          </a:ln>
-        </p:spPr>
-      </p:sp>
-      <p:sp>
-        <p:nvSpPr>
-          <p:cNvPr id="9" name="Text 7"/>
-          <p:cNvSpPr/>
-          <p:nvPr/>
-        </p:nvSpPr>
-        <p:spPr>
-          <a:xfrm>
-            <a:off x="4526280" y="3200400"/>
-            <a:ext cx="3291840" cy="365760"/>
-          </a:xfrm>
-          <a:prstGeom prst="rect">
-            <a:avLst/>
-          </a:prstGeom>
-          <a:noFill/>
-          <a:ln/>
-        </p:spPr>
-        <p:txBody>
-          <a:bodyPr wrap="square" rtlCol="0" anchor="ctr"/>
-          <a:lstStyle/>
-          <a:p>
-            <a:pPr indent="0" marL="0">
-              <a:buNone/>
-            </a:pPr>
-            <a:r>
-              <a:rPr lang="en-US" sz="1400" b="1" dirty="0">
-                <a:solidFill>
-                  <a:srgbClr val="0F172A"/>
-                </a:solidFill>
-                <a:latin typeface="Inter" pitchFamily="34" charset="0"/>
-                <a:ea typeface="Inter" pitchFamily="34" charset="-122"/>
-                <a:cs typeface="Inter" pitchFamily="34" charset="-120"/>
-              </a:rPr>
-              <a:t>👥 Role-based access</a:t>
-            </a:r>
-            <a:endParaRPr lang="en-US" sz="1400" dirty="0"/>
-          </a:p>
-        </p:txBody>
-      </p:sp>
-      <p:sp>
-        <p:nvSpPr>
-          <p:cNvPr id="10" name="Text 8"/>
-          <p:cNvSpPr/>
-          <p:nvPr/>
-        </p:nvSpPr>
-        <p:spPr>
-          <a:xfrm>
-            <a:off x="4526280" y="3566160"/>
-            <a:ext cx="3291840" cy="822960"/>
-          </a:xfrm>
-          <a:prstGeom prst="rect">
-            <a:avLst/>
-          </a:prstGeom>
-          <a:noFill/>
-          <a:ln/>
-        </p:spPr>
-        <p:txBody>
-          <a:bodyPr wrap="square" rtlCol="0" anchor="ctr"/>
-          <a:lstStyle/>
-          <a:p>
-            <a:pPr indent="0" marL="0">
-              <a:lnSpc>
-                <a:spcPts val="1600"/>
-              </a:lnSpc>
-              <a:buNone/>
-            </a:pPr>
-            <a:r>
-              <a:rPr lang="en-US" sz="1100" dirty="0">
-                <a:solidFill>
-                  <a:srgbClr val="475569"/>
-                </a:solidFill>
-                <a:latin typeface="Inter" pitchFamily="34" charset="0"/>
-                <a:ea typeface="Inter" pitchFamily="34" charset="-122"/>
-                <a:cs typeface="Inter" pitchFamily="34" charset="-120"/>
-              </a:rPr>
-              <a:t>Admin · Principal · Teacher · Student · Parent — every action audited.</a:t>
-            </a:r>
-            <a:endParaRPr lang="en-US" sz="1100" dirty="0"/>
-          </a:p>
-        </p:txBody>
-      </p:sp>
-      <p:sp>
-        <p:nvSpPr>
-          <p:cNvPr id="11" name="Shape 9"/>
-          <p:cNvSpPr/>
-          <p:nvPr/>
-        </p:nvSpPr>
-        <p:spPr>
-          <a:xfrm>
-            <a:off x="8229600" y="3017520"/>
-            <a:ext cx="3657600" cy="1508760"/>
-          </a:xfrm>
-          <a:prstGeom prst="roundRect">
-            <a:avLst>
-              <a:gd name="adj" fmla="val 6061"/>
-            </a:avLst>
-          </a:prstGeom>
-          <a:solidFill>
-            <a:srgbClr val="FFFFFF"/>
-          </a:solidFill>
-          <a:ln w="12700">
-            <a:solidFill>
-              <a:srgbClr val="E2E8F0"/>
-            </a:solidFill>
-            <a:prstDash val="solid"/>
-          </a:ln>
-        </p:spPr>
-      </p:sp>
-      <p:sp>
-        <p:nvSpPr>
-          <p:cNvPr id="12" name="Text 10"/>
-          <p:cNvSpPr/>
-          <p:nvPr/>
-        </p:nvSpPr>
-        <p:spPr>
-          <a:xfrm>
-            <a:off x="8412480" y="3200400"/>
-            <a:ext cx="3291840" cy="365760"/>
-          </a:xfrm>
-          <a:prstGeom prst="rect">
-            <a:avLst/>
-          </a:prstGeom>
-          <a:noFill/>
-          <a:ln/>
-        </p:spPr>
-        <p:txBody>
-          <a:bodyPr wrap="square" rtlCol="0" anchor="ctr"/>
-          <a:lstStyle/>
-          <a:p>
-            <a:pPr indent="0" marL="0">
-              <a:buNone/>
-            </a:pPr>
-            <a:r>
-              <a:rPr lang="en-US" sz="1400" b="1" dirty="0">
-                <a:solidFill>
-                  <a:srgbClr val="0F172A"/>
-                </a:solidFill>
-                <a:latin typeface="Inter" pitchFamily="34" charset="0"/>
-                <a:ea typeface="Inter" pitchFamily="34" charset="-122"/>
-                <a:cs typeface="Inter" pitchFamily="34" charset="-120"/>
-              </a:rPr>
-              <a:t>💾 Daily backups</a:t>
-            </a:r>
-            <a:endParaRPr lang="en-US" sz="1400" dirty="0"/>
-          </a:p>
-        </p:txBody>
-      </p:sp>
-      <p:sp>
-        <p:nvSpPr>
-          <p:cNvPr id="13" name="Text 11"/>
-          <p:cNvSpPr/>
-          <p:nvPr/>
-        </p:nvSpPr>
-        <p:spPr>
-          <a:xfrm>
-            <a:off x="8412480" y="3566160"/>
-            <a:ext cx="3291840" cy="822960"/>
-          </a:xfrm>
-          <a:prstGeom prst="rect">
-            <a:avLst/>
-          </a:prstGeom>
-          <a:noFill/>
-          <a:ln/>
-        </p:spPr>
-        <p:txBody>
-          <a:bodyPr wrap="square" rtlCol="0" anchor="ctr"/>
-          <a:lstStyle/>
-          <a:p>
-            <a:pPr indent="0" marL="0">
-              <a:lnSpc>
-                <a:spcPts val="1600"/>
-              </a:lnSpc>
-              <a:buNone/>
-            </a:pPr>
-            <a:r>
-              <a:rPr lang="en-US" sz="1100" dirty="0">
-                <a:solidFill>
-                  <a:srgbClr val="475569"/>
-                </a:solidFill>
-                <a:latin typeface="Inter" pitchFamily="34" charset="0"/>
-                <a:ea typeface="Inter" pitchFamily="34" charset="-122"/>
-                <a:cs typeface="Inter" pitchFamily="34" charset="-120"/>
-              </a:rPr>
-              <a:t>Encrypted, point-in-time recovery. One-click data export — no lock-in.</a:t>
-            </a:r>
-            <a:endParaRPr lang="en-US" sz="1100" dirty="0"/>
-          </a:p>
-        </p:txBody>
-      </p:sp>
-      <p:sp>
-        <p:nvSpPr>
-          <p:cNvPr id="14" name="Shape 12"/>
-          <p:cNvSpPr/>
-          <p:nvPr/>
-        </p:nvSpPr>
-        <p:spPr>
-          <a:xfrm>
-            <a:off x="457200" y="4709160"/>
-            <a:ext cx="3657600" cy="1508760"/>
-          </a:xfrm>
-          <a:prstGeom prst="roundRect">
-            <a:avLst>
-              <a:gd name="adj" fmla="val 6061"/>
-            </a:avLst>
-          </a:prstGeom>
-          <a:solidFill>
-            <a:srgbClr val="FFFFFF"/>
-          </a:solidFill>
-          <a:ln w="12700">
-            <a:solidFill>
-              <a:srgbClr val="E2E8F0"/>
-            </a:solidFill>
-            <a:prstDash val="solid"/>
-          </a:ln>
-        </p:spPr>
-      </p:sp>
-      <p:sp>
-        <p:nvSpPr>
-          <p:cNvPr id="15" name="Text 13"/>
-          <p:cNvSpPr/>
-          <p:nvPr/>
-        </p:nvSpPr>
-        <p:spPr>
-          <a:xfrm>
-            <a:off x="640080" y="4892040"/>
-            <a:ext cx="3291840" cy="365760"/>
-          </a:xfrm>
-          <a:prstGeom prst="rect">
-            <a:avLst/>
-          </a:prstGeom>
-          <a:noFill/>
-          <a:ln/>
-        </p:spPr>
-        <p:txBody>
-          <a:bodyPr wrap="square" rtlCol="0" anchor="ctr"/>
-          <a:lstStyle/>
-          <a:p>
-            <a:pPr indent="0" marL="0">
-              <a:buNone/>
-            </a:pPr>
-            <a:r>
-              <a:rPr lang="en-US" sz="1400" b="1" dirty="0">
-                <a:solidFill>
-                  <a:srgbClr val="0F172A"/>
-                </a:solidFill>
-                <a:latin typeface="Inter" pitchFamily="34" charset="0"/>
-                <a:ea typeface="Inter" pitchFamily="34" charset="-122"/>
-                <a:cs typeface="Inter" pitchFamily="34" charset="-120"/>
-              </a:rPr>
-              <a:t>🇮🇳 Hosted in India</a:t>
-            </a:r>
-            <a:endParaRPr lang="en-US" sz="1400" dirty="0"/>
-          </a:p>
-        </p:txBody>
-      </p:sp>
-      <p:sp>
-        <p:nvSpPr>
-          <p:cNvPr id="16" name="Text 14"/>
-          <p:cNvSpPr/>
-          <p:nvPr/>
-        </p:nvSpPr>
-        <p:spPr>
-          <a:xfrm>
-            <a:off x="640080" y="5257800"/>
-            <a:ext cx="3291840" cy="822960"/>
-          </a:xfrm>
-          <a:prstGeom prst="rect">
-            <a:avLst/>
-          </a:prstGeom>
-          <a:noFill/>
-          <a:ln/>
-        </p:spPr>
-        <p:txBody>
-          <a:bodyPr wrap="square" rtlCol="0" anchor="ctr"/>
-          <a:lstStyle/>
-          <a:p>
-            <a:pPr indent="0" marL="0">
-              <a:lnSpc>
-                <a:spcPts val="1600"/>
-              </a:lnSpc>
-              <a:buNone/>
-            </a:pPr>
-            <a:r>
-              <a:rPr lang="en-US" sz="1100" dirty="0">
-                <a:solidFill>
-                  <a:srgbClr val="475569"/>
-                </a:solidFill>
-                <a:latin typeface="Inter" pitchFamily="34" charset="0"/>
-                <a:ea typeface="Inter" pitchFamily="34" charset="-122"/>
-                <a:cs typeface="Inter" pitchFamily="34" charset="-120"/>
-              </a:rPr>
-              <a:t>Data residency, low latency, DPDP-aligned for Indian schools.</a:t>
-            </a:r>
-            <a:endParaRPr lang="en-US" sz="1100" dirty="0"/>
-          </a:p>
-        </p:txBody>
-      </p:sp>
-      <p:sp>
-        <p:nvSpPr>
-          <p:cNvPr id="17" name="Shape 15"/>
-          <p:cNvSpPr/>
-          <p:nvPr/>
-        </p:nvSpPr>
-        <p:spPr>
-          <a:xfrm>
-            <a:off x="4343400" y="4709160"/>
-            <a:ext cx="3657600" cy="1508760"/>
-          </a:xfrm>
-          <a:prstGeom prst="roundRect">
-            <a:avLst>
-              <a:gd name="adj" fmla="val 6061"/>
-            </a:avLst>
-          </a:prstGeom>
-          <a:solidFill>
-            <a:srgbClr val="FFFFFF"/>
-          </a:solidFill>
-          <a:ln w="12700">
-            <a:solidFill>
-              <a:srgbClr val="E2E8F0"/>
-            </a:solidFill>
-            <a:prstDash val="solid"/>
-          </a:ln>
-        </p:spPr>
-      </p:sp>
-      <p:sp>
-        <p:nvSpPr>
-          <p:cNvPr id="18" name="Text 16"/>
-          <p:cNvSpPr/>
-          <p:nvPr/>
-        </p:nvSpPr>
-        <p:spPr>
-          <a:xfrm>
-            <a:off x="4526280" y="4892040"/>
-            <a:ext cx="3291840" cy="365760"/>
-          </a:xfrm>
-          <a:prstGeom prst="rect">
-            <a:avLst/>
-          </a:prstGeom>
-          <a:noFill/>
-          <a:ln/>
-        </p:spPr>
-        <p:txBody>
-          <a:bodyPr wrap="square" rtlCol="0" anchor="ctr"/>
-          <a:lstStyle/>
-          <a:p>
-            <a:pPr indent="0" marL="0">
-              <a:buNone/>
-            </a:pPr>
-            <a:r>
-              <a:rPr lang="en-US" sz="1400" b="1" dirty="0">
-                <a:solidFill>
-                  <a:srgbClr val="0F172A"/>
-                </a:solidFill>
-                <a:latin typeface="Inter" pitchFamily="34" charset="0"/>
-                <a:ea typeface="Inter" pitchFamily="34" charset="-122"/>
-                <a:cs typeface="Inter" pitchFamily="34" charset="-120"/>
-              </a:rPr>
-              <a:t>🛡️ Privacy-first AI</a:t>
-            </a:r>
-            <a:endParaRPr lang="en-US" sz="1400" dirty="0"/>
-          </a:p>
-        </p:txBody>
-      </p:sp>
-      <p:sp>
-        <p:nvSpPr>
-          <p:cNvPr id="19" name="Text 17"/>
-          <p:cNvSpPr/>
-          <p:nvPr/>
-        </p:nvSpPr>
-        <p:spPr>
-          <a:xfrm>
-            <a:off x="4526280" y="5257800"/>
-            <a:ext cx="3291840" cy="822960"/>
-          </a:xfrm>
-          <a:prstGeom prst="rect">
-            <a:avLst/>
-          </a:prstGeom>
-          <a:noFill/>
-          <a:ln/>
-        </p:spPr>
-        <p:txBody>
-          <a:bodyPr wrap="square" rtlCol="0" anchor="ctr"/>
-          <a:lstStyle/>
-          <a:p>
-            <a:pPr indent="0" marL="0">
-              <a:lnSpc>
-                <a:spcPts val="1600"/>
-              </a:lnSpc>
-              <a:buNone/>
-            </a:pPr>
-            <a:r>
-              <a:rPr lang="en-US" sz="1100" dirty="0">
-                <a:solidFill>
-                  <a:srgbClr val="475569"/>
-                </a:solidFill>
-                <a:latin typeface="Inter" pitchFamily="34" charset="0"/>
-                <a:ea typeface="Inter" pitchFamily="34" charset="-122"/>
-                <a:cs typeface="Inter" pitchFamily="34" charset="-120"/>
-              </a:rPr>
-              <a:t>Face embeddings only. Student data never trains third-party models.</a:t>
-            </a:r>
-            <a:endParaRPr lang="en-US" sz="1100" dirty="0"/>
-          </a:p>
-        </p:txBody>
-      </p:sp>
-      <p:sp>
-        <p:nvSpPr>
-          <p:cNvPr id="20" name="Shape 18"/>
-          <p:cNvSpPr/>
-          <p:nvPr/>
-        </p:nvSpPr>
-        <p:spPr>
-          <a:xfrm>
-            <a:off x="8229600" y="4709160"/>
-            <a:ext cx="3657600" cy="1508760"/>
-          </a:xfrm>
-          <a:prstGeom prst="roundRect">
-            <a:avLst>
-              <a:gd name="adj" fmla="val 6061"/>
-            </a:avLst>
-          </a:prstGeom>
-          <a:solidFill>
-            <a:srgbClr val="FFFFFF"/>
-          </a:solidFill>
-          <a:ln w="12700">
-            <a:solidFill>
-              <a:srgbClr val="E2E8F0"/>
-            </a:solidFill>
-            <a:prstDash val="solid"/>
-          </a:ln>
-        </p:spPr>
-      </p:sp>
-      <p:sp>
-        <p:nvSpPr>
-          <p:cNvPr id="21" name="Text 19"/>
-          <p:cNvSpPr/>
-          <p:nvPr/>
-        </p:nvSpPr>
-        <p:spPr>
-          <a:xfrm>
-            <a:off x="8412480" y="4892040"/>
-            <a:ext cx="3291840" cy="365760"/>
-          </a:xfrm>
-          <a:prstGeom prst="rect">
-            <a:avLst/>
-          </a:prstGeom>
-          <a:noFill/>
-          <a:ln/>
-        </p:spPr>
-        <p:txBody>
-          <a:bodyPr wrap="square" rtlCol="0" anchor="ctr"/>
-          <a:lstStyle/>
-          <a:p>
-            <a:pPr indent="0" marL="0">
-              <a:buNone/>
-            </a:pPr>
-            <a:r>
-              <a:rPr lang="en-US" sz="1400" b="1" dirty="0">
-                <a:solidFill>
-                  <a:srgbClr val="0F172A"/>
-                </a:solidFill>
-                <a:latin typeface="Inter" pitchFamily="34" charset="0"/>
-                <a:ea typeface="Inter" pitchFamily="34" charset="-122"/>
-                <a:cs typeface="Inter" pitchFamily="34" charset="-120"/>
-              </a:rPr>
-              <a:t>📋 Audit logs</a:t>
-            </a:r>
-            <a:endParaRPr lang="en-US" sz="1400" dirty="0"/>
-          </a:p>
-        </p:txBody>
-      </p:sp>
-      <p:sp>
-        <p:nvSpPr>
-          <p:cNvPr id="22" name="Text 20"/>
-          <p:cNvSpPr/>
-          <p:nvPr/>
-        </p:nvSpPr>
-        <p:spPr>
-          <a:xfrm>
-            <a:off x="8412480" y="5257800"/>
-            <a:ext cx="3291840" cy="822960"/>
-          </a:xfrm>
-          <a:prstGeom prst="rect">
-            <a:avLst/>
-          </a:prstGeom>
-          <a:noFill/>
-          <a:ln/>
-        </p:spPr>
-        <p:txBody>
-          <a:bodyPr wrap="square" rtlCol="0" anchor="ctr"/>
-          <a:lstStyle/>
-          <a:p>
-            <a:pPr indent="0" marL="0">
-              <a:lnSpc>
-                <a:spcPts val="1600"/>
-              </a:lnSpc>
-              <a:buNone/>
-            </a:pPr>
-            <a:r>
-              <a:rPr lang="en-US" sz="1100" dirty="0">
-                <a:solidFill>
-                  <a:srgbClr val="475569"/>
-                </a:solidFill>
-                <a:latin typeface="Inter" pitchFamily="34" charset="0"/>
-                <a:ea typeface="Inter" pitchFamily="34" charset="-122"/>
-                <a:cs typeface="Inter" pitchFamily="34" charset="-120"/>
-              </a:rPr>
-              <a:t>Every login, edit, export logged for compliance and forensics.</a:t>
-            </a:r>
-            <a:endParaRPr lang="en-US" sz="1100" dirty="0"/>
+            <a:off x="548640" y="5029200"/>
+            <a:ext cx="10972800" cy="914400"/>
+          </a:xfrm>
+          <a:prstGeom prst="rect">
+            <a:avLst/>
+          </a:prstGeom>
+          <a:noFill/>
+          <a:ln/>
+        </p:spPr>
+        <p:txBody>
+          <a:bodyPr wrap="square" rtlCol="0" anchor="ctr"/>
+          <a:lstStyle/>
+          <a:p>
+            <a:pPr indent="0" marL="0">
+              <a:buNone/>
+            </a:pPr>
+            <a:r>
+              <a:rPr lang="en-US" sz="1800" dirty="0">
+                <a:solidFill>
+                  <a:srgbClr val="FFFFFF"/>
+                </a:solidFill>
+                <a:latin typeface="Inter" pitchFamily="34" charset="0"/>
+                <a:ea typeface="Inter" pitchFamily="34" charset="-122"/>
+                <a:cs typeface="Inter" pitchFamily="34" charset="-120"/>
+              </a:rPr>
+              <a:t>All included in your subscription when they ship — no upsell, no module fee.</a:t>
+            </a:r>
+            <a:endParaRPr lang="en-US" sz="1800" dirty="0"/>
           </a:p>
         </p:txBody>
       </p:sp>
@@ -10891,7 +10687,7 @@
                 <a:ea typeface="Inter" pitchFamily="34" charset="-122"/>
                 <a:cs typeface="Inter" pitchFamily="34" charset="-120"/>
               </a:rPr>
-              <a:t>EDITIONS</a:t>
+              <a:t>ROADMAP · AIVENX GUARDIAN</a:t>
             </a:r>
             <a:endParaRPr lang="en-US" sz="1100" dirty="0"/>
           </a:p>
@@ -10930,7 +10726,7 @@
                 <a:ea typeface="Inter" pitchFamily="34" charset="-122"/>
                 <a:cs typeface="Inter" pitchFamily="34" charset="-120"/>
               </a:rPr>
-              <a:t>Pick the edition that fits your school.</a:t>
+              <a:t>A safety net around every student.</a:t>
             </a:r>
             <a:endParaRPr lang="en-US" sz="3600" dirty="0"/>
           </a:p>
@@ -10938,26 +10734,65 @@
       </p:sp>
       <p:sp>
         <p:nvSpPr>
-          <p:cNvPr id="4" name="Shape 2"/>
-          <p:cNvSpPr/>
-          <p:nvPr/>
-        </p:nvSpPr>
-        <p:spPr>
-          <a:xfrm>
-            <a:off x="457200" y="2286000"/>
-            <a:ext cx="3657600" cy="3840480"/>
+          <p:cNvPr id="4" name="Text 2"/>
+          <p:cNvSpPr/>
+          <p:nvPr/>
+        </p:nvSpPr>
+        <p:spPr>
+          <a:xfrm>
+            <a:off x="457200" y="1828800"/>
+            <a:ext cx="10515600" cy="822960"/>
+          </a:xfrm>
+          <a:prstGeom prst="rect">
+            <a:avLst/>
+          </a:prstGeom>
+          <a:noFill/>
+          <a:ln/>
+        </p:spPr>
+        <p:txBody>
+          <a:bodyPr wrap="square" rtlCol="0" anchor="ctr"/>
+          <a:lstStyle/>
+          <a:p>
+            <a:pPr indent="0" marL="0">
+              <a:buNone/>
+            </a:pPr>
+            <a:r>
+              <a:rPr lang="en-US" sz="1600" dirty="0">
+                <a:solidFill>
+                  <a:srgbClr val="475569"/>
+                </a:solidFill>
+                <a:latin typeface="Inter" pitchFamily="34" charset="0"/>
+                <a:ea typeface="Inter" pitchFamily="34" charset="-122"/>
+                <a:cs typeface="Inter" pitchFamily="34" charset="-120"/>
+              </a:rPr>
+              <a:t>A single suite covering the bus, the gate, and the moments in between. Beta now in two pilot schools; pilot rollout H2 2026.</a:t>
+            </a:r>
+            <a:endParaRPr lang="en-US" sz="1600" dirty="0"/>
+          </a:p>
+        </p:txBody>
+      </p:sp>
+      <p:sp>
+        <p:nvSpPr>
+          <p:cNvPr id="5" name="Shape 3"/>
+          <p:cNvSpPr/>
+          <p:nvPr/>
+        </p:nvSpPr>
+        <p:spPr>
+          <a:xfrm>
+            <a:off x="457200" y="2926080"/>
+            <a:ext cx="3657600" cy="2743200"/>
           </a:xfrm>
           <a:prstGeom prst="roundRect">
             <a:avLst>
-              <a:gd name="adj" fmla="val 3750"/>
+              <a:gd name="adj" fmla="val 5000"/>
             </a:avLst>
           </a:prstGeom>
           <a:solidFill>
             <a:srgbClr val="FFFFFF"/>
           </a:solidFill>
-          <a:ln w="12700">
+          <a:ln w="25400">
             <a:solidFill>
-              <a:srgbClr val="E2E8F0"/>
+              <a:srgbClr val="22D3EE"/>
             </a:solidFill>
             <a:prstDash val="solid"/>
           </a:ln>
@@ -10965,79 +10800,40 @@
       </p:sp>
       <p:sp>
         <p:nvSpPr>
-          <p:cNvPr id="5" name="Text 3"/>
-          <p:cNvSpPr/>
-          <p:nvPr/>
-        </p:nvSpPr>
-        <p:spPr>
-          <a:xfrm>
-            <a:off x="685800" y="2423160"/>
-            <a:ext cx="3200400" cy="274320"/>
-          </a:xfrm>
-          <a:prstGeom prst="rect">
-            <a:avLst/>
-          </a:prstGeom>
-          <a:noFill/>
-          <a:ln/>
-        </p:spPr>
-        <p:txBody>
-          <a:bodyPr wrap="square" rtlCol="0" anchor="ctr"/>
-          <a:lstStyle/>
-          <a:p>
-            <a:pPr indent="0" marL="0">
-              <a:buNone/>
-            </a:pPr>
-            <a:r>
-              <a:rPr lang="en-US" sz="900" b="1" spc="400" kern="0" dirty="0">
-                <a:solidFill>
-                  <a:srgbClr val="64748B"/>
-                </a:solidFill>
-                <a:latin typeface="Inter" pitchFamily="34" charset="0"/>
-                <a:ea typeface="Inter" pitchFamily="34" charset="-122"/>
-                <a:cs typeface="Inter" pitchFamily="34" charset="-120"/>
-              </a:rPr>
-              <a:t>STARTER</a:t>
-            </a:r>
-            <a:endParaRPr lang="en-US" sz="900" dirty="0"/>
-          </a:p>
-        </p:txBody>
-      </p:sp>
-      <p:sp>
-        <p:nvSpPr>
           <p:cNvPr id="6" name="Text 4"/>
           <p:cNvSpPr/>
           <p:nvPr/>
         </p:nvSpPr>
         <p:spPr>
           <a:xfrm>
-            <a:off x="685800" y="2743200"/>
-            <a:ext cx="3200400" cy="548640"/>
-          </a:xfrm>
-          <a:prstGeom prst="rect">
-            <a:avLst/>
-          </a:prstGeom>
-          <a:noFill/>
-          <a:ln/>
-        </p:spPr>
-        <p:txBody>
-          <a:bodyPr wrap="square" rtlCol="0" anchor="ctr"/>
-          <a:lstStyle/>
-          <a:p>
-            <a:pPr indent="0" marL="0">
-              <a:buNone/>
-            </a:pPr>
-            <a:r>
-              <a:rPr lang="en-US" sz="2200" b="1" dirty="0">
-                <a:solidFill>
-                  <a:srgbClr val="0F172A"/>
-                </a:solidFill>
-                <a:latin typeface="Inter" pitchFamily="34" charset="0"/>
-                <a:ea typeface="Inter" pitchFamily="34" charset="-122"/>
-                <a:cs typeface="Inter" pitchFamily="34" charset="-120"/>
-              </a:rPr>
-              <a:t>Operate</a:t>
-            </a:r>
-            <a:endParaRPr lang="en-US" sz="2200" dirty="0"/>
+            <a:off x="640080" y="3063240"/>
+            <a:ext cx="3291840" cy="411480"/>
+          </a:xfrm>
+          <a:prstGeom prst="rect">
+            <a:avLst/>
+          </a:prstGeom>
+          <a:noFill/>
+          <a:ln/>
+        </p:spPr>
+        <p:txBody>
+          <a:bodyPr wrap="square" rtlCol="0" anchor="ctr"/>
+          <a:lstStyle/>
+          <a:p>
+            <a:pPr indent="0" marL="0">
+              <a:buNone/>
+            </a:pPr>
+            <a:r>
+              <a:rPr lang="en-US" sz="1600" b="1" dirty="0">
+                <a:solidFill>
+                  <a:srgbClr val="0F172A"/>
+                </a:solidFill>
+                <a:latin typeface="Inter" pitchFamily="34" charset="0"/>
+                <a:ea typeface="Inter" pitchFamily="34" charset="-122"/>
+                <a:cs typeface="Inter" pitchFamily="34" charset="-120"/>
+              </a:rPr>
+              <a:t>🚌 Live bus tracking</a:t>
+            </a:r>
+            <a:endParaRPr lang="en-US" sz="1600" dirty="0"/>
           </a:p>
         </p:txBody>
       </p:sp>
@@ -11049,8 +10845,8 @@
         </p:nvSpPr>
         <p:spPr>
           <a:xfrm>
-            <a:off x="685800" y="3383280"/>
-            <a:ext cx="3200400" cy="2560320"/>
+            <a:off x="640080" y="3520440"/>
+            <a:ext cx="3291840" cy="2103120"/>
           </a:xfrm>
           <a:prstGeom prst="rect">
             <a:avLst/>
@@ -11078,7 +10874,7 @@
                 <a:ea typeface="Inter" pitchFamily="34" charset="-122"/>
                 <a:cs typeface="Inter" pitchFamily="34" charset="-120"/>
               </a:rPr>
-              <a:t>Admissions &amp; fees</a:t>
+              <a:t>GPS pings every 10 sec</a:t>
             </a:r>
             <a:endParaRPr lang="en-US" sz="1100" dirty="0"/>
           </a:p>
@@ -11099,7 +10895,7 @@
                 <a:ea typeface="Inter" pitchFamily="34" charset="-122"/>
                 <a:cs typeface="Inter" pitchFamily="34" charset="-120"/>
               </a:rPr>
-              <a:t>HR &amp; payroll</a:t>
+              <a:t>Boarding / alighting verification</a:t>
             </a:r>
             <a:endParaRPr lang="en-US" sz="1100" dirty="0"/>
           </a:p>
@@ -11120,7 +10916,7 @@
                 <a:ea typeface="Inter" pitchFamily="34" charset="-122"/>
                 <a:cs typeface="Inter" pitchFamily="34" charset="-120"/>
               </a:rPr>
-              <a:t>Timetable &amp; exams</a:t>
+              <a:t>Parent ETA on the home screen</a:t>
             </a:r>
             <a:endParaRPr lang="en-US" sz="1100" dirty="0"/>
           </a:p>
@@ -11141,7 +10937,7 @@
                 <a:ea typeface="Inter" pitchFamily="34" charset="-122"/>
                 <a:cs typeface="Inter" pitchFamily="34" charset="-120"/>
               </a:rPr>
-              <a:t>Report cards</a:t>
+              <a:t>Route deviation alerts</a:t>
             </a:r>
             <a:endParaRPr lang="en-US" sz="1100" dirty="0"/>
           </a:p>
@@ -11162,10 +10958,98 @@
                 <a:ea typeface="Inter" pitchFamily="34" charset="-122"/>
                 <a:cs typeface="Inter" pitchFamily="34" charset="-120"/>
               </a:rPr>
-              <a:t>Library · Transport · Hostel</a:t>
+              <a:t>Driver app for pickup confirmation</a:t>
             </a:r>
             <a:endParaRPr lang="en-US" sz="1100" dirty="0"/>
           </a:p>
+        </p:txBody>
+      </p:sp>
+      <p:sp>
+        <p:nvSpPr>
+          <p:cNvPr id="8" name="Shape 6"/>
+          <p:cNvSpPr/>
+          <p:nvPr/>
+        </p:nvSpPr>
+        <p:spPr>
+          <a:xfrm>
+            <a:off x="4343400" y="2926080"/>
+            <a:ext cx="3657600" cy="2743200"/>
+          </a:xfrm>
+          <a:prstGeom prst="roundRect">
+            <a:avLst>
+              <a:gd name="adj" fmla="val 5000"/>
+            </a:avLst>
+          </a:prstGeom>
+          <a:solidFill>
+            <a:srgbClr val="FFFFFF"/>
+          </a:solidFill>
+          <a:ln w="25400">
+            <a:solidFill>
+              <a:srgbClr val="22D3EE"/>
+            </a:solidFill>
+            <a:prstDash val="solid"/>
+          </a:ln>
+        </p:spPr>
+      </p:sp>
+      <p:sp>
+        <p:nvSpPr>
+          <p:cNvPr id="9" name="Text 7"/>
+          <p:cNvSpPr/>
+          <p:nvPr/>
+        </p:nvSpPr>
+        <p:spPr>
+          <a:xfrm>
+            <a:off x="4526280" y="3063240"/>
+            <a:ext cx="3291840" cy="411480"/>
+          </a:xfrm>
+          <a:prstGeom prst="rect">
+            <a:avLst/>
+          </a:prstGeom>
+          <a:noFill/>
+          <a:ln/>
+        </p:spPr>
+        <p:txBody>
+          <a:bodyPr wrap="square" rtlCol="0" anchor="ctr"/>
+          <a:lstStyle/>
+          <a:p>
+            <a:pPr indent="0" marL="0">
+              <a:buNone/>
+            </a:pPr>
+            <a:r>
+              <a:rPr lang="en-US" sz="1600" b="1" dirty="0">
+                <a:solidFill>
+                  <a:srgbClr val="0F172A"/>
+                </a:solidFill>
+                <a:latin typeface="Inter" pitchFamily="34" charset="0"/>
+                <a:ea typeface="Inter" pitchFamily="34" charset="-122"/>
+                <a:cs typeface="Inter" pitchFamily="34" charset="-120"/>
+              </a:rPr>
+              <a:t>🚪 Campus gate access</a:t>
+            </a:r>
+            <a:endParaRPr lang="en-US" sz="1600" dirty="0"/>
+          </a:p>
+        </p:txBody>
+      </p:sp>
+      <p:sp>
+        <p:nvSpPr>
+          <p:cNvPr id="10" name="Text 8"/>
+          <p:cNvSpPr/>
+          <p:nvPr/>
+        </p:nvSpPr>
+        <p:spPr>
+          <a:xfrm>
+            <a:off x="4526280" y="3520440"/>
+            <a:ext cx="3291840" cy="2103120"/>
+          </a:xfrm>
+          <a:prstGeom prst="rect">
+            <a:avLst/>
+          </a:prstGeom>
+          <a:noFill/>
+          <a:ln/>
+        </p:spPr>
+        <p:txBody>
+          <a:bodyPr wrap="square" rtlCol="0" anchor="ctr"/>
+          <a:lstStyle/>
           <a:p>
             <a:pPr marL="342900" indent="-342900">
               <a:lnSpc>
@@ -11183,137 +11067,10 @@
                 <a:ea typeface="Inter" pitchFamily="34" charset="-122"/>
                 <a:cs typeface="Inter" pitchFamily="34" charset="-120"/>
               </a:rPr>
-              <a:t>Parent portal</a:t>
+              <a:t>Face-AI in/out at every gate</a:t>
             </a:r>
             <a:endParaRPr lang="en-US" sz="1100" dirty="0"/>
           </a:p>
-        </p:txBody>
-      </p:sp>
-      <p:sp>
-        <p:nvSpPr>
-          <p:cNvPr id="8" name="Shape 6"/>
-          <p:cNvSpPr/>
-          <p:nvPr/>
-        </p:nvSpPr>
-        <p:spPr>
-          <a:xfrm>
-            <a:off x="4343400" y="2286000"/>
-            <a:ext cx="3657600" cy="3840480"/>
-          </a:xfrm>
-          <a:prstGeom prst="roundRect">
-            <a:avLst>
-              <a:gd name="adj" fmla="val 3750"/>
-            </a:avLst>
-          </a:prstGeom>
-          <a:solidFill>
-            <a:srgbClr val="FFFFFF"/>
-          </a:solidFill>
-          <a:ln w="25400">
-            <a:solidFill>
-              <a:srgbClr val="A855F7"/>
-            </a:solidFill>
-            <a:prstDash val="solid"/>
-          </a:ln>
-        </p:spPr>
-      </p:sp>
-      <p:sp>
-        <p:nvSpPr>
-          <p:cNvPr id="9" name="Text 7"/>
-          <p:cNvSpPr/>
-          <p:nvPr/>
-        </p:nvSpPr>
-        <p:spPr>
-          <a:xfrm>
-            <a:off x="4572000" y="2423160"/>
-            <a:ext cx="3200400" cy="274320"/>
-          </a:xfrm>
-          <a:prstGeom prst="rect">
-            <a:avLst/>
-          </a:prstGeom>
-          <a:noFill/>
-          <a:ln/>
-        </p:spPr>
-        <p:txBody>
-          <a:bodyPr wrap="square" rtlCol="0" anchor="ctr"/>
-          <a:lstStyle/>
-          <a:p>
-            <a:pPr indent="0" marL="0">
-              <a:buNone/>
-            </a:pPr>
-            <a:r>
-              <a:rPr lang="en-US" sz="900" b="1" spc="400" kern="0" dirty="0">
-                <a:solidFill>
-                  <a:srgbClr val="A855F7"/>
-                </a:solidFill>
-                <a:latin typeface="Inter" pitchFamily="34" charset="0"/>
-                <a:ea typeface="Inter" pitchFamily="34" charset="-122"/>
-                <a:cs typeface="Inter" pitchFamily="34" charset="-120"/>
-              </a:rPr>
-              <a:t>MOST POPULAR</a:t>
-            </a:r>
-            <a:endParaRPr lang="en-US" sz="900" dirty="0"/>
-          </a:p>
-        </p:txBody>
-      </p:sp>
-      <p:sp>
-        <p:nvSpPr>
-          <p:cNvPr id="10" name="Text 8"/>
-          <p:cNvSpPr/>
-          <p:nvPr/>
-        </p:nvSpPr>
-        <p:spPr>
-          <a:xfrm>
-            <a:off x="4572000" y="2743200"/>
-            <a:ext cx="3200400" cy="548640"/>
-          </a:xfrm>
-          <a:prstGeom prst="rect">
-            <a:avLst/>
-          </a:prstGeom>
-          <a:noFill/>
-          <a:ln/>
-        </p:spPr>
-        <p:txBody>
-          <a:bodyPr wrap="square" rtlCol="0" anchor="ctr"/>
-          <a:lstStyle/>
-          <a:p>
-            <a:pPr indent="0" marL="0">
-              <a:buNone/>
-            </a:pPr>
-            <a:r>
-              <a:rPr lang="en-US" sz="2200" b="1" dirty="0">
-                <a:solidFill>
-                  <a:srgbClr val="0F172A"/>
-                </a:solidFill>
-                <a:latin typeface="Inter" pitchFamily="34" charset="0"/>
-                <a:ea typeface="Inter" pitchFamily="34" charset="-122"/>
-                <a:cs typeface="Inter" pitchFamily="34" charset="-120"/>
-              </a:rPr>
-              <a:t>Operate + Cortex</a:t>
-            </a:r>
-            <a:endParaRPr lang="en-US" sz="2200" dirty="0"/>
-          </a:p>
-        </p:txBody>
-      </p:sp>
-      <p:sp>
-        <p:nvSpPr>
-          <p:cNvPr id="11" name="Text 9"/>
-          <p:cNvSpPr/>
-          <p:nvPr/>
-        </p:nvSpPr>
-        <p:spPr>
-          <a:xfrm>
-            <a:off x="4572000" y="3383280"/>
-            <a:ext cx="3200400" cy="2560320"/>
-          </a:xfrm>
-          <a:prstGeom prst="rect">
-            <a:avLst/>
-          </a:prstGeom>
-          <a:noFill/>
-          <a:ln/>
-        </p:spPr>
-        <p:txBody>
-          <a:bodyPr wrap="square" rtlCol="0" anchor="ctr"/>
-          <a:lstStyle/>
           <a:p>
             <a:pPr marL="342900" indent="-342900">
               <a:lnSpc>
@@ -11331,7 +11088,7 @@
                 <a:ea typeface="Inter" pitchFamily="34" charset="-122"/>
                 <a:cs typeface="Inter" pitchFamily="34" charset="-120"/>
               </a:rPr>
-              <a:t>Everything in Operate</a:t>
+              <a:t>Live who's-on-campus headcount</a:t>
             </a:r>
             <a:endParaRPr lang="en-US" sz="1100" dirty="0"/>
           </a:p>
@@ -11352,7 +11109,7 @@
                 <a:ea typeface="Inter" pitchFamily="34" charset="-122"/>
                 <a:cs typeface="Inter" pitchFamily="34" charset="-120"/>
               </a:rPr>
-              <a:t>Chapter Generator</a:t>
+              <a:t>Visitor sign-in with audit trail</a:t>
             </a:r>
             <a:endParaRPr lang="en-US" sz="1100" dirty="0"/>
           </a:p>
@@ -11373,7 +11130,7 @@
                 <a:ea typeface="Inter" pitchFamily="34" charset="-122"/>
                 <a:cs typeface="Inter" pitchFamily="34" charset="-120"/>
               </a:rPr>
-              <a:t>150k Question Bank</a:t>
+              <a:t>Unknown-face flagging</a:t>
             </a:r>
             <a:endParaRPr lang="en-US" sz="1100" dirty="0"/>
           </a:p>
@@ -11394,10 +11151,98 @@
                 <a:ea typeface="Inter" pitchFamily="34" charset="-122"/>
                 <a:cs typeface="Inter" pitchFamily="34" charset="-120"/>
               </a:rPr>
-              <a:t>Assessment Creator</a:t>
+              <a:t>Per-period attendance reconciliation</a:t>
             </a:r>
             <a:endParaRPr lang="en-US" sz="1100" dirty="0"/>
           </a:p>
+        </p:txBody>
+      </p:sp>
+      <p:sp>
+        <p:nvSpPr>
+          <p:cNvPr id="11" name="Shape 9"/>
+          <p:cNvSpPr/>
+          <p:nvPr/>
+        </p:nvSpPr>
+        <p:spPr>
+          <a:xfrm>
+            <a:off x="8229600" y="2926080"/>
+            <a:ext cx="3657600" cy="2743200"/>
+          </a:xfrm>
+          <a:prstGeom prst="roundRect">
+            <a:avLst>
+              <a:gd name="adj" fmla="val 5000"/>
+            </a:avLst>
+          </a:prstGeom>
+          <a:solidFill>
+            <a:srgbClr val="FFFFFF"/>
+          </a:solidFill>
+          <a:ln w="25400">
+            <a:solidFill>
+              <a:srgbClr val="22D3EE"/>
+            </a:solidFill>
+            <a:prstDash val="solid"/>
+          </a:ln>
+        </p:spPr>
+      </p:sp>
+      <p:sp>
+        <p:nvSpPr>
+          <p:cNvPr id="12" name="Text 10"/>
+          <p:cNvSpPr/>
+          <p:nvPr/>
+        </p:nvSpPr>
+        <p:spPr>
+          <a:xfrm>
+            <a:off x="8412480" y="3063240"/>
+            <a:ext cx="3291840" cy="411480"/>
+          </a:xfrm>
+          <a:prstGeom prst="rect">
+            <a:avLst/>
+          </a:prstGeom>
+          <a:noFill/>
+          <a:ln/>
+        </p:spPr>
+        <p:txBody>
+          <a:bodyPr wrap="square" rtlCol="0" anchor="ctr"/>
+          <a:lstStyle/>
+          <a:p>
+            <a:pPr indent="0" marL="0">
+              <a:buNone/>
+            </a:pPr>
+            <a:r>
+              <a:rPr lang="en-US" sz="1600" b="1" dirty="0">
+                <a:solidFill>
+                  <a:srgbClr val="0F172A"/>
+                </a:solidFill>
+                <a:latin typeface="Inter" pitchFamily="34" charset="0"/>
+                <a:ea typeface="Inter" pitchFamily="34" charset="-122"/>
+                <a:cs typeface="Inter" pitchFamily="34" charset="-120"/>
+              </a:rPr>
+              <a:t>🛡️ In-bus safety AI</a:t>
+            </a:r>
+            <a:endParaRPr lang="en-US" sz="1600" dirty="0"/>
+          </a:p>
+        </p:txBody>
+      </p:sp>
+      <p:sp>
+        <p:nvSpPr>
+          <p:cNvPr id="13" name="Text 11"/>
+          <p:cNvSpPr/>
+          <p:nvPr/>
+        </p:nvSpPr>
+        <p:spPr>
+          <a:xfrm>
+            <a:off x="8412480" y="3520440"/>
+            <a:ext cx="3291840" cy="2103120"/>
+          </a:xfrm>
+          <a:prstGeom prst="rect">
+            <a:avLst/>
+          </a:prstGeom>
+          <a:noFill/>
+          <a:ln/>
+        </p:spPr>
+        <p:txBody>
+          <a:bodyPr wrap="square" rtlCol="0" anchor="ctr"/>
+          <a:lstStyle/>
           <a:p>
             <a:pPr marL="342900" indent="-342900">
               <a:lnSpc>
@@ -11415,7 +11260,7 @@
                 <a:ea typeface="Inter" pitchFamily="34" charset="-122"/>
                 <a:cs typeface="Inter" pitchFamily="34" charset="-120"/>
               </a:rPr>
-              <a:t>Lesson plans</a:t>
+              <a:t>Bullying / harassment detection</a:t>
             </a:r>
             <a:endParaRPr lang="en-US" sz="1100" dirty="0"/>
           </a:p>
@@ -11436,137 +11281,10 @@
                 <a:ea typeface="Inter" pitchFamily="34" charset="-122"/>
                 <a:cs typeface="Inter" pitchFamily="34" charset="-120"/>
               </a:rPr>
-              <a:t>Cortex Helper bot</a:t>
+              <a:t>Audio + video classifier</a:t>
             </a:r>
             <a:endParaRPr lang="en-US" sz="1100" dirty="0"/>
           </a:p>
-        </p:txBody>
-      </p:sp>
-      <p:sp>
-        <p:nvSpPr>
-          <p:cNvPr id="12" name="Shape 10"/>
-          <p:cNvSpPr/>
-          <p:nvPr/>
-        </p:nvSpPr>
-        <p:spPr>
-          <a:xfrm>
-            <a:off x="8229600" y="2286000"/>
-            <a:ext cx="3657600" cy="3840480"/>
-          </a:xfrm>
-          <a:prstGeom prst="roundRect">
-            <a:avLst>
-              <a:gd name="adj" fmla="val 3750"/>
-            </a:avLst>
-          </a:prstGeom>
-          <a:solidFill>
-            <a:srgbClr val="FFFFFF"/>
-          </a:solidFill>
-          <a:ln w="12700">
-            <a:solidFill>
-              <a:srgbClr val="E2E8F0"/>
-            </a:solidFill>
-            <a:prstDash val="solid"/>
-          </a:ln>
-        </p:spPr>
-      </p:sp>
-      <p:sp>
-        <p:nvSpPr>
-          <p:cNvPr id="13" name="Text 11"/>
-          <p:cNvSpPr/>
-          <p:nvPr/>
-        </p:nvSpPr>
-        <p:spPr>
-          <a:xfrm>
-            <a:off x="8458200" y="2423160"/>
-            <a:ext cx="3200400" cy="274320"/>
-          </a:xfrm>
-          <a:prstGeom prst="rect">
-            <a:avLst/>
-          </a:prstGeom>
-          <a:noFill/>
-          <a:ln/>
-        </p:spPr>
-        <p:txBody>
-          <a:bodyPr wrap="square" rtlCol="0" anchor="ctr"/>
-          <a:lstStyle/>
-          <a:p>
-            <a:pPr indent="0" marL="0">
-              <a:buNone/>
-            </a:pPr>
-            <a:r>
-              <a:rPr lang="en-US" sz="900" b="1" spc="400" kern="0" dirty="0">
-                <a:solidFill>
-                  <a:srgbClr val="64748B"/>
-                </a:solidFill>
-                <a:latin typeface="Inter" pitchFamily="34" charset="0"/>
-                <a:ea typeface="Inter" pitchFamily="34" charset="-122"/>
-                <a:cs typeface="Inter" pitchFamily="34" charset="-120"/>
-              </a:rPr>
-              <a:t>ENTERPRISE</a:t>
-            </a:r>
-            <a:endParaRPr lang="en-US" sz="900" dirty="0"/>
-          </a:p>
-        </p:txBody>
-      </p:sp>
-      <p:sp>
-        <p:nvSpPr>
-          <p:cNvPr id="14" name="Text 12"/>
-          <p:cNvSpPr/>
-          <p:nvPr/>
-        </p:nvSpPr>
-        <p:spPr>
-          <a:xfrm>
-            <a:off x="8458200" y="2743200"/>
-            <a:ext cx="3200400" cy="548640"/>
-          </a:xfrm>
-          <a:prstGeom prst="rect">
-            <a:avLst/>
-          </a:prstGeom>
-          <a:noFill/>
-          <a:ln/>
-        </p:spPr>
-        <p:txBody>
-          <a:bodyPr wrap="square" rtlCol="0" anchor="ctr"/>
-          <a:lstStyle/>
-          <a:p>
-            <a:pPr indent="0" marL="0">
-              <a:buNone/>
-            </a:pPr>
-            <a:r>
-              <a:rPr lang="en-US" sz="2200" b="1" dirty="0">
-                <a:solidFill>
-                  <a:srgbClr val="0F172A"/>
-                </a:solidFill>
-                <a:latin typeface="Inter" pitchFamily="34" charset="0"/>
-                <a:ea typeface="Inter" pitchFamily="34" charset="-122"/>
-                <a:cs typeface="Inter" pitchFamily="34" charset="-120"/>
-              </a:rPr>
-              <a:t>Everything</a:t>
-            </a:r>
-            <a:endParaRPr lang="en-US" sz="2200" dirty="0"/>
-          </a:p>
-        </p:txBody>
-      </p:sp>
-      <p:sp>
-        <p:nvSpPr>
-          <p:cNvPr id="15" name="Text 13"/>
-          <p:cNvSpPr/>
-          <p:nvPr/>
-        </p:nvSpPr>
-        <p:spPr>
-          <a:xfrm>
-            <a:off x="8458200" y="3383280"/>
-            <a:ext cx="3200400" cy="2560320"/>
-          </a:xfrm>
-          <a:prstGeom prst="rect">
-            <a:avLst/>
-          </a:prstGeom>
-          <a:noFill/>
-          <a:ln/>
-        </p:spPr>
-        <p:txBody>
-          <a:bodyPr wrap="square" rtlCol="0" anchor="ctr"/>
-          <a:lstStyle/>
           <a:p>
             <a:pPr marL="342900" indent="-342900">
               <a:lnSpc>
@@ -11584,7 +11302,7 @@
                 <a:ea typeface="Inter" pitchFamily="34" charset="-122"/>
                 <a:cs typeface="Inter" pitchFamily="34" charset="-120"/>
               </a:rPr>
-              <a:t>Everything in Pro</a:t>
+              <a:t>Real-time alert to admin + driver</a:t>
             </a:r>
             <a:endParaRPr lang="en-US" sz="1100" dirty="0"/>
           </a:p>
@@ -11605,7 +11323,7 @@
                 <a:ea typeface="Inter" pitchFamily="34" charset="-122"/>
                 <a:cs typeface="Inter" pitchFamily="34" charset="-120"/>
               </a:rPr>
-              <a:t>AI Evaluator</a:t>
+              <a:t>Panic button on the parent app</a:t>
             </a:r>
             <a:endParaRPr lang="en-US" sz="1100" dirty="0"/>
           </a:p>
@@ -11626,109 +11344,73 @@
                 <a:ea typeface="Inter" pitchFamily="34" charset="-122"/>
                 <a:cs typeface="Inter" pitchFamily="34" charset="-120"/>
               </a:rPr>
-              <a:t>Face AI Attendance</a:t>
+              <a:t>Encrypted footage retained 30 days</a:t>
             </a:r>
             <a:endParaRPr lang="en-US" sz="1100" dirty="0"/>
           </a:p>
-          <a:p>
-            <a:pPr marL="342900" indent="-342900">
-              <a:lnSpc>
-                <a:spcPts val="1800"/>
-              </a:lnSpc>
-              <a:buSzPct val="100000"/>
-              <a:buChar char="●"/>
-            </a:pPr>
-            <a:r>
-              <a:rPr lang="en-US" sz="1100" dirty="0">
-                <a:solidFill>
-                  <a:srgbClr val="0F172A"/>
-                </a:solidFill>
-                <a:latin typeface="Inter" pitchFamily="34" charset="0"/>
-                <a:ea typeface="Inter" pitchFamily="34" charset="-122"/>
-                <a:cs typeface="Inter" pitchFamily="34" charset="-120"/>
-              </a:rPr>
-              <a:t>Teacher Assist (2026)</a:t>
-            </a:r>
-            <a:endParaRPr lang="en-US" sz="1100" dirty="0"/>
-          </a:p>
-          <a:p>
-            <a:pPr marL="342900" indent="-342900">
-              <a:lnSpc>
-                <a:spcPts val="1800"/>
-              </a:lnSpc>
-              <a:buSzPct val="100000"/>
-              <a:buChar char="●"/>
-            </a:pPr>
-            <a:r>
-              <a:rPr lang="en-US" sz="1100" dirty="0">
-                <a:solidFill>
-                  <a:srgbClr val="0F172A"/>
-                </a:solidFill>
-                <a:latin typeface="Inter" pitchFamily="34" charset="0"/>
-                <a:ea typeface="Inter" pitchFamily="34" charset="-122"/>
-                <a:cs typeface="Inter" pitchFamily="34" charset="-120"/>
-              </a:rPr>
-              <a:t>Student Surveillance (2026)</a:t>
-            </a:r>
-            <a:endParaRPr lang="en-US" sz="1100" dirty="0"/>
-          </a:p>
-          <a:p>
-            <a:pPr marL="342900" indent="-342900">
-              <a:lnSpc>
-                <a:spcPts val="1800"/>
-              </a:lnSpc>
-              <a:buSzPct val="100000"/>
-              <a:buChar char="●"/>
-            </a:pPr>
-            <a:r>
-              <a:rPr lang="en-US" sz="1100" dirty="0">
-                <a:solidFill>
-                  <a:srgbClr val="0F172A"/>
-                </a:solidFill>
-                <a:latin typeface="Inter" pitchFamily="34" charset="0"/>
-                <a:ea typeface="Inter" pitchFamily="34" charset="-122"/>
-                <a:cs typeface="Inter" pitchFamily="34" charset="-120"/>
-              </a:rPr>
-              <a:t>Dedicated CSM</a:t>
-            </a:r>
-            <a:endParaRPr lang="en-US" sz="1100" dirty="0"/>
-          </a:p>
-        </p:txBody>
-      </p:sp>
-      <p:sp>
-        <p:nvSpPr>
-          <p:cNvPr id="16" name="Text 14"/>
-          <p:cNvSpPr/>
-          <p:nvPr/>
-        </p:nvSpPr>
-        <p:spPr>
-          <a:xfrm>
-            <a:off x="457200" y="6263640"/>
-            <a:ext cx="10972800" cy="457200"/>
-          </a:xfrm>
-          <a:prstGeom prst="rect">
-            <a:avLst/>
-          </a:prstGeom>
-          <a:noFill/>
-          <a:ln/>
-        </p:spPr>
-        <p:txBody>
-          <a:bodyPr wrap="square" rtlCol="0" anchor="ctr"/>
-          <a:lstStyle/>
-          <a:p>
-            <a:pPr indent="0" marL="0">
-              <a:buNone/>
-            </a:pPr>
-            <a:r>
-              <a:rPr lang="en-US" sz="1300" dirty="0">
-                <a:solidFill>
-                  <a:srgbClr val="475569"/>
-                </a:solidFill>
-                <a:latin typeface="Inter" pitchFamily="34" charset="0"/>
-                <a:ea typeface="Inter" pitchFamily="34" charset="-122"/>
-                <a:cs typeface="Inter" pitchFamily="34" charset="-120"/>
-              </a:rPr>
-              <a:t>Pricing scales with student count. We'll send a tailored quote within 48 hours of this demo.</a:t>
+        </p:txBody>
+      </p:sp>
+      <p:sp>
+        <p:nvSpPr>
+          <p:cNvPr id="14" name="Shape 12"/>
+          <p:cNvSpPr/>
+          <p:nvPr/>
+        </p:nvSpPr>
+        <p:spPr>
+          <a:xfrm>
+            <a:off x="457200" y="5852160"/>
+            <a:ext cx="11292840" cy="777240"/>
+          </a:xfrm>
+          <a:prstGeom prst="roundRect">
+            <a:avLst>
+              <a:gd name="adj" fmla="val 11765"/>
+            </a:avLst>
+          </a:prstGeom>
+          <a:solidFill>
+            <a:srgbClr val="A855F7"/>
+          </a:solidFill>
+          <a:ln w="12700">
+            <a:solidFill>
+              <a:srgbClr val="A855F7"/>
+            </a:solidFill>
+            <a:prstDash val="solid"/>
+          </a:ln>
+        </p:spPr>
+      </p:sp>
+      <p:sp>
+        <p:nvSpPr>
+          <p:cNvPr id="15" name="Text 13"/>
+          <p:cNvSpPr/>
+          <p:nvPr/>
+        </p:nvSpPr>
+        <p:spPr>
+          <a:xfrm>
+            <a:off x="640080" y="5943600"/>
+            <a:ext cx="10972800" cy="640080"/>
+          </a:xfrm>
+          <a:prstGeom prst="rect">
+            <a:avLst/>
+          </a:prstGeom>
+          <a:noFill/>
+          <a:ln/>
+        </p:spPr>
+        <p:txBody>
+          <a:bodyPr wrap="square" rtlCol="0" anchor="ctr"/>
+          <a:lstStyle/>
+          <a:p>
+            <a:pPr indent="0" marL="0">
+              <a:buNone/>
+            </a:pPr>
+            <a:r>
+              <a:rPr lang="en-US" sz="1300" b="1" dirty="0">
+                <a:solidFill>
+                  <a:srgbClr val="FFFFFF"/>
+                </a:solidFill>
+                <a:latin typeface="Inter" pitchFamily="34" charset="0"/>
+                <a:ea typeface="Inter" pitchFamily="34" charset="-122"/>
+                <a:cs typeface="Inter" pitchFamily="34" charset="-120"/>
+              </a:rPr>
+              <a:t>Why parents care: the parent's phone tells them where their child is — before anyone has to ask.</a:t>
             </a:r>
             <a:endParaRPr lang="en-US" sz="1300" dirty="0"/>
           </a:p>
@@ -11792,7 +11474,7 @@
                 <a:ea typeface="Inter" pitchFamily="34" charset="-122"/>
                 <a:cs typeface="Inter" pitchFamily="34" charset="-120"/>
               </a:rPr>
-              <a:t>ONBOARDING</a:t>
+              <a:t>ROADMAP · AIVENX CONNECT</a:t>
             </a:r>
             <a:endParaRPr lang="en-US" sz="1100" dirty="0"/>
           </a:p>
@@ -11831,7 +11513,7 @@
                 <a:ea typeface="Inter" pitchFamily="34" charset="-122"/>
                 <a:cs typeface="Inter" pitchFamily="34" charset="-120"/>
               </a:rPr>
-              <a:t>From contract to live in 14 days.</a:t>
+              <a:t>Every batch. Still in touch.</a:t>
             </a:r>
             <a:endParaRPr lang="en-US" sz="3600" dirty="0"/>
           </a:p>
@@ -11839,18 +11521,57 @@
       </p:sp>
       <p:sp>
         <p:nvSpPr>
-          <p:cNvPr id="4" name="Shape 2"/>
-          <p:cNvSpPr/>
-          <p:nvPr/>
-        </p:nvSpPr>
-        <p:spPr>
-          <a:xfrm>
-            <a:off x="457200" y="2286000"/>
-            <a:ext cx="2743200" cy="2560320"/>
+          <p:cNvPr id="4" name="Text 2"/>
+          <p:cNvSpPr/>
+          <p:nvPr/>
+        </p:nvSpPr>
+        <p:spPr>
+          <a:xfrm>
+            <a:off x="457200" y="1828800"/>
+            <a:ext cx="10515600" cy="822960"/>
+          </a:xfrm>
+          <a:prstGeom prst="rect">
+            <a:avLst/>
+          </a:prstGeom>
+          <a:noFill/>
+          <a:ln/>
+        </p:spPr>
+        <p:txBody>
+          <a:bodyPr wrap="square" rtlCol="0" anchor="ctr"/>
+          <a:lstStyle/>
+          <a:p>
+            <a:pPr indent="0" marL="0">
+              <a:buNone/>
+            </a:pPr>
+            <a:r>
+              <a:rPr lang="en-US" sz="1600" dirty="0">
+                <a:solidFill>
+                  <a:srgbClr val="475569"/>
+                </a:solidFill>
+                <a:latin typeface="Inter" pitchFamily="34" charset="0"/>
+                <a:ea typeface="Inter" pitchFamily="34" charset="-122"/>
+                <a:cs typeface="Inter" pitchFamily="34" charset="-120"/>
+              </a:rPr>
+              <a:t>An alumni network built into the school's own platform. Live in pilot now; GA H2 2026.</a:t>
+            </a:r>
+            <a:endParaRPr lang="en-US" sz="1600" dirty="0"/>
+          </a:p>
+        </p:txBody>
+      </p:sp>
+      <p:sp>
+        <p:nvSpPr>
+          <p:cNvPr id="5" name="Shape 3"/>
+          <p:cNvSpPr/>
+          <p:nvPr/>
+        </p:nvSpPr>
+        <p:spPr>
+          <a:xfrm>
+            <a:off x="457200" y="2926080"/>
+            <a:ext cx="5486400" cy="3383280"/>
           </a:xfrm>
           <a:prstGeom prst="roundRect">
             <a:avLst>
-              <a:gd name="adj" fmla="val 5357"/>
+              <a:gd name="adj" fmla="val 4054"/>
             </a:avLst>
           </a:prstGeom>
           <a:solidFill>
@@ -11866,53 +11587,14 @@
       </p:sp>
       <p:sp>
         <p:nvSpPr>
-          <p:cNvPr id="5" name="Text 3"/>
-          <p:cNvSpPr/>
-          <p:nvPr/>
-        </p:nvSpPr>
-        <p:spPr>
-          <a:xfrm>
-            <a:off x="640080" y="2423160"/>
-            <a:ext cx="2377440" cy="274320"/>
-          </a:xfrm>
-          <a:prstGeom prst="rect">
-            <a:avLst/>
-          </a:prstGeom>
-          <a:noFill/>
-          <a:ln/>
-        </p:spPr>
-        <p:txBody>
-          <a:bodyPr wrap="square" rtlCol="0" anchor="ctr"/>
-          <a:lstStyle/>
-          <a:p>
-            <a:pPr indent="0" marL="0">
-              <a:buNone/>
-            </a:pPr>
-            <a:r>
-              <a:rPr lang="en-US" sz="900" b="1" spc="400" kern="0" dirty="0">
-                <a:solidFill>
-                  <a:srgbClr val="64748B"/>
-                </a:solidFill>
-                <a:latin typeface="Inter" pitchFamily="34" charset="0"/>
-                <a:ea typeface="Inter" pitchFamily="34" charset="-122"/>
-                <a:cs typeface="Inter" pitchFamily="34" charset="-120"/>
-              </a:rPr>
-              <a:t>DAY 1-3</a:t>
-            </a:r>
-            <a:endParaRPr lang="en-US" sz="900" dirty="0"/>
-          </a:p>
-        </p:txBody>
-      </p:sp>
-      <p:sp>
-        <p:nvSpPr>
           <p:cNvPr id="6" name="Text 4"/>
           <p:cNvSpPr/>
           <p:nvPr/>
         </p:nvSpPr>
         <p:spPr>
           <a:xfrm>
-            <a:off x="640080" y="2743200"/>
-            <a:ext cx="2377440" cy="457200"/>
+            <a:off x="640080" y="3063240"/>
+            <a:ext cx="5120640" cy="365760"/>
           </a:xfrm>
           <a:prstGeom prst="rect">
             <a:avLst/>
@@ -11936,7 +11618,7 @@
                 <a:ea typeface="Inter" pitchFamily="34" charset="-122"/>
                 <a:cs typeface="Inter" pitchFamily="34" charset="-120"/>
               </a:rPr>
-              <a:t>Setup</a:t>
+              <a:t>What alumni get</a:t>
             </a:r>
             <a:endParaRPr lang="en-US" sz="1600" dirty="0"/>
           </a:p>
@@ -11950,37 +11632,101 @@
         </p:nvSpPr>
         <p:spPr>
           <a:xfrm>
-            <a:off x="640080" y="3200400"/>
-            <a:ext cx="2377440" cy="1463040"/>
-          </a:xfrm>
-          <a:prstGeom prst="rect">
-            <a:avLst/>
-          </a:prstGeom>
-          <a:noFill/>
-          <a:ln/>
-        </p:spPr>
-        <p:txBody>
-          <a:bodyPr wrap="square" rtlCol="0" anchor="ctr"/>
-          <a:lstStyle/>
-          <a:p>
-            <a:pPr indent="0" marL="0">
+            <a:off x="640080" y="3520440"/>
+            <a:ext cx="5120640" cy="2651760"/>
+          </a:xfrm>
+          <a:prstGeom prst="rect">
+            <a:avLst/>
+          </a:prstGeom>
+          <a:noFill/>
+          <a:ln/>
+        </p:spPr>
+        <p:txBody>
+          <a:bodyPr wrap="square" rtlCol="0" anchor="ctr"/>
+          <a:lstStyle/>
+          <a:p>
+            <a:pPr marL="342900" indent="-342900">
               <a:lnSpc>
-                <a:spcPts val="1600"/>
+                <a:spcPts val="1800"/>
               </a:lnSpc>
-              <a:buNone/>
-            </a:pPr>
-            <a:r>
-              <a:rPr lang="en-US" sz="1100" dirty="0">
-                <a:solidFill>
-                  <a:srgbClr val="475569"/>
-                </a:solidFill>
-                <a:latin typeface="Inter" pitchFamily="34" charset="0"/>
-                <a:ea typeface="Inter" pitchFamily="34" charset="-122"/>
-                <a:cs typeface="Inter" pitchFamily="34" charset="-120"/>
-              </a:rPr>
-              <a:t>Tenant provisioned. Branding, classes, sections, fee structure imported.</a:t>
-            </a:r>
-            <a:endParaRPr lang="en-US" sz="1100" dirty="0"/>
+              <a:buSzPct val="100000"/>
+              <a:buChar char="●"/>
+            </a:pPr>
+            <a:r>
+              <a:rPr lang="en-US" sz="1200" dirty="0">
+                <a:solidFill>
+                  <a:srgbClr val="0F172A"/>
+                </a:solidFill>
+                <a:latin typeface="Inter" pitchFamily="34" charset="0"/>
+                <a:ea typeface="Inter" pitchFamily="34" charset="-122"/>
+                <a:cs typeface="Inter" pitchFamily="34" charset="-120"/>
+              </a:rPr>
+              <a:t>A polished profile that travels — even after the school email expires</a:t>
+            </a:r>
+            <a:endParaRPr lang="en-US" sz="1200" dirty="0"/>
+          </a:p>
+          <a:p>
+            <a:pPr marL="342900" indent="-342900">
+              <a:lnSpc>
+                <a:spcPts val="1800"/>
+              </a:lnSpc>
+              <a:buSzPct val="100000"/>
+              <a:buChar char="●"/>
+            </a:pPr>
+            <a:r>
+              <a:rPr lang="en-US" sz="1200" dirty="0">
+                <a:solidFill>
+                  <a:srgbClr val="0F172A"/>
+                </a:solidFill>
+                <a:latin typeface="Inter" pitchFamily="34" charset="0"/>
+                <a:ea typeface="Inter" pitchFamily="34" charset="-122"/>
+                <a:cs typeface="Inter" pitchFamily="34" charset="-120"/>
+              </a:rPr>
+              <a:t>Mentorship requests from current students they actually want to help</a:t>
+            </a:r>
+            <a:endParaRPr lang="en-US" sz="1200" dirty="0"/>
+          </a:p>
+          <a:p>
+            <a:pPr marL="342900" indent="-342900">
+              <a:lnSpc>
+                <a:spcPts val="1800"/>
+              </a:lnSpc>
+              <a:buSzPct val="100000"/>
+              <a:buChar char="●"/>
+            </a:pPr>
+            <a:r>
+              <a:rPr lang="en-US" sz="1200" dirty="0">
+                <a:solidFill>
+                  <a:srgbClr val="0F172A"/>
+                </a:solidFill>
+                <a:latin typeface="Inter" pitchFamily="34" charset="0"/>
+                <a:ea typeface="Inter" pitchFamily="34" charset="-122"/>
+                <a:cs typeface="Inter" pitchFamily="34" charset="-120"/>
+              </a:rPr>
+              <a:t>A job board they post to (and that current students actually read)</a:t>
+            </a:r>
+            <a:endParaRPr lang="en-US" sz="1200" dirty="0"/>
+          </a:p>
+          <a:p>
+            <a:pPr marL="342900" indent="-342900">
+              <a:lnSpc>
+                <a:spcPts val="1800"/>
+              </a:lnSpc>
+              <a:buSzPct val="100000"/>
+              <a:buChar char="●"/>
+            </a:pPr>
+            <a:r>
+              <a:rPr lang="en-US" sz="1200" dirty="0">
+                <a:solidFill>
+                  <a:srgbClr val="0F172A"/>
+                </a:solidFill>
+                <a:latin typeface="Inter" pitchFamily="34" charset="0"/>
+                <a:ea typeface="Inter" pitchFamily="34" charset="-122"/>
+                <a:cs typeface="Inter" pitchFamily="34" charset="-120"/>
+              </a:rPr>
+              <a:t>Reunions, fundraisers, and events with one-tap RSVP</a:t>
+            </a:r>
+            <a:endParaRPr lang="en-US" sz="1200" dirty="0"/>
           </a:p>
         </p:txBody>
       </p:sp>
@@ -11992,20 +11738,20 @@
         </p:nvSpPr>
         <p:spPr>
           <a:xfrm>
-            <a:off x="3364992" y="2286000"/>
-            <a:ext cx="2743200" cy="2560320"/>
+            <a:off x="6263640" y="2926080"/>
+            <a:ext cx="5486400" cy="3383280"/>
           </a:xfrm>
           <a:prstGeom prst="roundRect">
             <a:avLst>
-              <a:gd name="adj" fmla="val 5357"/>
+              <a:gd name="adj" fmla="val 4054"/>
             </a:avLst>
           </a:prstGeom>
           <a:solidFill>
             <a:srgbClr val="FFFFFF"/>
           </a:solidFill>
-          <a:ln w="12700">
+          <a:ln w="25400">
             <a:solidFill>
-              <a:srgbClr val="E2E8F0"/>
+              <a:srgbClr val="A855F7"/>
             </a:solidFill>
             <a:prstDash val="solid"/>
           </a:ln>
@@ -12019,34 +11765,34 @@
         </p:nvSpPr>
         <p:spPr>
           <a:xfrm>
-            <a:off x="3547872" y="2423160"/>
-            <a:ext cx="2377440" cy="274320"/>
-          </a:xfrm>
-          <a:prstGeom prst="rect">
-            <a:avLst/>
-          </a:prstGeom>
-          <a:noFill/>
-          <a:ln/>
-        </p:spPr>
-        <p:txBody>
-          <a:bodyPr wrap="square" rtlCol="0" anchor="ctr"/>
-          <a:lstStyle/>
-          <a:p>
-            <a:pPr indent="0" marL="0">
-              <a:buNone/>
-            </a:pPr>
-            <a:r>
-              <a:rPr lang="en-US" sz="900" b="1" spc="400" kern="0" dirty="0">
-                <a:solidFill>
-                  <a:srgbClr val="64748B"/>
-                </a:solidFill>
-                <a:latin typeface="Inter" pitchFamily="34" charset="0"/>
-                <a:ea typeface="Inter" pitchFamily="34" charset="-122"/>
-                <a:cs typeface="Inter" pitchFamily="34" charset="-120"/>
-              </a:rPr>
-              <a:t>DAY 4-7</a:t>
-            </a:r>
-            <a:endParaRPr lang="en-US" sz="900" dirty="0"/>
+            <a:off x="6446520" y="3063240"/>
+            <a:ext cx="5120640" cy="365760"/>
+          </a:xfrm>
+          <a:prstGeom prst="rect">
+            <a:avLst/>
+          </a:prstGeom>
+          <a:noFill/>
+          <a:ln/>
+        </p:spPr>
+        <p:txBody>
+          <a:bodyPr wrap="square" rtlCol="0" anchor="ctr"/>
+          <a:lstStyle/>
+          <a:p>
+            <a:pPr indent="0" marL="0">
+              <a:buNone/>
+            </a:pPr>
+            <a:r>
+              <a:rPr lang="en-US" sz="1600" b="1" dirty="0">
+                <a:solidFill>
+                  <a:srgbClr val="0F172A"/>
+                </a:solidFill>
+                <a:latin typeface="Inter" pitchFamily="34" charset="0"/>
+                <a:ea typeface="Inter" pitchFamily="34" charset="-122"/>
+                <a:cs typeface="Inter" pitchFamily="34" charset="-120"/>
+              </a:rPr>
+              <a:t>What the school gets</a:t>
+            </a:r>
+            <a:endParaRPr lang="en-US" sz="1600" dirty="0"/>
           </a:p>
         </p:txBody>
       </p:sp>
@@ -12058,436 +11804,122 @@
         </p:nvSpPr>
         <p:spPr>
           <a:xfrm>
-            <a:off x="3547872" y="2743200"/>
-            <a:ext cx="2377440" cy="457200"/>
-          </a:xfrm>
-          <a:prstGeom prst="rect">
-            <a:avLst/>
-          </a:prstGeom>
-          <a:noFill/>
-          <a:ln/>
-        </p:spPr>
-        <p:txBody>
-          <a:bodyPr wrap="square" rtlCol="0" anchor="ctr"/>
-          <a:lstStyle/>
-          <a:p>
-            <a:pPr indent="0" marL="0">
-              <a:buNone/>
-            </a:pPr>
-            <a:r>
-              <a:rPr lang="en-US" sz="1600" b="1" dirty="0">
-                <a:solidFill>
-                  <a:srgbClr val="0F172A"/>
-                </a:solidFill>
-                <a:latin typeface="Inter" pitchFamily="34" charset="0"/>
-                <a:ea typeface="Inter" pitchFamily="34" charset="-122"/>
-                <a:cs typeface="Inter" pitchFamily="34" charset="-120"/>
-              </a:rPr>
-              <a:t>Data migration</a:t>
-            </a:r>
-            <a:endParaRPr lang="en-US" sz="1600" dirty="0"/>
-          </a:p>
-        </p:txBody>
-      </p:sp>
-      <p:sp>
-        <p:nvSpPr>
-          <p:cNvPr id="11" name="Text 9"/>
-          <p:cNvSpPr/>
-          <p:nvPr/>
-        </p:nvSpPr>
-        <p:spPr>
-          <a:xfrm>
-            <a:off x="3547872" y="3200400"/>
-            <a:ext cx="2377440" cy="1463040"/>
-          </a:xfrm>
-          <a:prstGeom prst="rect">
-            <a:avLst/>
-          </a:prstGeom>
-          <a:noFill/>
-          <a:ln/>
-        </p:spPr>
-        <p:txBody>
-          <a:bodyPr wrap="square" rtlCol="0" anchor="ctr"/>
-          <a:lstStyle/>
-          <a:p>
-            <a:pPr indent="0" marL="0">
+            <a:off x="6446520" y="3520440"/>
+            <a:ext cx="5120640" cy="2651760"/>
+          </a:xfrm>
+          <a:prstGeom prst="rect">
+            <a:avLst/>
+          </a:prstGeom>
+          <a:noFill/>
+          <a:ln/>
+        </p:spPr>
+        <p:txBody>
+          <a:bodyPr wrap="square" rtlCol="0" anchor="ctr"/>
+          <a:lstStyle/>
+          <a:p>
+            <a:pPr marL="342900" indent="-342900">
               <a:lnSpc>
-                <a:spcPts val="1600"/>
+                <a:spcPts val="1800"/>
               </a:lnSpc>
-              <a:buNone/>
-            </a:pPr>
-            <a:r>
-              <a:rPr lang="en-US" sz="1100" dirty="0">
-                <a:solidFill>
-                  <a:srgbClr val="475569"/>
-                </a:solidFill>
-                <a:latin typeface="Inter" pitchFamily="34" charset="0"/>
-                <a:ea typeface="Inter" pitchFamily="34" charset="-122"/>
-                <a:cs typeface="Inter" pitchFamily="34" charset="-120"/>
-              </a:rPr>
-              <a:t>Student &amp; staff records imported from your existing system. Validated by AIvenX team.</a:t>
-            </a:r>
-            <a:endParaRPr lang="en-US" sz="1100" dirty="0"/>
-          </a:p>
-        </p:txBody>
-      </p:sp>
-      <p:sp>
-        <p:nvSpPr>
-          <p:cNvPr id="12" name="Shape 10"/>
-          <p:cNvSpPr/>
-          <p:nvPr/>
-        </p:nvSpPr>
-        <p:spPr>
-          <a:xfrm>
-            <a:off x="6272784" y="2286000"/>
-            <a:ext cx="2743200" cy="2560320"/>
-          </a:xfrm>
-          <a:prstGeom prst="roundRect">
-            <a:avLst>
-              <a:gd name="adj" fmla="val 5357"/>
-            </a:avLst>
-          </a:prstGeom>
-          <a:solidFill>
-            <a:srgbClr val="FFFFFF"/>
-          </a:solidFill>
-          <a:ln w="12700">
-            <a:solidFill>
-              <a:srgbClr val="E2E8F0"/>
-            </a:solidFill>
-            <a:prstDash val="solid"/>
-          </a:ln>
-        </p:spPr>
-      </p:sp>
-      <p:sp>
-        <p:nvSpPr>
-          <p:cNvPr id="13" name="Text 11"/>
-          <p:cNvSpPr/>
-          <p:nvPr/>
-        </p:nvSpPr>
-        <p:spPr>
-          <a:xfrm>
-            <a:off x="6455664" y="2423160"/>
-            <a:ext cx="2377440" cy="274320"/>
-          </a:xfrm>
-          <a:prstGeom prst="rect">
-            <a:avLst/>
-          </a:prstGeom>
-          <a:noFill/>
-          <a:ln/>
-        </p:spPr>
-        <p:txBody>
-          <a:bodyPr wrap="square" rtlCol="0" anchor="ctr"/>
-          <a:lstStyle/>
-          <a:p>
-            <a:pPr indent="0" marL="0">
-              <a:buNone/>
-            </a:pPr>
-            <a:r>
-              <a:rPr lang="en-US" sz="900" b="1" spc="400" kern="0" dirty="0">
-                <a:solidFill>
-                  <a:srgbClr val="64748B"/>
-                </a:solidFill>
-                <a:latin typeface="Inter" pitchFamily="34" charset="0"/>
-                <a:ea typeface="Inter" pitchFamily="34" charset="-122"/>
-                <a:cs typeface="Inter" pitchFamily="34" charset="-120"/>
-              </a:rPr>
-              <a:t>DAY 8-11</a:t>
-            </a:r>
-            <a:endParaRPr lang="en-US" sz="900" dirty="0"/>
-          </a:p>
-        </p:txBody>
-      </p:sp>
-      <p:sp>
-        <p:nvSpPr>
-          <p:cNvPr id="14" name="Text 12"/>
-          <p:cNvSpPr/>
-          <p:nvPr/>
-        </p:nvSpPr>
-        <p:spPr>
-          <a:xfrm>
-            <a:off x="6455664" y="2743200"/>
-            <a:ext cx="2377440" cy="457200"/>
-          </a:xfrm>
-          <a:prstGeom prst="rect">
-            <a:avLst/>
-          </a:prstGeom>
-          <a:noFill/>
-          <a:ln/>
-        </p:spPr>
-        <p:txBody>
-          <a:bodyPr wrap="square" rtlCol="0" anchor="ctr"/>
-          <a:lstStyle/>
-          <a:p>
-            <a:pPr indent="0" marL="0">
-              <a:buNone/>
-            </a:pPr>
-            <a:r>
-              <a:rPr lang="en-US" sz="1600" b="1" dirty="0">
-                <a:solidFill>
-                  <a:srgbClr val="0F172A"/>
-                </a:solidFill>
-                <a:latin typeface="Inter" pitchFamily="34" charset="0"/>
-                <a:ea typeface="Inter" pitchFamily="34" charset="-122"/>
-                <a:cs typeface="Inter" pitchFamily="34" charset="-120"/>
-              </a:rPr>
-              <a:t>Training</a:t>
-            </a:r>
-            <a:endParaRPr lang="en-US" sz="1600" dirty="0"/>
-          </a:p>
-        </p:txBody>
-      </p:sp>
-      <p:sp>
-        <p:nvSpPr>
-          <p:cNvPr id="15" name="Text 13"/>
-          <p:cNvSpPr/>
-          <p:nvPr/>
-        </p:nvSpPr>
-        <p:spPr>
-          <a:xfrm>
-            <a:off x="6455664" y="3200400"/>
-            <a:ext cx="2377440" cy="1463040"/>
-          </a:xfrm>
-          <a:prstGeom prst="rect">
-            <a:avLst/>
-          </a:prstGeom>
-          <a:noFill/>
-          <a:ln/>
-        </p:spPr>
-        <p:txBody>
-          <a:bodyPr wrap="square" rtlCol="0" anchor="ctr"/>
-          <a:lstStyle/>
-          <a:p>
-            <a:pPr indent="0" marL="0">
+              <a:buSzPct val="100000"/>
+              <a:buChar char="●"/>
+            </a:pPr>
+            <a:r>
+              <a:rPr lang="en-US" sz="1200" dirty="0">
+                <a:solidFill>
+                  <a:srgbClr val="0F172A"/>
+                </a:solidFill>
+                <a:latin typeface="Inter" pitchFamily="34" charset="0"/>
+                <a:ea typeface="Inter" pitchFamily="34" charset="-122"/>
+                <a:cs typeface="Inter" pitchFamily="34" charset="-120"/>
+              </a:rPr>
+              <a:t>Searchable directory by batch, industry, location, role</a:t>
+            </a:r>
+            <a:endParaRPr lang="en-US" sz="1200" dirty="0"/>
+          </a:p>
+          <a:p>
+            <a:pPr marL="342900" indent="-342900">
               <a:lnSpc>
-                <a:spcPts val="1600"/>
+                <a:spcPts val="1800"/>
               </a:lnSpc>
-              <a:buNone/>
-            </a:pPr>
-            <a:r>
-              <a:rPr lang="en-US" sz="1100" dirty="0">
-                <a:solidFill>
-                  <a:srgbClr val="475569"/>
-                </a:solidFill>
-                <a:latin typeface="Inter" pitchFamily="34" charset="0"/>
-                <a:ea typeface="Inter" pitchFamily="34" charset="-122"/>
-                <a:cs typeface="Inter" pitchFamily="34" charset="-120"/>
-              </a:rPr>
-              <a:t>Admin · Principal · Teacher · Parent walkthroughs. Recorded, role-specific.</a:t>
-            </a:r>
-            <a:endParaRPr lang="en-US" sz="1100" dirty="0"/>
-          </a:p>
-        </p:txBody>
-      </p:sp>
-      <p:sp>
-        <p:nvSpPr>
-          <p:cNvPr id="16" name="Shape 14"/>
-          <p:cNvSpPr/>
-          <p:nvPr/>
-        </p:nvSpPr>
-        <p:spPr>
-          <a:xfrm>
-            <a:off x="9180576" y="2286000"/>
-            <a:ext cx="2743200" cy="2560320"/>
-          </a:xfrm>
-          <a:prstGeom prst="roundRect">
-            <a:avLst>
-              <a:gd name="adj" fmla="val 5357"/>
-            </a:avLst>
-          </a:prstGeom>
-          <a:solidFill>
-            <a:srgbClr val="FFFFFF"/>
-          </a:solidFill>
-          <a:ln w="12700">
-            <a:solidFill>
-              <a:srgbClr val="E2E8F0"/>
-            </a:solidFill>
-            <a:prstDash val="solid"/>
-          </a:ln>
-        </p:spPr>
-      </p:sp>
-      <p:sp>
-        <p:nvSpPr>
-          <p:cNvPr id="17" name="Text 15"/>
-          <p:cNvSpPr/>
-          <p:nvPr/>
-        </p:nvSpPr>
-        <p:spPr>
-          <a:xfrm>
-            <a:off x="9363456" y="2423160"/>
-            <a:ext cx="2377440" cy="274320"/>
-          </a:xfrm>
-          <a:prstGeom prst="rect">
-            <a:avLst/>
-          </a:prstGeom>
-          <a:noFill/>
-          <a:ln/>
-        </p:spPr>
-        <p:txBody>
-          <a:bodyPr wrap="square" rtlCol="0" anchor="ctr"/>
-          <a:lstStyle/>
-          <a:p>
-            <a:pPr indent="0" marL="0">
-              <a:buNone/>
-            </a:pPr>
-            <a:r>
-              <a:rPr lang="en-US" sz="900" b="1" spc="400" kern="0" dirty="0">
-                <a:solidFill>
-                  <a:srgbClr val="64748B"/>
-                </a:solidFill>
-                <a:latin typeface="Inter" pitchFamily="34" charset="0"/>
-                <a:ea typeface="Inter" pitchFamily="34" charset="-122"/>
-                <a:cs typeface="Inter" pitchFamily="34" charset="-120"/>
-              </a:rPr>
-              <a:t>DAY 12-14</a:t>
-            </a:r>
-            <a:endParaRPr lang="en-US" sz="900" dirty="0"/>
-          </a:p>
-        </p:txBody>
-      </p:sp>
-      <p:sp>
-        <p:nvSpPr>
-          <p:cNvPr id="18" name="Text 16"/>
-          <p:cNvSpPr/>
-          <p:nvPr/>
-        </p:nvSpPr>
-        <p:spPr>
-          <a:xfrm>
-            <a:off x="9363456" y="2743200"/>
-            <a:ext cx="2377440" cy="457200"/>
-          </a:xfrm>
-          <a:prstGeom prst="rect">
-            <a:avLst/>
-          </a:prstGeom>
-          <a:noFill/>
-          <a:ln/>
-        </p:spPr>
-        <p:txBody>
-          <a:bodyPr wrap="square" rtlCol="0" anchor="ctr"/>
-          <a:lstStyle/>
-          <a:p>
-            <a:pPr indent="0" marL="0">
-              <a:buNone/>
-            </a:pPr>
-            <a:r>
-              <a:rPr lang="en-US" sz="1600" b="1" dirty="0">
-                <a:solidFill>
-                  <a:srgbClr val="0F172A"/>
-                </a:solidFill>
-                <a:latin typeface="Inter" pitchFamily="34" charset="0"/>
-                <a:ea typeface="Inter" pitchFamily="34" charset="-122"/>
-                <a:cs typeface="Inter" pitchFamily="34" charset="-120"/>
-              </a:rPr>
-              <a:t>Go-live</a:t>
-            </a:r>
-            <a:endParaRPr lang="en-US" sz="1600" dirty="0"/>
-          </a:p>
-        </p:txBody>
-      </p:sp>
-      <p:sp>
-        <p:nvSpPr>
-          <p:cNvPr id="19" name="Text 17"/>
-          <p:cNvSpPr/>
-          <p:nvPr/>
-        </p:nvSpPr>
-        <p:spPr>
-          <a:xfrm>
-            <a:off x="9363456" y="3200400"/>
-            <a:ext cx="2377440" cy="1463040"/>
-          </a:xfrm>
-          <a:prstGeom prst="rect">
-            <a:avLst/>
-          </a:prstGeom>
-          <a:noFill/>
-          <a:ln/>
-        </p:spPr>
-        <p:txBody>
-          <a:bodyPr wrap="square" rtlCol="0" anchor="ctr"/>
-          <a:lstStyle/>
-          <a:p>
-            <a:pPr indent="0" marL="0">
+              <a:buSzPct val="100000"/>
+              <a:buChar char="●"/>
+            </a:pPr>
+            <a:r>
+              <a:rPr lang="en-US" sz="1200" dirty="0">
+                <a:solidFill>
+                  <a:srgbClr val="0F172A"/>
+                </a:solidFill>
+                <a:latin typeface="Inter" pitchFamily="34" charset="0"/>
+                <a:ea typeface="Inter" pitchFamily="34" charset="-122"/>
+                <a:cs typeface="Inter" pitchFamily="34" charset="-120"/>
+              </a:rPr>
+              <a:t>Mentor matching engine — students filter by area; alumni opt in</a:t>
+            </a:r>
+            <a:endParaRPr lang="en-US" sz="1200" dirty="0"/>
+          </a:p>
+          <a:p>
+            <a:pPr marL="342900" indent="-342900">
               <a:lnSpc>
-                <a:spcPts val="1600"/>
+                <a:spcPts val="1800"/>
               </a:lnSpc>
-              <a:buNone/>
-            </a:pPr>
-            <a:r>
-              <a:rPr lang="en-US" sz="1100" dirty="0">
-                <a:solidFill>
-                  <a:srgbClr val="475569"/>
-                </a:solidFill>
-                <a:latin typeface="Inter" pitchFamily="34" charset="0"/>
-                <a:ea typeface="Inter" pitchFamily="34" charset="-122"/>
-                <a:cs typeface="Inter" pitchFamily="34" charset="-120"/>
-              </a:rPr>
-              <a:t>Soft launch with one class → full rollout. Dedicated CSM on call.</a:t>
-            </a:r>
-            <a:endParaRPr lang="en-US" sz="1100" dirty="0"/>
-          </a:p>
-        </p:txBody>
-      </p:sp>
-      <p:sp>
-        <p:nvSpPr>
-          <p:cNvPr id="20" name="Shape 18"/>
-          <p:cNvSpPr/>
-          <p:nvPr/>
-        </p:nvSpPr>
-        <p:spPr>
-          <a:xfrm>
-            <a:off x="457200" y="5212080"/>
-            <a:ext cx="11292840" cy="1005840"/>
-          </a:xfrm>
-          <a:prstGeom prst="roundRect">
-            <a:avLst>
-              <a:gd name="adj" fmla="val 9091"/>
-            </a:avLst>
-          </a:prstGeom>
-          <a:solidFill>
-            <a:srgbClr val="F8FAFC"/>
-          </a:solidFill>
-          <a:ln w="12700">
-            <a:solidFill>
-              <a:srgbClr val="E2E8F0"/>
-            </a:solidFill>
-            <a:prstDash val="solid"/>
-          </a:ln>
-        </p:spPr>
-      </p:sp>
-      <p:sp>
-        <p:nvSpPr>
-          <p:cNvPr id="21" name="Text 19"/>
-          <p:cNvSpPr/>
-          <p:nvPr/>
-        </p:nvSpPr>
-        <p:spPr>
-          <a:xfrm>
-            <a:off x="640080" y="5349240"/>
-            <a:ext cx="10972800" cy="777240"/>
-          </a:xfrm>
-          <a:prstGeom prst="rect">
-            <a:avLst/>
-          </a:prstGeom>
-          <a:noFill/>
-          <a:ln/>
-        </p:spPr>
-        <p:txBody>
-          <a:bodyPr wrap="square" rtlCol="0" anchor="ctr"/>
-          <a:lstStyle/>
-          <a:p>
-            <a:pPr indent="0" marL="0">
-              <a:buNone/>
-            </a:pPr>
-            <a:r>
-              <a:rPr lang="en-US" sz="1300" dirty="0">
-                <a:solidFill>
-                  <a:srgbClr val="0F172A"/>
-                </a:solidFill>
-                <a:latin typeface="Inter" pitchFamily="34" charset="0"/>
-                <a:ea typeface="Inter" pitchFamily="34" charset="-122"/>
-                <a:cs typeface="Inter" pitchFamily="34" charset="-120"/>
-              </a:rPr>
-              <a:t>White-glove migration is included. We handle CSV imports from your current ERP / LMS — your team isn't stuck reformatting spreadsheets.</a:t>
-            </a:r>
-            <a:endParaRPr lang="en-US" sz="1300" dirty="0"/>
+              <a:buSzPct val="100000"/>
+              <a:buChar char="●"/>
+            </a:pPr>
+            <a:r>
+              <a:rPr lang="en-US" sz="1200" dirty="0">
+                <a:solidFill>
+                  <a:srgbClr val="0F172A"/>
+                </a:solidFill>
+                <a:latin typeface="Inter" pitchFamily="34" charset="0"/>
+                <a:ea typeface="Inter" pitchFamily="34" charset="-122"/>
+                <a:cs typeface="Inter" pitchFamily="34" charset="-120"/>
+              </a:rPr>
+              <a:t>Verified profiles — admin-stamped to prevent impersonation</a:t>
+            </a:r>
+            <a:endParaRPr lang="en-US" sz="1200" dirty="0"/>
+          </a:p>
+          <a:p>
+            <a:pPr marL="342900" indent="-342900">
+              <a:lnSpc>
+                <a:spcPts val="1800"/>
+              </a:lnSpc>
+              <a:buSzPct val="100000"/>
+              <a:buChar char="●"/>
+            </a:pPr>
+            <a:r>
+              <a:rPr lang="en-US" sz="1200" dirty="0">
+                <a:solidFill>
+                  <a:srgbClr val="0F172A"/>
+                </a:solidFill>
+                <a:latin typeface="Inter" pitchFamily="34" charset="0"/>
+                <a:ea typeface="Inter" pitchFamily="34" charset="-122"/>
+                <a:cs typeface="Inter" pitchFamily="34" charset="-120"/>
+              </a:rPr>
+              <a:t>Engagement analytics — which batches are active</a:t>
+            </a:r>
+            <a:endParaRPr lang="en-US" sz="1200" dirty="0"/>
+          </a:p>
+          <a:p>
+            <a:pPr marL="342900" indent="-342900">
+              <a:lnSpc>
+                <a:spcPts val="1800"/>
+              </a:lnSpc>
+              <a:buSzPct val="100000"/>
+              <a:buChar char="●"/>
+            </a:pPr>
+            <a:r>
+              <a:rPr lang="en-US" sz="1200" dirty="0">
+                <a:solidFill>
+                  <a:srgbClr val="0F172A"/>
+                </a:solidFill>
+                <a:latin typeface="Inter" pitchFamily="34" charset="0"/>
+                <a:ea typeface="Inter" pitchFamily="34" charset="-122"/>
+                <a:cs typeface="Inter" pitchFamily="34" charset="-120"/>
+              </a:rPr>
+              <a:t>Privacy controls — school-only or public visibility</a:t>
+            </a:r>
+            <a:endParaRPr lang="en-US" sz="1200" dirty="0"/>
           </a:p>
         </p:txBody>
       </p:sp>
@@ -12502,6 +11934,3081 @@
 <file path=ppt/slides/slide24.xml><?xml version="1.0" encoding="utf-8"?>
 <p:sld xmlns:a="http://schemas.openxmlformats.org/drawingml/2006/main" xmlns:r="http://schemas.openxmlformats.org/officeDocument/2006/relationships" xmlns:p="http://schemas.openxmlformats.org/presentationml/2006/main">
   <p:cSld name="Slide 24">
+    <p:spTree>
+      <p:nvGrpSpPr>
+        <p:cNvPr id="1" name=""/>
+        <p:cNvGrpSpPr/>
+        <p:nvPr/>
+      </p:nvGrpSpPr>
+      <p:grpSpPr>
+        <a:xfrm>
+          <a:off x="0" y="0"/>
+          <a:ext cx="0" cy="0"/>
+          <a:chOff x="0" y="0"/>
+          <a:chExt cx="0" cy="0"/>
+        </a:xfrm>
+      </p:grpSpPr>
+      <p:sp>
+        <p:nvSpPr>
+          <p:cNvPr id="2" name="Text 0"/>
+          <p:cNvSpPr/>
+          <p:nvPr/>
+        </p:nvSpPr>
+        <p:spPr>
+          <a:xfrm>
+            <a:off x="457200" y="365760"/>
+            <a:ext cx="11247120" cy="274320"/>
+          </a:xfrm>
+          <a:prstGeom prst="rect">
+            <a:avLst/>
+          </a:prstGeom>
+          <a:noFill/>
+          <a:ln/>
+        </p:spPr>
+        <p:txBody>
+          <a:bodyPr wrap="square" rtlCol="0" anchor="ctr"/>
+          <a:lstStyle/>
+          <a:p>
+            <a:pPr indent="0" marL="0">
+              <a:buNone/>
+            </a:pPr>
+            <a:r>
+              <a:rPr lang="en-US" sz="1100" b="1" spc="600" kern="0" dirty="0">
+                <a:solidFill>
+                  <a:srgbClr val="A855F7"/>
+                </a:solidFill>
+                <a:latin typeface="Inter" pitchFamily="34" charset="0"/>
+                <a:ea typeface="Inter" pitchFamily="34" charset="-122"/>
+                <a:cs typeface="Inter" pitchFamily="34" charset="-120"/>
+              </a:rPr>
+              <a:t>ROADMAP · AIVENX MOBILE</a:t>
+            </a:r>
+            <a:endParaRPr lang="en-US" sz="1100" dirty="0"/>
+          </a:p>
+        </p:txBody>
+      </p:sp>
+      <p:sp>
+        <p:nvSpPr>
+          <p:cNvPr id="3" name="Text 1"/>
+          <p:cNvSpPr/>
+          <p:nvPr/>
+        </p:nvSpPr>
+        <p:spPr>
+          <a:xfrm>
+            <a:off x="457200" y="640080"/>
+            <a:ext cx="11247120" cy="1280160"/>
+          </a:xfrm>
+          <a:prstGeom prst="rect">
+            <a:avLst/>
+          </a:prstGeom>
+          <a:noFill/>
+          <a:ln/>
+        </p:spPr>
+        <p:txBody>
+          <a:bodyPr wrap="square" rtlCol="0" anchor="ctr"/>
+          <a:lstStyle/>
+          <a:p>
+            <a:pPr indent="0" marL="0">
+              <a:buNone/>
+            </a:pPr>
+            <a:r>
+              <a:rPr lang="en-US" sz="3600" b="1" dirty="0">
+                <a:solidFill>
+                  <a:srgbClr val="0F172A"/>
+                </a:solidFill>
+                <a:latin typeface="Inter" pitchFamily="34" charset="0"/>
+                <a:ea typeface="Inter" pitchFamily="34" charset="-122"/>
+                <a:cs typeface="Inter" pitchFamily="34" charset="-120"/>
+              </a:rPr>
+              <a:t>Two apps. One platform.</a:t>
+            </a:r>
+            <a:endParaRPr lang="en-US" sz="3600" dirty="0"/>
+          </a:p>
+        </p:txBody>
+      </p:sp>
+      <p:sp>
+        <p:nvSpPr>
+          <p:cNvPr id="4" name="Text 2"/>
+          <p:cNvSpPr/>
+          <p:nvPr/>
+        </p:nvSpPr>
+        <p:spPr>
+          <a:xfrm>
+            <a:off x="457200" y="1828800"/>
+            <a:ext cx="10515600" cy="822960"/>
+          </a:xfrm>
+          <a:prstGeom prst="rect">
+            <a:avLst/>
+          </a:prstGeom>
+          <a:noFill/>
+          <a:ln/>
+        </p:spPr>
+        <p:txBody>
+          <a:bodyPr wrap="square" rtlCol="0" anchor="ctr"/>
+          <a:lstStyle/>
+          <a:p>
+            <a:pPr indent="0" marL="0">
+              <a:buNone/>
+            </a:pPr>
+            <a:r>
+              <a:rPr lang="en-US" sz="1600" dirty="0">
+                <a:solidFill>
+                  <a:srgbClr val="475569"/>
+                </a:solidFill>
+                <a:latin typeface="Inter" pitchFamily="34" charset="0"/>
+                <a:ea typeface="Inter" pitchFamily="34" charset="-122"/>
+                <a:cs typeface="Inter" pitchFamily="34" charset="-120"/>
+              </a:rPr>
+              <a:t>Native iOS + Android for students and parents. Single sign-on with the school portal. Shipping early 2027.</a:t>
+            </a:r>
+            <a:endParaRPr lang="en-US" sz="1600" dirty="0"/>
+          </a:p>
+        </p:txBody>
+      </p:sp>
+      <p:sp>
+        <p:nvSpPr>
+          <p:cNvPr id="5" name="Shape 3"/>
+          <p:cNvSpPr/>
+          <p:nvPr/>
+        </p:nvSpPr>
+        <p:spPr>
+          <a:xfrm>
+            <a:off x="457200" y="2926080"/>
+            <a:ext cx="5486400" cy="3566160"/>
+          </a:xfrm>
+          <a:prstGeom prst="roundRect">
+            <a:avLst>
+              <a:gd name="adj" fmla="val 3846"/>
+            </a:avLst>
+          </a:prstGeom>
+          <a:solidFill>
+            <a:srgbClr val="FFFFFF"/>
+          </a:solidFill>
+          <a:ln w="25400">
+            <a:solidFill>
+              <a:srgbClr val="22D3EE"/>
+            </a:solidFill>
+            <a:prstDash val="solid"/>
+          </a:ln>
+        </p:spPr>
+      </p:sp>
+      <p:sp>
+        <p:nvSpPr>
+          <p:cNvPr id="6" name="Text 4"/>
+          <p:cNvSpPr/>
+          <p:nvPr/>
+        </p:nvSpPr>
+        <p:spPr>
+          <a:xfrm>
+            <a:off x="640080" y="3063240"/>
+            <a:ext cx="5120640" cy="457200"/>
+          </a:xfrm>
+          <a:prstGeom prst="rect">
+            <a:avLst/>
+          </a:prstGeom>
+          <a:noFill/>
+          <a:ln/>
+        </p:spPr>
+        <p:txBody>
+          <a:bodyPr wrap="square" rtlCol="0" anchor="ctr"/>
+          <a:lstStyle/>
+          <a:p>
+            <a:pPr indent="0" marL="0">
+              <a:buNone/>
+            </a:pPr>
+            <a:r>
+              <a:rPr lang="en-US" sz="1800" b="1" dirty="0">
+                <a:solidFill>
+                  <a:srgbClr val="0F172A"/>
+                </a:solidFill>
+                <a:latin typeface="Inter" pitchFamily="34" charset="0"/>
+                <a:ea typeface="Inter" pitchFamily="34" charset="-122"/>
+                <a:cs typeface="Inter" pitchFamily="34" charset="-120"/>
+              </a:rPr>
+              <a:t>📚 Student app</a:t>
+            </a:r>
+            <a:endParaRPr lang="en-US" sz="1800" dirty="0"/>
+          </a:p>
+        </p:txBody>
+      </p:sp>
+      <p:sp>
+        <p:nvSpPr>
+          <p:cNvPr id="7" name="Text 5"/>
+          <p:cNvSpPr/>
+          <p:nvPr/>
+        </p:nvSpPr>
+        <p:spPr>
+          <a:xfrm>
+            <a:off x="640080" y="3566160"/>
+            <a:ext cx="5120640" cy="411480"/>
+          </a:xfrm>
+          <a:prstGeom prst="rect">
+            <a:avLst/>
+          </a:prstGeom>
+          <a:noFill/>
+          <a:ln/>
+        </p:spPr>
+        <p:txBody>
+          <a:bodyPr wrap="square" rtlCol="0" anchor="ctr"/>
+          <a:lstStyle/>
+          <a:p>
+            <a:pPr indent="0" marL="0">
+              <a:buNone/>
+            </a:pPr>
+            <a:r>
+              <a:rPr lang="en-US" sz="1100" i="1" dirty="0">
+                <a:solidFill>
+                  <a:srgbClr val="475569"/>
+                </a:solidFill>
+                <a:latin typeface="Inter" pitchFamily="34" charset="0"/>
+                <a:ea typeface="Inter" pitchFamily="34" charset="-122"/>
+                <a:cs typeface="Inter" pitchFamily="34" charset="-120"/>
+              </a:rPr>
+              <a:t>For grades 4 and up. A learning companion, not a portal.</a:t>
+            </a:r>
+            <a:endParaRPr lang="en-US" sz="1100" dirty="0"/>
+          </a:p>
+        </p:txBody>
+      </p:sp>
+      <p:sp>
+        <p:nvSpPr>
+          <p:cNvPr id="8" name="Text 6"/>
+          <p:cNvSpPr/>
+          <p:nvPr/>
+        </p:nvSpPr>
+        <p:spPr>
+          <a:xfrm>
+            <a:off x="640080" y="4023360"/>
+            <a:ext cx="5120640" cy="2377440"/>
+          </a:xfrm>
+          <a:prstGeom prst="rect">
+            <a:avLst/>
+          </a:prstGeom>
+          <a:noFill/>
+          <a:ln/>
+        </p:spPr>
+        <p:txBody>
+          <a:bodyPr wrap="square" rtlCol="0" anchor="ctr"/>
+          <a:lstStyle/>
+          <a:p>
+            <a:pPr marL="342900" indent="-342900">
+              <a:lnSpc>
+                <a:spcPts val="1800"/>
+              </a:lnSpc>
+              <a:buSzPct val="100000"/>
+              <a:buChar char="●"/>
+            </a:pPr>
+            <a:r>
+              <a:rPr lang="en-US" sz="1100" dirty="0">
+                <a:solidFill>
+                  <a:srgbClr val="0F172A"/>
+                </a:solidFill>
+                <a:latin typeface="Inter" pitchFamily="34" charset="0"/>
+                <a:ea typeface="Inter" pitchFamily="34" charset="-122"/>
+                <a:cs typeface="Inter" pitchFamily="34" charset="-120"/>
+              </a:rPr>
+              <a:t>Today's chapters in their preferred mode (Focus / Spark / Quest / Saga)</a:t>
+            </a:r>
+            <a:endParaRPr lang="en-US" sz="1100" dirty="0"/>
+          </a:p>
+          <a:p>
+            <a:pPr marL="342900" indent="-342900">
+              <a:lnSpc>
+                <a:spcPts val="1800"/>
+              </a:lnSpc>
+              <a:buSzPct val="100000"/>
+              <a:buChar char="●"/>
+            </a:pPr>
+            <a:r>
+              <a:rPr lang="en-US" sz="1100" dirty="0">
+                <a:solidFill>
+                  <a:srgbClr val="0F172A"/>
+                </a:solidFill>
+                <a:latin typeface="Inter" pitchFamily="34" charset="0"/>
+                <a:ea typeface="Inter" pitchFamily="34" charset="-122"/>
+                <a:cs typeface="Inter" pitchFamily="34" charset="-120"/>
+              </a:rPr>
+              <a:t>Leo, the AI tutor, on every page</a:t>
+            </a:r>
+            <a:endParaRPr lang="en-US" sz="1100" dirty="0"/>
+          </a:p>
+          <a:p>
+            <a:pPr marL="342900" indent="-342900">
+              <a:lnSpc>
+                <a:spcPts val="1800"/>
+              </a:lnSpc>
+              <a:buSzPct val="100000"/>
+              <a:buChar char="●"/>
+            </a:pPr>
+            <a:r>
+              <a:rPr lang="en-US" sz="1100" dirty="0">
+                <a:solidFill>
+                  <a:srgbClr val="0F172A"/>
+                </a:solidFill>
+                <a:latin typeface="Inter" pitchFamily="34" charset="0"/>
+                <a:ea typeface="Inter" pitchFamily="34" charset="-122"/>
+                <a:cs typeface="Inter" pitchFamily="34" charset="-120"/>
+              </a:rPr>
+              <a:t>Self-paced practice with the question bank</a:t>
+            </a:r>
+            <a:endParaRPr lang="en-US" sz="1100" dirty="0"/>
+          </a:p>
+          <a:p>
+            <a:pPr marL="342900" indent="-342900">
+              <a:lnSpc>
+                <a:spcPts val="1800"/>
+              </a:lnSpc>
+              <a:buSzPct val="100000"/>
+              <a:buChar char="●"/>
+            </a:pPr>
+            <a:r>
+              <a:rPr lang="en-US" sz="1100" dirty="0">
+                <a:solidFill>
+                  <a:srgbClr val="0F172A"/>
+                </a:solidFill>
+                <a:latin typeface="Inter" pitchFamily="34" charset="0"/>
+                <a:ea typeface="Inter" pitchFamily="34" charset="-122"/>
+                <a:cs typeface="Inter" pitchFamily="34" charset="-120"/>
+              </a:rPr>
+              <a:t>Timetable, results, exam schedules at a tap</a:t>
+            </a:r>
+            <a:endParaRPr lang="en-US" sz="1100" dirty="0"/>
+          </a:p>
+          <a:p>
+            <a:pPr marL="342900" indent="-342900">
+              <a:lnSpc>
+                <a:spcPts val="1800"/>
+              </a:lnSpc>
+              <a:buSzPct val="100000"/>
+              <a:buChar char="●"/>
+            </a:pPr>
+            <a:r>
+              <a:rPr lang="en-US" sz="1100" dirty="0">
+                <a:solidFill>
+                  <a:srgbClr val="0F172A"/>
+                </a:solidFill>
+                <a:latin typeface="Inter" pitchFamily="34" charset="0"/>
+                <a:ea typeface="Inter" pitchFamily="34" charset="-122"/>
+                <a:cs typeface="Inter" pitchFamily="34" charset="-120"/>
+              </a:rPr>
+              <a:t>Personal portfolio — projects, achievements, badges</a:t>
+            </a:r>
+            <a:endParaRPr lang="en-US" sz="1100" dirty="0"/>
+          </a:p>
+        </p:txBody>
+      </p:sp>
+      <p:sp>
+        <p:nvSpPr>
+          <p:cNvPr id="9" name="Shape 7"/>
+          <p:cNvSpPr/>
+          <p:nvPr/>
+        </p:nvSpPr>
+        <p:spPr>
+          <a:xfrm>
+            <a:off x="6263640" y="2926080"/>
+            <a:ext cx="5486400" cy="3566160"/>
+          </a:xfrm>
+          <a:prstGeom prst="roundRect">
+            <a:avLst>
+              <a:gd name="adj" fmla="val 3846"/>
+            </a:avLst>
+          </a:prstGeom>
+          <a:solidFill>
+            <a:srgbClr val="FFFFFF"/>
+          </a:solidFill>
+          <a:ln w="25400">
+            <a:solidFill>
+              <a:srgbClr val="A855F7"/>
+            </a:solidFill>
+            <a:prstDash val="solid"/>
+          </a:ln>
+        </p:spPr>
+      </p:sp>
+      <p:sp>
+        <p:nvSpPr>
+          <p:cNvPr id="10" name="Text 8"/>
+          <p:cNvSpPr/>
+          <p:nvPr/>
+        </p:nvSpPr>
+        <p:spPr>
+          <a:xfrm>
+            <a:off x="6446520" y="3063240"/>
+            <a:ext cx="5120640" cy="457200"/>
+          </a:xfrm>
+          <a:prstGeom prst="rect">
+            <a:avLst/>
+          </a:prstGeom>
+          <a:noFill/>
+          <a:ln/>
+        </p:spPr>
+        <p:txBody>
+          <a:bodyPr wrap="square" rtlCol="0" anchor="ctr"/>
+          <a:lstStyle/>
+          <a:p>
+            <a:pPr indent="0" marL="0">
+              <a:buNone/>
+            </a:pPr>
+            <a:r>
+              <a:rPr lang="en-US" sz="1800" b="1" dirty="0">
+                <a:solidFill>
+                  <a:srgbClr val="0F172A"/>
+                </a:solidFill>
+                <a:latin typeface="Inter" pitchFamily="34" charset="0"/>
+                <a:ea typeface="Inter" pitchFamily="34" charset="-122"/>
+                <a:cs typeface="Inter" pitchFamily="34" charset="-120"/>
+              </a:rPr>
+              <a:t>👨‍👩‍👧 Parent app</a:t>
+            </a:r>
+            <a:endParaRPr lang="en-US" sz="1800" dirty="0"/>
+          </a:p>
+        </p:txBody>
+      </p:sp>
+      <p:sp>
+        <p:nvSpPr>
+          <p:cNvPr id="11" name="Text 9"/>
+          <p:cNvSpPr/>
+          <p:nvPr/>
+        </p:nvSpPr>
+        <p:spPr>
+          <a:xfrm>
+            <a:off x="6446520" y="3566160"/>
+            <a:ext cx="5120640" cy="411480"/>
+          </a:xfrm>
+          <a:prstGeom prst="rect">
+            <a:avLst/>
+          </a:prstGeom>
+          <a:noFill/>
+          <a:ln/>
+        </p:spPr>
+        <p:txBody>
+          <a:bodyPr wrap="square" rtlCol="0" anchor="ctr"/>
+          <a:lstStyle/>
+          <a:p>
+            <a:pPr indent="0" marL="0">
+              <a:buNone/>
+            </a:pPr>
+            <a:r>
+              <a:rPr lang="en-US" sz="1100" i="1" dirty="0">
+                <a:solidFill>
+                  <a:srgbClr val="475569"/>
+                </a:solidFill>
+                <a:latin typeface="Inter" pitchFamily="34" charset="0"/>
+                <a:ea typeface="Inter" pitchFamily="34" charset="-122"/>
+                <a:cs typeface="Inter" pitchFamily="34" charset="-120"/>
+              </a:rPr>
+              <a:t>Calm, confident updates — no more guessing.</a:t>
+            </a:r>
+            <a:endParaRPr lang="en-US" sz="1100" dirty="0"/>
+          </a:p>
+        </p:txBody>
+      </p:sp>
+      <p:sp>
+        <p:nvSpPr>
+          <p:cNvPr id="12" name="Text 10"/>
+          <p:cNvSpPr/>
+          <p:nvPr/>
+        </p:nvSpPr>
+        <p:spPr>
+          <a:xfrm>
+            <a:off x="6446520" y="4023360"/>
+            <a:ext cx="5120640" cy="2377440"/>
+          </a:xfrm>
+          <a:prstGeom prst="rect">
+            <a:avLst/>
+          </a:prstGeom>
+          <a:noFill/>
+          <a:ln/>
+        </p:spPr>
+        <p:txBody>
+          <a:bodyPr wrap="square" rtlCol="0" anchor="ctr"/>
+          <a:lstStyle/>
+          <a:p>
+            <a:pPr marL="342900" indent="-342900">
+              <a:lnSpc>
+                <a:spcPts val="1800"/>
+              </a:lnSpc>
+              <a:buSzPct val="100000"/>
+              <a:buChar char="●"/>
+            </a:pPr>
+            <a:r>
+              <a:rPr lang="en-US" sz="1100" dirty="0">
+                <a:solidFill>
+                  <a:srgbClr val="0F172A"/>
+                </a:solidFill>
+                <a:latin typeface="Inter" pitchFamily="34" charset="0"/>
+                <a:ea typeface="Inter" pitchFamily="34" charset="-122"/>
+                <a:cs typeface="Inter" pitchFamily="34" charset="-120"/>
+              </a:rPr>
+              <a:t>Live attendance — gate-confirmed, not teacher-typed</a:t>
+            </a:r>
+            <a:endParaRPr lang="en-US" sz="1100" dirty="0"/>
+          </a:p>
+          <a:p>
+            <a:pPr marL="342900" indent="-342900">
+              <a:lnSpc>
+                <a:spcPts val="1800"/>
+              </a:lnSpc>
+              <a:buSzPct val="100000"/>
+              <a:buChar char="●"/>
+            </a:pPr>
+            <a:r>
+              <a:rPr lang="en-US" sz="1100" dirty="0">
+                <a:solidFill>
+                  <a:srgbClr val="0F172A"/>
+                </a:solidFill>
+                <a:latin typeface="Inter" pitchFamily="34" charset="0"/>
+                <a:ea typeface="Inter" pitchFamily="34" charset="-122"/>
+                <a:cs typeface="Inter" pitchFamily="34" charset="-120"/>
+              </a:rPr>
+              <a:t>Fee invoices + UPI payment in two taps</a:t>
+            </a:r>
+            <a:endParaRPr lang="en-US" sz="1100" dirty="0"/>
+          </a:p>
+          <a:p>
+            <a:pPr marL="342900" indent="-342900">
+              <a:lnSpc>
+                <a:spcPts val="1800"/>
+              </a:lnSpc>
+              <a:buSzPct val="100000"/>
+              <a:buChar char="●"/>
+            </a:pPr>
+            <a:r>
+              <a:rPr lang="en-US" sz="1100" dirty="0">
+                <a:solidFill>
+                  <a:srgbClr val="0F172A"/>
+                </a:solidFill>
+                <a:latin typeface="Inter" pitchFamily="34" charset="0"/>
+                <a:ea typeface="Inter" pitchFamily="34" charset="-122"/>
+                <a:cs typeface="Inter" pitchFamily="34" charset="-120"/>
+              </a:rPr>
+              <a:t>Bus tracker — live ETA + boarding alerts</a:t>
+            </a:r>
+            <a:endParaRPr lang="en-US" sz="1100" dirty="0"/>
+          </a:p>
+          <a:p>
+            <a:pPr marL="342900" indent="-342900">
+              <a:lnSpc>
+                <a:spcPts val="1800"/>
+              </a:lnSpc>
+              <a:buSzPct val="100000"/>
+              <a:buChar char="●"/>
+            </a:pPr>
+            <a:r>
+              <a:rPr lang="en-US" sz="1100" dirty="0">
+                <a:solidFill>
+                  <a:srgbClr val="0F172A"/>
+                </a:solidFill>
+                <a:latin typeface="Inter" pitchFamily="34" charset="0"/>
+                <a:ea typeface="Inter" pitchFamily="34" charset="-122"/>
+                <a:cs typeface="Inter" pitchFamily="34" charset="-120"/>
+              </a:rPr>
+              <a:t>Threaded teacher chat</a:t>
+            </a:r>
+            <a:endParaRPr lang="en-US" sz="1100" dirty="0"/>
+          </a:p>
+          <a:p>
+            <a:pPr marL="342900" indent="-342900">
+              <a:lnSpc>
+                <a:spcPts val="1800"/>
+              </a:lnSpc>
+              <a:buSzPct val="100000"/>
+              <a:buChar char="●"/>
+            </a:pPr>
+            <a:r>
+              <a:rPr lang="en-US" sz="1100" dirty="0">
+                <a:solidFill>
+                  <a:srgbClr val="0F172A"/>
+                </a:solidFill>
+                <a:latin typeface="Inter" pitchFamily="34" charset="0"/>
+                <a:ea typeface="Inter" pitchFamily="34" charset="-122"/>
+                <a:cs typeface="Inter" pitchFamily="34" charset="-120"/>
+              </a:rPr>
+              <a:t>Wellbeing &amp; safety alerts (Guardian-powered)</a:t>
+            </a:r>
+            <a:endParaRPr lang="en-US" sz="1100" dirty="0"/>
+          </a:p>
+          <a:p>
+            <a:pPr marL="342900" indent="-342900">
+              <a:lnSpc>
+                <a:spcPts val="1800"/>
+              </a:lnSpc>
+              <a:buSzPct val="100000"/>
+              <a:buChar char="●"/>
+            </a:pPr>
+            <a:r>
+              <a:rPr lang="en-US" sz="1100" dirty="0">
+                <a:solidFill>
+                  <a:srgbClr val="0F172A"/>
+                </a:solidFill>
+                <a:latin typeface="Inter" pitchFamily="34" charset="0"/>
+                <a:ea typeface="Inter" pitchFamily="34" charset="-122"/>
+                <a:cs typeface="Inter" pitchFamily="34" charset="-120"/>
+              </a:rPr>
+              <a:t>Term-end performance summary, no PDFs</a:t>
+            </a:r>
+            <a:endParaRPr lang="en-US" sz="1100" dirty="0"/>
+          </a:p>
+        </p:txBody>
+      </p:sp>
+    </p:spTree>
+  </p:cSld>
+  <p:clrMapOvr>
+    <a:masterClrMapping/>
+  </p:clrMapOvr>
+</p:sld>
+</file>
+
+<file path=ppt/slides/slide25.xml><?xml version="1.0" encoding="utf-8"?>
+<p:sld xmlns:a="http://schemas.openxmlformats.org/drawingml/2006/main" xmlns:r="http://schemas.openxmlformats.org/officeDocument/2006/relationships" xmlns:p="http://schemas.openxmlformats.org/presentationml/2006/main">
+  <p:cSld name="Slide 25">
+    <p:spTree>
+      <p:nvGrpSpPr>
+        <p:cNvPr id="1" name=""/>
+        <p:cNvGrpSpPr/>
+        <p:nvPr/>
+      </p:nvGrpSpPr>
+      <p:grpSpPr>
+        <a:xfrm>
+          <a:off x="0" y="0"/>
+          <a:ext cx="0" cy="0"/>
+          <a:chOff x="0" y="0"/>
+          <a:chExt cx="0" cy="0"/>
+        </a:xfrm>
+      </p:grpSpPr>
+      <p:sp>
+        <p:nvSpPr>
+          <p:cNvPr id="2" name="Text 0"/>
+          <p:cNvSpPr/>
+          <p:nvPr/>
+        </p:nvSpPr>
+        <p:spPr>
+          <a:xfrm>
+            <a:off x="457200" y="365760"/>
+            <a:ext cx="11247120" cy="274320"/>
+          </a:xfrm>
+          <a:prstGeom prst="rect">
+            <a:avLst/>
+          </a:prstGeom>
+          <a:noFill/>
+          <a:ln/>
+        </p:spPr>
+        <p:txBody>
+          <a:bodyPr wrap="square" rtlCol="0" anchor="ctr"/>
+          <a:lstStyle/>
+          <a:p>
+            <a:pPr indent="0" marL="0">
+              <a:buNone/>
+            </a:pPr>
+            <a:r>
+              <a:rPr lang="en-US" sz="1100" b="1" spc="600" kern="0" dirty="0">
+                <a:solidFill>
+                  <a:srgbClr val="A855F7"/>
+                </a:solidFill>
+                <a:latin typeface="Inter" pitchFamily="34" charset="0"/>
+                <a:ea typeface="Inter" pitchFamily="34" charset="-122"/>
+                <a:cs typeface="Inter" pitchFamily="34" charset="-120"/>
+              </a:rPr>
+              <a:t>FEATURE 14 · SECURITY &amp; DATA</a:t>
+            </a:r>
+            <a:endParaRPr lang="en-US" sz="1100" dirty="0"/>
+          </a:p>
+        </p:txBody>
+      </p:sp>
+      <p:sp>
+        <p:nvSpPr>
+          <p:cNvPr id="3" name="Text 1"/>
+          <p:cNvSpPr/>
+          <p:nvPr/>
+        </p:nvSpPr>
+        <p:spPr>
+          <a:xfrm>
+            <a:off x="457200" y="640080"/>
+            <a:ext cx="11247120" cy="1280160"/>
+          </a:xfrm>
+          <a:prstGeom prst="rect">
+            <a:avLst/>
+          </a:prstGeom>
+          <a:noFill/>
+          <a:ln/>
+        </p:spPr>
+        <p:txBody>
+          <a:bodyPr wrap="square" rtlCol="0" anchor="ctr"/>
+          <a:lstStyle/>
+          <a:p>
+            <a:pPr indent="0" marL="0">
+              <a:buNone/>
+            </a:pPr>
+            <a:r>
+              <a:rPr lang="en-US" sz="3600" b="1" dirty="0">
+                <a:solidFill>
+                  <a:srgbClr val="0F172A"/>
+                </a:solidFill>
+                <a:latin typeface="Inter" pitchFamily="34" charset="0"/>
+                <a:ea typeface="Inter" pitchFamily="34" charset="-122"/>
+                <a:cs typeface="Inter" pitchFamily="34" charset="-120"/>
+              </a:rPr>
+              <a:t>Built for the data you can't lose.</a:t>
+            </a:r>
+            <a:endParaRPr lang="en-US" sz="3600" dirty="0"/>
+          </a:p>
+        </p:txBody>
+      </p:sp>
+      <p:sp>
+        <p:nvSpPr>
+          <p:cNvPr id="4" name="Text 2"/>
+          <p:cNvSpPr/>
+          <p:nvPr/>
+        </p:nvSpPr>
+        <p:spPr>
+          <a:xfrm>
+            <a:off x="457200" y="1828800"/>
+            <a:ext cx="10515600" cy="822960"/>
+          </a:xfrm>
+          <a:prstGeom prst="rect">
+            <a:avLst/>
+          </a:prstGeom>
+          <a:noFill/>
+          <a:ln/>
+        </p:spPr>
+        <p:txBody>
+          <a:bodyPr wrap="square" rtlCol="0" anchor="ctr"/>
+          <a:lstStyle/>
+          <a:p>
+            <a:pPr indent="0" marL="0">
+              <a:buNone/>
+            </a:pPr>
+            <a:r>
+              <a:rPr lang="en-US" sz="1600" dirty="0">
+                <a:solidFill>
+                  <a:srgbClr val="475569"/>
+                </a:solidFill>
+                <a:latin typeface="Inter" pitchFamily="34" charset="0"/>
+                <a:ea typeface="Inter" pitchFamily="34" charset="-122"/>
+                <a:cs typeface="Inter" pitchFamily="34" charset="-120"/>
+              </a:rPr>
+              <a:t>Schools handle minors' photos, medical records, fee histories. AIvenX is engineered around that responsibility.</a:t>
+            </a:r>
+            <a:endParaRPr lang="en-US" sz="1600" dirty="0"/>
+          </a:p>
+        </p:txBody>
+      </p:sp>
+      <p:sp>
+        <p:nvSpPr>
+          <p:cNvPr id="5" name="Shape 3"/>
+          <p:cNvSpPr/>
+          <p:nvPr/>
+        </p:nvSpPr>
+        <p:spPr>
+          <a:xfrm>
+            <a:off x="457200" y="3017520"/>
+            <a:ext cx="3657600" cy="1508760"/>
+          </a:xfrm>
+          <a:prstGeom prst="roundRect">
+            <a:avLst>
+              <a:gd name="adj" fmla="val 6061"/>
+            </a:avLst>
+          </a:prstGeom>
+          <a:solidFill>
+            <a:srgbClr val="FFFFFF"/>
+          </a:solidFill>
+          <a:ln w="12700">
+            <a:solidFill>
+              <a:srgbClr val="E2E8F0"/>
+            </a:solidFill>
+            <a:prstDash val="solid"/>
+          </a:ln>
+        </p:spPr>
+      </p:sp>
+      <p:sp>
+        <p:nvSpPr>
+          <p:cNvPr id="6" name="Text 4"/>
+          <p:cNvSpPr/>
+          <p:nvPr/>
+        </p:nvSpPr>
+        <p:spPr>
+          <a:xfrm>
+            <a:off x="640080" y="3200400"/>
+            <a:ext cx="3291840" cy="365760"/>
+          </a:xfrm>
+          <a:prstGeom prst="rect">
+            <a:avLst/>
+          </a:prstGeom>
+          <a:noFill/>
+          <a:ln/>
+        </p:spPr>
+        <p:txBody>
+          <a:bodyPr wrap="square" rtlCol="0" anchor="ctr"/>
+          <a:lstStyle/>
+          <a:p>
+            <a:pPr indent="0" marL="0">
+              <a:buNone/>
+            </a:pPr>
+            <a:r>
+              <a:rPr lang="en-US" sz="1400" b="1" dirty="0">
+                <a:solidFill>
+                  <a:srgbClr val="0F172A"/>
+                </a:solidFill>
+                <a:latin typeface="Inter" pitchFamily="34" charset="0"/>
+                <a:ea typeface="Inter" pitchFamily="34" charset="-122"/>
+                <a:cs typeface="Inter" pitchFamily="34" charset="-120"/>
+              </a:rPr>
+              <a:t>🔒 Multi-tenant secure</a:t>
+            </a:r>
+            <a:endParaRPr lang="en-US" sz="1400" dirty="0"/>
+          </a:p>
+        </p:txBody>
+      </p:sp>
+      <p:sp>
+        <p:nvSpPr>
+          <p:cNvPr id="7" name="Text 5"/>
+          <p:cNvSpPr/>
+          <p:nvPr/>
+        </p:nvSpPr>
+        <p:spPr>
+          <a:xfrm>
+            <a:off x="640080" y="3566160"/>
+            <a:ext cx="3291840" cy="822960"/>
+          </a:xfrm>
+          <a:prstGeom prst="rect">
+            <a:avLst/>
+          </a:prstGeom>
+          <a:noFill/>
+          <a:ln/>
+        </p:spPr>
+        <p:txBody>
+          <a:bodyPr wrap="square" rtlCol="0" anchor="ctr"/>
+          <a:lstStyle/>
+          <a:p>
+            <a:pPr indent="0" marL="0">
+              <a:lnSpc>
+                <a:spcPts val="1600"/>
+              </a:lnSpc>
+              <a:buNone/>
+            </a:pPr>
+            <a:r>
+              <a:rPr lang="en-US" sz="1100" dirty="0">
+                <a:solidFill>
+                  <a:srgbClr val="475569"/>
+                </a:solidFill>
+                <a:latin typeface="Inter" pitchFamily="34" charset="0"/>
+                <a:ea typeface="Inter" pitchFamily="34" charset="-122"/>
+                <a:cs typeface="Inter" pitchFamily="34" charset="-120"/>
+              </a:rPr>
+              <a:t>Each school is fully isolated at the database level. No cross-tenant leakage.</a:t>
+            </a:r>
+            <a:endParaRPr lang="en-US" sz="1100" dirty="0"/>
+          </a:p>
+        </p:txBody>
+      </p:sp>
+      <p:sp>
+        <p:nvSpPr>
+          <p:cNvPr id="8" name="Shape 6"/>
+          <p:cNvSpPr/>
+          <p:nvPr/>
+        </p:nvSpPr>
+        <p:spPr>
+          <a:xfrm>
+            <a:off x="4343400" y="3017520"/>
+            <a:ext cx="3657600" cy="1508760"/>
+          </a:xfrm>
+          <a:prstGeom prst="roundRect">
+            <a:avLst>
+              <a:gd name="adj" fmla="val 6061"/>
+            </a:avLst>
+          </a:prstGeom>
+          <a:solidFill>
+            <a:srgbClr val="FFFFFF"/>
+          </a:solidFill>
+          <a:ln w="12700">
+            <a:solidFill>
+              <a:srgbClr val="E2E8F0"/>
+            </a:solidFill>
+            <a:prstDash val="solid"/>
+          </a:ln>
+        </p:spPr>
+      </p:sp>
+      <p:sp>
+        <p:nvSpPr>
+          <p:cNvPr id="9" name="Text 7"/>
+          <p:cNvSpPr/>
+          <p:nvPr/>
+        </p:nvSpPr>
+        <p:spPr>
+          <a:xfrm>
+            <a:off x="4526280" y="3200400"/>
+            <a:ext cx="3291840" cy="365760"/>
+          </a:xfrm>
+          <a:prstGeom prst="rect">
+            <a:avLst/>
+          </a:prstGeom>
+          <a:noFill/>
+          <a:ln/>
+        </p:spPr>
+        <p:txBody>
+          <a:bodyPr wrap="square" rtlCol="0" anchor="ctr"/>
+          <a:lstStyle/>
+          <a:p>
+            <a:pPr indent="0" marL="0">
+              <a:buNone/>
+            </a:pPr>
+            <a:r>
+              <a:rPr lang="en-US" sz="1400" b="1" dirty="0">
+                <a:solidFill>
+                  <a:srgbClr val="0F172A"/>
+                </a:solidFill>
+                <a:latin typeface="Inter" pitchFamily="34" charset="0"/>
+                <a:ea typeface="Inter" pitchFamily="34" charset="-122"/>
+                <a:cs typeface="Inter" pitchFamily="34" charset="-120"/>
+              </a:rPr>
+              <a:t>👥 Role-based access</a:t>
+            </a:r>
+            <a:endParaRPr lang="en-US" sz="1400" dirty="0"/>
+          </a:p>
+        </p:txBody>
+      </p:sp>
+      <p:sp>
+        <p:nvSpPr>
+          <p:cNvPr id="10" name="Text 8"/>
+          <p:cNvSpPr/>
+          <p:nvPr/>
+        </p:nvSpPr>
+        <p:spPr>
+          <a:xfrm>
+            <a:off x="4526280" y="3566160"/>
+            <a:ext cx="3291840" cy="822960"/>
+          </a:xfrm>
+          <a:prstGeom prst="rect">
+            <a:avLst/>
+          </a:prstGeom>
+          <a:noFill/>
+          <a:ln/>
+        </p:spPr>
+        <p:txBody>
+          <a:bodyPr wrap="square" rtlCol="0" anchor="ctr"/>
+          <a:lstStyle/>
+          <a:p>
+            <a:pPr indent="0" marL="0">
+              <a:lnSpc>
+                <a:spcPts val="1600"/>
+              </a:lnSpc>
+              <a:buNone/>
+            </a:pPr>
+            <a:r>
+              <a:rPr lang="en-US" sz="1100" dirty="0">
+                <a:solidFill>
+                  <a:srgbClr val="475569"/>
+                </a:solidFill>
+                <a:latin typeface="Inter" pitchFamily="34" charset="0"/>
+                <a:ea typeface="Inter" pitchFamily="34" charset="-122"/>
+                <a:cs typeface="Inter" pitchFamily="34" charset="-120"/>
+              </a:rPr>
+              <a:t>Admin · Principal · Teacher · Student · Parent — every action audited.</a:t>
+            </a:r>
+            <a:endParaRPr lang="en-US" sz="1100" dirty="0"/>
+          </a:p>
+        </p:txBody>
+      </p:sp>
+      <p:sp>
+        <p:nvSpPr>
+          <p:cNvPr id="11" name="Shape 9"/>
+          <p:cNvSpPr/>
+          <p:nvPr/>
+        </p:nvSpPr>
+        <p:spPr>
+          <a:xfrm>
+            <a:off x="8229600" y="3017520"/>
+            <a:ext cx="3657600" cy="1508760"/>
+          </a:xfrm>
+          <a:prstGeom prst="roundRect">
+            <a:avLst>
+              <a:gd name="adj" fmla="val 6061"/>
+            </a:avLst>
+          </a:prstGeom>
+          <a:solidFill>
+            <a:srgbClr val="FFFFFF"/>
+          </a:solidFill>
+          <a:ln w="12700">
+            <a:solidFill>
+              <a:srgbClr val="E2E8F0"/>
+            </a:solidFill>
+            <a:prstDash val="solid"/>
+          </a:ln>
+        </p:spPr>
+      </p:sp>
+      <p:sp>
+        <p:nvSpPr>
+          <p:cNvPr id="12" name="Text 10"/>
+          <p:cNvSpPr/>
+          <p:nvPr/>
+        </p:nvSpPr>
+        <p:spPr>
+          <a:xfrm>
+            <a:off x="8412480" y="3200400"/>
+            <a:ext cx="3291840" cy="365760"/>
+          </a:xfrm>
+          <a:prstGeom prst="rect">
+            <a:avLst/>
+          </a:prstGeom>
+          <a:noFill/>
+          <a:ln/>
+        </p:spPr>
+        <p:txBody>
+          <a:bodyPr wrap="square" rtlCol="0" anchor="ctr"/>
+          <a:lstStyle/>
+          <a:p>
+            <a:pPr indent="0" marL="0">
+              <a:buNone/>
+            </a:pPr>
+            <a:r>
+              <a:rPr lang="en-US" sz="1400" b="1" dirty="0">
+                <a:solidFill>
+                  <a:srgbClr val="0F172A"/>
+                </a:solidFill>
+                <a:latin typeface="Inter" pitchFamily="34" charset="0"/>
+                <a:ea typeface="Inter" pitchFamily="34" charset="-122"/>
+                <a:cs typeface="Inter" pitchFamily="34" charset="-120"/>
+              </a:rPr>
+              <a:t>💾 Daily backups</a:t>
+            </a:r>
+            <a:endParaRPr lang="en-US" sz="1400" dirty="0"/>
+          </a:p>
+        </p:txBody>
+      </p:sp>
+      <p:sp>
+        <p:nvSpPr>
+          <p:cNvPr id="13" name="Text 11"/>
+          <p:cNvSpPr/>
+          <p:nvPr/>
+        </p:nvSpPr>
+        <p:spPr>
+          <a:xfrm>
+            <a:off x="8412480" y="3566160"/>
+            <a:ext cx="3291840" cy="822960"/>
+          </a:xfrm>
+          <a:prstGeom prst="rect">
+            <a:avLst/>
+          </a:prstGeom>
+          <a:noFill/>
+          <a:ln/>
+        </p:spPr>
+        <p:txBody>
+          <a:bodyPr wrap="square" rtlCol="0" anchor="ctr"/>
+          <a:lstStyle/>
+          <a:p>
+            <a:pPr indent="0" marL="0">
+              <a:lnSpc>
+                <a:spcPts val="1600"/>
+              </a:lnSpc>
+              <a:buNone/>
+            </a:pPr>
+            <a:r>
+              <a:rPr lang="en-US" sz="1100" dirty="0">
+                <a:solidFill>
+                  <a:srgbClr val="475569"/>
+                </a:solidFill>
+                <a:latin typeface="Inter" pitchFamily="34" charset="0"/>
+                <a:ea typeface="Inter" pitchFamily="34" charset="-122"/>
+                <a:cs typeface="Inter" pitchFamily="34" charset="-120"/>
+              </a:rPr>
+              <a:t>Encrypted, point-in-time recovery. One-click data export — no lock-in.</a:t>
+            </a:r>
+            <a:endParaRPr lang="en-US" sz="1100" dirty="0"/>
+          </a:p>
+        </p:txBody>
+      </p:sp>
+      <p:sp>
+        <p:nvSpPr>
+          <p:cNvPr id="14" name="Shape 12"/>
+          <p:cNvSpPr/>
+          <p:nvPr/>
+        </p:nvSpPr>
+        <p:spPr>
+          <a:xfrm>
+            <a:off x="457200" y="4709160"/>
+            <a:ext cx="3657600" cy="1508760"/>
+          </a:xfrm>
+          <a:prstGeom prst="roundRect">
+            <a:avLst>
+              <a:gd name="adj" fmla="val 6061"/>
+            </a:avLst>
+          </a:prstGeom>
+          <a:solidFill>
+            <a:srgbClr val="FFFFFF"/>
+          </a:solidFill>
+          <a:ln w="12700">
+            <a:solidFill>
+              <a:srgbClr val="E2E8F0"/>
+            </a:solidFill>
+            <a:prstDash val="solid"/>
+          </a:ln>
+        </p:spPr>
+      </p:sp>
+      <p:sp>
+        <p:nvSpPr>
+          <p:cNvPr id="15" name="Text 13"/>
+          <p:cNvSpPr/>
+          <p:nvPr/>
+        </p:nvSpPr>
+        <p:spPr>
+          <a:xfrm>
+            <a:off x="640080" y="4892040"/>
+            <a:ext cx="3291840" cy="365760"/>
+          </a:xfrm>
+          <a:prstGeom prst="rect">
+            <a:avLst/>
+          </a:prstGeom>
+          <a:noFill/>
+          <a:ln/>
+        </p:spPr>
+        <p:txBody>
+          <a:bodyPr wrap="square" rtlCol="0" anchor="ctr"/>
+          <a:lstStyle/>
+          <a:p>
+            <a:pPr indent="0" marL="0">
+              <a:buNone/>
+            </a:pPr>
+            <a:r>
+              <a:rPr lang="en-US" sz="1400" b="1" dirty="0">
+                <a:solidFill>
+                  <a:srgbClr val="0F172A"/>
+                </a:solidFill>
+                <a:latin typeface="Inter" pitchFamily="34" charset="0"/>
+                <a:ea typeface="Inter" pitchFamily="34" charset="-122"/>
+                <a:cs typeface="Inter" pitchFamily="34" charset="-120"/>
+              </a:rPr>
+              <a:t>🇮🇳 Hosted in India</a:t>
+            </a:r>
+            <a:endParaRPr lang="en-US" sz="1400" dirty="0"/>
+          </a:p>
+        </p:txBody>
+      </p:sp>
+      <p:sp>
+        <p:nvSpPr>
+          <p:cNvPr id="16" name="Text 14"/>
+          <p:cNvSpPr/>
+          <p:nvPr/>
+        </p:nvSpPr>
+        <p:spPr>
+          <a:xfrm>
+            <a:off x="640080" y="5257800"/>
+            <a:ext cx="3291840" cy="822960"/>
+          </a:xfrm>
+          <a:prstGeom prst="rect">
+            <a:avLst/>
+          </a:prstGeom>
+          <a:noFill/>
+          <a:ln/>
+        </p:spPr>
+        <p:txBody>
+          <a:bodyPr wrap="square" rtlCol="0" anchor="ctr"/>
+          <a:lstStyle/>
+          <a:p>
+            <a:pPr indent="0" marL="0">
+              <a:lnSpc>
+                <a:spcPts val="1600"/>
+              </a:lnSpc>
+              <a:buNone/>
+            </a:pPr>
+            <a:r>
+              <a:rPr lang="en-US" sz="1100" dirty="0">
+                <a:solidFill>
+                  <a:srgbClr val="475569"/>
+                </a:solidFill>
+                <a:latin typeface="Inter" pitchFamily="34" charset="0"/>
+                <a:ea typeface="Inter" pitchFamily="34" charset="-122"/>
+                <a:cs typeface="Inter" pitchFamily="34" charset="-120"/>
+              </a:rPr>
+              <a:t>Data residency, low latency, DPDP-aligned for Indian schools.</a:t>
+            </a:r>
+            <a:endParaRPr lang="en-US" sz="1100" dirty="0"/>
+          </a:p>
+        </p:txBody>
+      </p:sp>
+      <p:sp>
+        <p:nvSpPr>
+          <p:cNvPr id="17" name="Shape 15"/>
+          <p:cNvSpPr/>
+          <p:nvPr/>
+        </p:nvSpPr>
+        <p:spPr>
+          <a:xfrm>
+            <a:off x="4343400" y="4709160"/>
+            <a:ext cx="3657600" cy="1508760"/>
+          </a:xfrm>
+          <a:prstGeom prst="roundRect">
+            <a:avLst>
+              <a:gd name="adj" fmla="val 6061"/>
+            </a:avLst>
+          </a:prstGeom>
+          <a:solidFill>
+            <a:srgbClr val="FFFFFF"/>
+          </a:solidFill>
+          <a:ln w="12700">
+            <a:solidFill>
+              <a:srgbClr val="E2E8F0"/>
+            </a:solidFill>
+            <a:prstDash val="solid"/>
+          </a:ln>
+        </p:spPr>
+      </p:sp>
+      <p:sp>
+        <p:nvSpPr>
+          <p:cNvPr id="18" name="Text 16"/>
+          <p:cNvSpPr/>
+          <p:nvPr/>
+        </p:nvSpPr>
+        <p:spPr>
+          <a:xfrm>
+            <a:off x="4526280" y="4892040"/>
+            <a:ext cx="3291840" cy="365760"/>
+          </a:xfrm>
+          <a:prstGeom prst="rect">
+            <a:avLst/>
+          </a:prstGeom>
+          <a:noFill/>
+          <a:ln/>
+        </p:spPr>
+        <p:txBody>
+          <a:bodyPr wrap="square" rtlCol="0" anchor="ctr"/>
+          <a:lstStyle/>
+          <a:p>
+            <a:pPr indent="0" marL="0">
+              <a:buNone/>
+            </a:pPr>
+            <a:r>
+              <a:rPr lang="en-US" sz="1400" b="1" dirty="0">
+                <a:solidFill>
+                  <a:srgbClr val="0F172A"/>
+                </a:solidFill>
+                <a:latin typeface="Inter" pitchFamily="34" charset="0"/>
+                <a:ea typeface="Inter" pitchFamily="34" charset="-122"/>
+                <a:cs typeface="Inter" pitchFamily="34" charset="-120"/>
+              </a:rPr>
+              <a:t>🛡️ Privacy-first AI</a:t>
+            </a:r>
+            <a:endParaRPr lang="en-US" sz="1400" dirty="0"/>
+          </a:p>
+        </p:txBody>
+      </p:sp>
+      <p:sp>
+        <p:nvSpPr>
+          <p:cNvPr id="19" name="Text 17"/>
+          <p:cNvSpPr/>
+          <p:nvPr/>
+        </p:nvSpPr>
+        <p:spPr>
+          <a:xfrm>
+            <a:off x="4526280" y="5257800"/>
+            <a:ext cx="3291840" cy="822960"/>
+          </a:xfrm>
+          <a:prstGeom prst="rect">
+            <a:avLst/>
+          </a:prstGeom>
+          <a:noFill/>
+          <a:ln/>
+        </p:spPr>
+        <p:txBody>
+          <a:bodyPr wrap="square" rtlCol="0" anchor="ctr"/>
+          <a:lstStyle/>
+          <a:p>
+            <a:pPr indent="0" marL="0">
+              <a:lnSpc>
+                <a:spcPts val="1600"/>
+              </a:lnSpc>
+              <a:buNone/>
+            </a:pPr>
+            <a:r>
+              <a:rPr lang="en-US" sz="1100" dirty="0">
+                <a:solidFill>
+                  <a:srgbClr val="475569"/>
+                </a:solidFill>
+                <a:latin typeface="Inter" pitchFamily="34" charset="0"/>
+                <a:ea typeface="Inter" pitchFamily="34" charset="-122"/>
+                <a:cs typeface="Inter" pitchFamily="34" charset="-120"/>
+              </a:rPr>
+              <a:t>Face embeddings only. Student data never trains third-party models.</a:t>
+            </a:r>
+            <a:endParaRPr lang="en-US" sz="1100" dirty="0"/>
+          </a:p>
+        </p:txBody>
+      </p:sp>
+      <p:sp>
+        <p:nvSpPr>
+          <p:cNvPr id="20" name="Shape 18"/>
+          <p:cNvSpPr/>
+          <p:nvPr/>
+        </p:nvSpPr>
+        <p:spPr>
+          <a:xfrm>
+            <a:off x="8229600" y="4709160"/>
+            <a:ext cx="3657600" cy="1508760"/>
+          </a:xfrm>
+          <a:prstGeom prst="roundRect">
+            <a:avLst>
+              <a:gd name="adj" fmla="val 6061"/>
+            </a:avLst>
+          </a:prstGeom>
+          <a:solidFill>
+            <a:srgbClr val="FFFFFF"/>
+          </a:solidFill>
+          <a:ln w="12700">
+            <a:solidFill>
+              <a:srgbClr val="E2E8F0"/>
+            </a:solidFill>
+            <a:prstDash val="solid"/>
+          </a:ln>
+        </p:spPr>
+      </p:sp>
+      <p:sp>
+        <p:nvSpPr>
+          <p:cNvPr id="21" name="Text 19"/>
+          <p:cNvSpPr/>
+          <p:nvPr/>
+        </p:nvSpPr>
+        <p:spPr>
+          <a:xfrm>
+            <a:off x="8412480" y="4892040"/>
+            <a:ext cx="3291840" cy="365760"/>
+          </a:xfrm>
+          <a:prstGeom prst="rect">
+            <a:avLst/>
+          </a:prstGeom>
+          <a:noFill/>
+          <a:ln/>
+        </p:spPr>
+        <p:txBody>
+          <a:bodyPr wrap="square" rtlCol="0" anchor="ctr"/>
+          <a:lstStyle/>
+          <a:p>
+            <a:pPr indent="0" marL="0">
+              <a:buNone/>
+            </a:pPr>
+            <a:r>
+              <a:rPr lang="en-US" sz="1400" b="1" dirty="0">
+                <a:solidFill>
+                  <a:srgbClr val="0F172A"/>
+                </a:solidFill>
+                <a:latin typeface="Inter" pitchFamily="34" charset="0"/>
+                <a:ea typeface="Inter" pitchFamily="34" charset="-122"/>
+                <a:cs typeface="Inter" pitchFamily="34" charset="-120"/>
+              </a:rPr>
+              <a:t>📋 Audit logs</a:t>
+            </a:r>
+            <a:endParaRPr lang="en-US" sz="1400" dirty="0"/>
+          </a:p>
+        </p:txBody>
+      </p:sp>
+      <p:sp>
+        <p:nvSpPr>
+          <p:cNvPr id="22" name="Text 20"/>
+          <p:cNvSpPr/>
+          <p:nvPr/>
+        </p:nvSpPr>
+        <p:spPr>
+          <a:xfrm>
+            <a:off x="8412480" y="5257800"/>
+            <a:ext cx="3291840" cy="822960"/>
+          </a:xfrm>
+          <a:prstGeom prst="rect">
+            <a:avLst/>
+          </a:prstGeom>
+          <a:noFill/>
+          <a:ln/>
+        </p:spPr>
+        <p:txBody>
+          <a:bodyPr wrap="square" rtlCol="0" anchor="ctr"/>
+          <a:lstStyle/>
+          <a:p>
+            <a:pPr indent="0" marL="0">
+              <a:lnSpc>
+                <a:spcPts val="1600"/>
+              </a:lnSpc>
+              <a:buNone/>
+            </a:pPr>
+            <a:r>
+              <a:rPr lang="en-US" sz="1100" dirty="0">
+                <a:solidFill>
+                  <a:srgbClr val="475569"/>
+                </a:solidFill>
+                <a:latin typeface="Inter" pitchFamily="34" charset="0"/>
+                <a:ea typeface="Inter" pitchFamily="34" charset="-122"/>
+                <a:cs typeface="Inter" pitchFamily="34" charset="-120"/>
+              </a:rPr>
+              <a:t>Every login, edit, export logged for compliance and forensics.</a:t>
+            </a:r>
+            <a:endParaRPr lang="en-US" sz="1100" dirty="0"/>
+          </a:p>
+        </p:txBody>
+      </p:sp>
+    </p:spTree>
+  </p:cSld>
+  <p:clrMapOvr>
+    <a:masterClrMapping/>
+  </p:clrMapOvr>
+</p:sld>
+</file>
+
+<file path=ppt/slides/slide26.xml><?xml version="1.0" encoding="utf-8"?>
+<p:sld xmlns:a="http://schemas.openxmlformats.org/drawingml/2006/main" xmlns:r="http://schemas.openxmlformats.org/officeDocument/2006/relationships" xmlns:p="http://schemas.openxmlformats.org/presentationml/2006/main">
+  <p:cSld name="Slide 26">
+    <p:spTree>
+      <p:nvGrpSpPr>
+        <p:cNvPr id="1" name=""/>
+        <p:cNvGrpSpPr/>
+        <p:nvPr/>
+      </p:nvGrpSpPr>
+      <p:grpSpPr>
+        <a:xfrm>
+          <a:off x="0" y="0"/>
+          <a:ext cx="0" cy="0"/>
+          <a:chOff x="0" y="0"/>
+          <a:chExt cx="0" cy="0"/>
+        </a:xfrm>
+      </p:grpSpPr>
+      <p:sp>
+        <p:nvSpPr>
+          <p:cNvPr id="2" name="Text 0"/>
+          <p:cNvSpPr/>
+          <p:nvPr/>
+        </p:nvSpPr>
+        <p:spPr>
+          <a:xfrm>
+            <a:off x="457200" y="365760"/>
+            <a:ext cx="11247120" cy="274320"/>
+          </a:xfrm>
+          <a:prstGeom prst="rect">
+            <a:avLst/>
+          </a:prstGeom>
+          <a:noFill/>
+          <a:ln/>
+        </p:spPr>
+        <p:txBody>
+          <a:bodyPr wrap="square" rtlCol="0" anchor="ctr"/>
+          <a:lstStyle/>
+          <a:p>
+            <a:pPr indent="0" marL="0">
+              <a:buNone/>
+            </a:pPr>
+            <a:r>
+              <a:rPr lang="en-US" sz="1100" b="1" spc="600" kern="0" dirty="0">
+                <a:solidFill>
+                  <a:srgbClr val="A855F7"/>
+                </a:solidFill>
+                <a:latin typeface="Inter" pitchFamily="34" charset="0"/>
+                <a:ea typeface="Inter" pitchFamily="34" charset="-122"/>
+                <a:cs typeface="Inter" pitchFamily="34" charset="-120"/>
+              </a:rPr>
+              <a:t>EDITIONS</a:t>
+            </a:r>
+            <a:endParaRPr lang="en-US" sz="1100" dirty="0"/>
+          </a:p>
+        </p:txBody>
+      </p:sp>
+      <p:sp>
+        <p:nvSpPr>
+          <p:cNvPr id="3" name="Text 1"/>
+          <p:cNvSpPr/>
+          <p:nvPr/>
+        </p:nvSpPr>
+        <p:spPr>
+          <a:xfrm>
+            <a:off x="457200" y="640080"/>
+            <a:ext cx="11247120" cy="1280160"/>
+          </a:xfrm>
+          <a:prstGeom prst="rect">
+            <a:avLst/>
+          </a:prstGeom>
+          <a:noFill/>
+          <a:ln/>
+        </p:spPr>
+        <p:txBody>
+          <a:bodyPr wrap="square" rtlCol="0" anchor="ctr"/>
+          <a:lstStyle/>
+          <a:p>
+            <a:pPr indent="0" marL="0">
+              <a:buNone/>
+            </a:pPr>
+            <a:r>
+              <a:rPr lang="en-US" sz="3600" b="1" dirty="0">
+                <a:solidFill>
+                  <a:srgbClr val="0F172A"/>
+                </a:solidFill>
+                <a:latin typeface="Inter" pitchFamily="34" charset="0"/>
+                <a:ea typeface="Inter" pitchFamily="34" charset="-122"/>
+                <a:cs typeface="Inter" pitchFamily="34" charset="-120"/>
+              </a:rPr>
+              <a:t>Pick the edition that fits your school.</a:t>
+            </a:r>
+            <a:endParaRPr lang="en-US" sz="3600" dirty="0"/>
+          </a:p>
+        </p:txBody>
+      </p:sp>
+      <p:sp>
+        <p:nvSpPr>
+          <p:cNvPr id="4" name="Shape 2"/>
+          <p:cNvSpPr/>
+          <p:nvPr/>
+        </p:nvSpPr>
+        <p:spPr>
+          <a:xfrm>
+            <a:off x="457200" y="2286000"/>
+            <a:ext cx="3657600" cy="3840480"/>
+          </a:xfrm>
+          <a:prstGeom prst="roundRect">
+            <a:avLst>
+              <a:gd name="adj" fmla="val 3750"/>
+            </a:avLst>
+          </a:prstGeom>
+          <a:solidFill>
+            <a:srgbClr val="FFFFFF"/>
+          </a:solidFill>
+          <a:ln w="12700">
+            <a:solidFill>
+              <a:srgbClr val="E2E8F0"/>
+            </a:solidFill>
+            <a:prstDash val="solid"/>
+          </a:ln>
+        </p:spPr>
+      </p:sp>
+      <p:sp>
+        <p:nvSpPr>
+          <p:cNvPr id="5" name="Text 3"/>
+          <p:cNvSpPr/>
+          <p:nvPr/>
+        </p:nvSpPr>
+        <p:spPr>
+          <a:xfrm>
+            <a:off x="685800" y="2423160"/>
+            <a:ext cx="3200400" cy="274320"/>
+          </a:xfrm>
+          <a:prstGeom prst="rect">
+            <a:avLst/>
+          </a:prstGeom>
+          <a:noFill/>
+          <a:ln/>
+        </p:spPr>
+        <p:txBody>
+          <a:bodyPr wrap="square" rtlCol="0" anchor="ctr"/>
+          <a:lstStyle/>
+          <a:p>
+            <a:pPr indent="0" marL="0">
+              <a:buNone/>
+            </a:pPr>
+            <a:r>
+              <a:rPr lang="en-US" sz="900" b="1" spc="400" kern="0" dirty="0">
+                <a:solidFill>
+                  <a:srgbClr val="64748B"/>
+                </a:solidFill>
+                <a:latin typeface="Inter" pitchFamily="34" charset="0"/>
+                <a:ea typeface="Inter" pitchFamily="34" charset="-122"/>
+                <a:cs typeface="Inter" pitchFamily="34" charset="-120"/>
+              </a:rPr>
+              <a:t>STARTER</a:t>
+            </a:r>
+            <a:endParaRPr lang="en-US" sz="900" dirty="0"/>
+          </a:p>
+        </p:txBody>
+      </p:sp>
+      <p:sp>
+        <p:nvSpPr>
+          <p:cNvPr id="6" name="Text 4"/>
+          <p:cNvSpPr/>
+          <p:nvPr/>
+        </p:nvSpPr>
+        <p:spPr>
+          <a:xfrm>
+            <a:off x="685800" y="2743200"/>
+            <a:ext cx="3200400" cy="548640"/>
+          </a:xfrm>
+          <a:prstGeom prst="rect">
+            <a:avLst/>
+          </a:prstGeom>
+          <a:noFill/>
+          <a:ln/>
+        </p:spPr>
+        <p:txBody>
+          <a:bodyPr wrap="square" rtlCol="0" anchor="ctr"/>
+          <a:lstStyle/>
+          <a:p>
+            <a:pPr indent="0" marL="0">
+              <a:buNone/>
+            </a:pPr>
+            <a:r>
+              <a:rPr lang="en-US" sz="2200" b="1" dirty="0">
+                <a:solidFill>
+                  <a:srgbClr val="0F172A"/>
+                </a:solidFill>
+                <a:latin typeface="Inter" pitchFamily="34" charset="0"/>
+                <a:ea typeface="Inter" pitchFamily="34" charset="-122"/>
+                <a:cs typeface="Inter" pitchFamily="34" charset="-120"/>
+              </a:rPr>
+              <a:t>Operate</a:t>
+            </a:r>
+            <a:endParaRPr lang="en-US" sz="2200" dirty="0"/>
+          </a:p>
+        </p:txBody>
+      </p:sp>
+      <p:sp>
+        <p:nvSpPr>
+          <p:cNvPr id="7" name="Text 5"/>
+          <p:cNvSpPr/>
+          <p:nvPr/>
+        </p:nvSpPr>
+        <p:spPr>
+          <a:xfrm>
+            <a:off x="685800" y="3383280"/>
+            <a:ext cx="3200400" cy="2560320"/>
+          </a:xfrm>
+          <a:prstGeom prst="rect">
+            <a:avLst/>
+          </a:prstGeom>
+          <a:noFill/>
+          <a:ln/>
+        </p:spPr>
+        <p:txBody>
+          <a:bodyPr wrap="square" rtlCol="0" anchor="ctr"/>
+          <a:lstStyle/>
+          <a:p>
+            <a:pPr marL="342900" indent="-342900">
+              <a:lnSpc>
+                <a:spcPts val="1800"/>
+              </a:lnSpc>
+              <a:buSzPct val="100000"/>
+              <a:buChar char="●"/>
+            </a:pPr>
+            <a:r>
+              <a:rPr lang="en-US" sz="1100" dirty="0">
+                <a:solidFill>
+                  <a:srgbClr val="0F172A"/>
+                </a:solidFill>
+                <a:latin typeface="Inter" pitchFamily="34" charset="0"/>
+                <a:ea typeface="Inter" pitchFamily="34" charset="-122"/>
+                <a:cs typeface="Inter" pitchFamily="34" charset="-120"/>
+              </a:rPr>
+              <a:t>Admissions &amp; fees</a:t>
+            </a:r>
+            <a:endParaRPr lang="en-US" sz="1100" dirty="0"/>
+          </a:p>
+          <a:p>
+            <a:pPr marL="342900" indent="-342900">
+              <a:lnSpc>
+                <a:spcPts val="1800"/>
+              </a:lnSpc>
+              <a:buSzPct val="100000"/>
+              <a:buChar char="●"/>
+            </a:pPr>
+            <a:r>
+              <a:rPr lang="en-US" sz="1100" dirty="0">
+                <a:solidFill>
+                  <a:srgbClr val="0F172A"/>
+                </a:solidFill>
+                <a:latin typeface="Inter" pitchFamily="34" charset="0"/>
+                <a:ea typeface="Inter" pitchFamily="34" charset="-122"/>
+                <a:cs typeface="Inter" pitchFamily="34" charset="-120"/>
+              </a:rPr>
+              <a:t>HR &amp; payroll</a:t>
+            </a:r>
+            <a:endParaRPr lang="en-US" sz="1100" dirty="0"/>
+          </a:p>
+          <a:p>
+            <a:pPr marL="342900" indent="-342900">
+              <a:lnSpc>
+                <a:spcPts val="1800"/>
+              </a:lnSpc>
+              <a:buSzPct val="100000"/>
+              <a:buChar char="●"/>
+            </a:pPr>
+            <a:r>
+              <a:rPr lang="en-US" sz="1100" dirty="0">
+                <a:solidFill>
+                  <a:srgbClr val="0F172A"/>
+                </a:solidFill>
+                <a:latin typeface="Inter" pitchFamily="34" charset="0"/>
+                <a:ea typeface="Inter" pitchFamily="34" charset="-122"/>
+                <a:cs typeface="Inter" pitchFamily="34" charset="-120"/>
+              </a:rPr>
+              <a:t>Timetable &amp; exams</a:t>
+            </a:r>
+            <a:endParaRPr lang="en-US" sz="1100" dirty="0"/>
+          </a:p>
+          <a:p>
+            <a:pPr marL="342900" indent="-342900">
+              <a:lnSpc>
+                <a:spcPts val="1800"/>
+              </a:lnSpc>
+              <a:buSzPct val="100000"/>
+              <a:buChar char="●"/>
+            </a:pPr>
+            <a:r>
+              <a:rPr lang="en-US" sz="1100" dirty="0">
+                <a:solidFill>
+                  <a:srgbClr val="0F172A"/>
+                </a:solidFill>
+                <a:latin typeface="Inter" pitchFamily="34" charset="0"/>
+                <a:ea typeface="Inter" pitchFamily="34" charset="-122"/>
+                <a:cs typeface="Inter" pitchFamily="34" charset="-120"/>
+              </a:rPr>
+              <a:t>Report cards</a:t>
+            </a:r>
+            <a:endParaRPr lang="en-US" sz="1100" dirty="0"/>
+          </a:p>
+          <a:p>
+            <a:pPr marL="342900" indent="-342900">
+              <a:lnSpc>
+                <a:spcPts val="1800"/>
+              </a:lnSpc>
+              <a:buSzPct val="100000"/>
+              <a:buChar char="●"/>
+            </a:pPr>
+            <a:r>
+              <a:rPr lang="en-US" sz="1100" dirty="0">
+                <a:solidFill>
+                  <a:srgbClr val="0F172A"/>
+                </a:solidFill>
+                <a:latin typeface="Inter" pitchFamily="34" charset="0"/>
+                <a:ea typeface="Inter" pitchFamily="34" charset="-122"/>
+                <a:cs typeface="Inter" pitchFamily="34" charset="-120"/>
+              </a:rPr>
+              <a:t>Library · Transport · Hostel</a:t>
+            </a:r>
+            <a:endParaRPr lang="en-US" sz="1100" dirty="0"/>
+          </a:p>
+          <a:p>
+            <a:pPr marL="342900" indent="-342900">
+              <a:lnSpc>
+                <a:spcPts val="1800"/>
+              </a:lnSpc>
+              <a:buSzPct val="100000"/>
+              <a:buChar char="●"/>
+            </a:pPr>
+            <a:r>
+              <a:rPr lang="en-US" sz="1100" dirty="0">
+                <a:solidFill>
+                  <a:srgbClr val="0F172A"/>
+                </a:solidFill>
+                <a:latin typeface="Inter" pitchFamily="34" charset="0"/>
+                <a:ea typeface="Inter" pitchFamily="34" charset="-122"/>
+                <a:cs typeface="Inter" pitchFamily="34" charset="-120"/>
+              </a:rPr>
+              <a:t>Parent portal</a:t>
+            </a:r>
+            <a:endParaRPr lang="en-US" sz="1100" dirty="0"/>
+          </a:p>
+        </p:txBody>
+      </p:sp>
+      <p:sp>
+        <p:nvSpPr>
+          <p:cNvPr id="8" name="Shape 6"/>
+          <p:cNvSpPr/>
+          <p:nvPr/>
+        </p:nvSpPr>
+        <p:spPr>
+          <a:xfrm>
+            <a:off x="4343400" y="2286000"/>
+            <a:ext cx="3657600" cy="3840480"/>
+          </a:xfrm>
+          <a:prstGeom prst="roundRect">
+            <a:avLst>
+              <a:gd name="adj" fmla="val 3750"/>
+            </a:avLst>
+          </a:prstGeom>
+          <a:solidFill>
+            <a:srgbClr val="FFFFFF"/>
+          </a:solidFill>
+          <a:ln w="25400">
+            <a:solidFill>
+              <a:srgbClr val="A855F7"/>
+            </a:solidFill>
+            <a:prstDash val="solid"/>
+          </a:ln>
+        </p:spPr>
+      </p:sp>
+      <p:sp>
+        <p:nvSpPr>
+          <p:cNvPr id="9" name="Text 7"/>
+          <p:cNvSpPr/>
+          <p:nvPr/>
+        </p:nvSpPr>
+        <p:spPr>
+          <a:xfrm>
+            <a:off x="4572000" y="2423160"/>
+            <a:ext cx="3200400" cy="274320"/>
+          </a:xfrm>
+          <a:prstGeom prst="rect">
+            <a:avLst/>
+          </a:prstGeom>
+          <a:noFill/>
+          <a:ln/>
+        </p:spPr>
+        <p:txBody>
+          <a:bodyPr wrap="square" rtlCol="0" anchor="ctr"/>
+          <a:lstStyle/>
+          <a:p>
+            <a:pPr indent="0" marL="0">
+              <a:buNone/>
+            </a:pPr>
+            <a:r>
+              <a:rPr lang="en-US" sz="900" b="1" spc="400" kern="0" dirty="0">
+                <a:solidFill>
+                  <a:srgbClr val="A855F7"/>
+                </a:solidFill>
+                <a:latin typeface="Inter" pitchFamily="34" charset="0"/>
+                <a:ea typeface="Inter" pitchFamily="34" charset="-122"/>
+                <a:cs typeface="Inter" pitchFamily="34" charset="-120"/>
+              </a:rPr>
+              <a:t>MOST POPULAR</a:t>
+            </a:r>
+            <a:endParaRPr lang="en-US" sz="900" dirty="0"/>
+          </a:p>
+        </p:txBody>
+      </p:sp>
+      <p:sp>
+        <p:nvSpPr>
+          <p:cNvPr id="10" name="Text 8"/>
+          <p:cNvSpPr/>
+          <p:nvPr/>
+        </p:nvSpPr>
+        <p:spPr>
+          <a:xfrm>
+            <a:off x="4572000" y="2743200"/>
+            <a:ext cx="3200400" cy="548640"/>
+          </a:xfrm>
+          <a:prstGeom prst="rect">
+            <a:avLst/>
+          </a:prstGeom>
+          <a:noFill/>
+          <a:ln/>
+        </p:spPr>
+        <p:txBody>
+          <a:bodyPr wrap="square" rtlCol="0" anchor="ctr"/>
+          <a:lstStyle/>
+          <a:p>
+            <a:pPr indent="0" marL="0">
+              <a:buNone/>
+            </a:pPr>
+            <a:r>
+              <a:rPr lang="en-US" sz="2200" b="1" dirty="0">
+                <a:solidFill>
+                  <a:srgbClr val="0F172A"/>
+                </a:solidFill>
+                <a:latin typeface="Inter" pitchFamily="34" charset="0"/>
+                <a:ea typeface="Inter" pitchFamily="34" charset="-122"/>
+                <a:cs typeface="Inter" pitchFamily="34" charset="-120"/>
+              </a:rPr>
+              <a:t>Operate + Cortex</a:t>
+            </a:r>
+            <a:endParaRPr lang="en-US" sz="2200" dirty="0"/>
+          </a:p>
+        </p:txBody>
+      </p:sp>
+      <p:sp>
+        <p:nvSpPr>
+          <p:cNvPr id="11" name="Text 9"/>
+          <p:cNvSpPr/>
+          <p:nvPr/>
+        </p:nvSpPr>
+        <p:spPr>
+          <a:xfrm>
+            <a:off x="4572000" y="3383280"/>
+            <a:ext cx="3200400" cy="2560320"/>
+          </a:xfrm>
+          <a:prstGeom prst="rect">
+            <a:avLst/>
+          </a:prstGeom>
+          <a:noFill/>
+          <a:ln/>
+        </p:spPr>
+        <p:txBody>
+          <a:bodyPr wrap="square" rtlCol="0" anchor="ctr"/>
+          <a:lstStyle/>
+          <a:p>
+            <a:pPr marL="342900" indent="-342900">
+              <a:lnSpc>
+                <a:spcPts val="1800"/>
+              </a:lnSpc>
+              <a:buSzPct val="100000"/>
+              <a:buChar char="●"/>
+            </a:pPr>
+            <a:r>
+              <a:rPr lang="en-US" sz="1100" dirty="0">
+                <a:solidFill>
+                  <a:srgbClr val="0F172A"/>
+                </a:solidFill>
+                <a:latin typeface="Inter" pitchFamily="34" charset="0"/>
+                <a:ea typeface="Inter" pitchFamily="34" charset="-122"/>
+                <a:cs typeface="Inter" pitchFamily="34" charset="-120"/>
+              </a:rPr>
+              <a:t>Everything in Operate</a:t>
+            </a:r>
+            <a:endParaRPr lang="en-US" sz="1100" dirty="0"/>
+          </a:p>
+          <a:p>
+            <a:pPr marL="342900" indent="-342900">
+              <a:lnSpc>
+                <a:spcPts val="1800"/>
+              </a:lnSpc>
+              <a:buSzPct val="100000"/>
+              <a:buChar char="●"/>
+            </a:pPr>
+            <a:r>
+              <a:rPr lang="en-US" sz="1100" dirty="0">
+                <a:solidFill>
+                  <a:srgbClr val="0F172A"/>
+                </a:solidFill>
+                <a:latin typeface="Inter" pitchFamily="34" charset="0"/>
+                <a:ea typeface="Inter" pitchFamily="34" charset="-122"/>
+                <a:cs typeface="Inter" pitchFamily="34" charset="-120"/>
+              </a:rPr>
+              <a:t>Chapter Generator</a:t>
+            </a:r>
+            <a:endParaRPr lang="en-US" sz="1100" dirty="0"/>
+          </a:p>
+          <a:p>
+            <a:pPr marL="342900" indent="-342900">
+              <a:lnSpc>
+                <a:spcPts val="1800"/>
+              </a:lnSpc>
+              <a:buSzPct val="100000"/>
+              <a:buChar char="●"/>
+            </a:pPr>
+            <a:r>
+              <a:rPr lang="en-US" sz="1100" dirty="0">
+                <a:solidFill>
+                  <a:srgbClr val="0F172A"/>
+                </a:solidFill>
+                <a:latin typeface="Inter" pitchFamily="34" charset="0"/>
+                <a:ea typeface="Inter" pitchFamily="34" charset="-122"/>
+                <a:cs typeface="Inter" pitchFamily="34" charset="-120"/>
+              </a:rPr>
+              <a:t>150k Question Bank</a:t>
+            </a:r>
+            <a:endParaRPr lang="en-US" sz="1100" dirty="0"/>
+          </a:p>
+          <a:p>
+            <a:pPr marL="342900" indent="-342900">
+              <a:lnSpc>
+                <a:spcPts val="1800"/>
+              </a:lnSpc>
+              <a:buSzPct val="100000"/>
+              <a:buChar char="●"/>
+            </a:pPr>
+            <a:r>
+              <a:rPr lang="en-US" sz="1100" dirty="0">
+                <a:solidFill>
+                  <a:srgbClr val="0F172A"/>
+                </a:solidFill>
+                <a:latin typeface="Inter" pitchFamily="34" charset="0"/>
+                <a:ea typeface="Inter" pitchFamily="34" charset="-122"/>
+                <a:cs typeface="Inter" pitchFamily="34" charset="-120"/>
+              </a:rPr>
+              <a:t>Assessment Creator</a:t>
+            </a:r>
+            <a:endParaRPr lang="en-US" sz="1100" dirty="0"/>
+          </a:p>
+          <a:p>
+            <a:pPr marL="342900" indent="-342900">
+              <a:lnSpc>
+                <a:spcPts val="1800"/>
+              </a:lnSpc>
+              <a:buSzPct val="100000"/>
+              <a:buChar char="●"/>
+            </a:pPr>
+            <a:r>
+              <a:rPr lang="en-US" sz="1100" dirty="0">
+                <a:solidFill>
+                  <a:srgbClr val="0F172A"/>
+                </a:solidFill>
+                <a:latin typeface="Inter" pitchFamily="34" charset="0"/>
+                <a:ea typeface="Inter" pitchFamily="34" charset="-122"/>
+                <a:cs typeface="Inter" pitchFamily="34" charset="-120"/>
+              </a:rPr>
+              <a:t>Lesson plans</a:t>
+            </a:r>
+            <a:endParaRPr lang="en-US" sz="1100" dirty="0"/>
+          </a:p>
+          <a:p>
+            <a:pPr marL="342900" indent="-342900">
+              <a:lnSpc>
+                <a:spcPts val="1800"/>
+              </a:lnSpc>
+              <a:buSzPct val="100000"/>
+              <a:buChar char="●"/>
+            </a:pPr>
+            <a:r>
+              <a:rPr lang="en-US" sz="1100" dirty="0">
+                <a:solidFill>
+                  <a:srgbClr val="0F172A"/>
+                </a:solidFill>
+                <a:latin typeface="Inter" pitchFamily="34" charset="0"/>
+                <a:ea typeface="Inter" pitchFamily="34" charset="-122"/>
+                <a:cs typeface="Inter" pitchFamily="34" charset="-120"/>
+              </a:rPr>
+              <a:t>Cortex Helper bot</a:t>
+            </a:r>
+            <a:endParaRPr lang="en-US" sz="1100" dirty="0"/>
+          </a:p>
+        </p:txBody>
+      </p:sp>
+      <p:sp>
+        <p:nvSpPr>
+          <p:cNvPr id="12" name="Shape 10"/>
+          <p:cNvSpPr/>
+          <p:nvPr/>
+        </p:nvSpPr>
+        <p:spPr>
+          <a:xfrm>
+            <a:off x="8229600" y="2286000"/>
+            <a:ext cx="3657600" cy="3840480"/>
+          </a:xfrm>
+          <a:prstGeom prst="roundRect">
+            <a:avLst>
+              <a:gd name="adj" fmla="val 3750"/>
+            </a:avLst>
+          </a:prstGeom>
+          <a:solidFill>
+            <a:srgbClr val="FFFFFF"/>
+          </a:solidFill>
+          <a:ln w="12700">
+            <a:solidFill>
+              <a:srgbClr val="E2E8F0"/>
+            </a:solidFill>
+            <a:prstDash val="solid"/>
+          </a:ln>
+        </p:spPr>
+      </p:sp>
+      <p:sp>
+        <p:nvSpPr>
+          <p:cNvPr id="13" name="Text 11"/>
+          <p:cNvSpPr/>
+          <p:nvPr/>
+        </p:nvSpPr>
+        <p:spPr>
+          <a:xfrm>
+            <a:off x="8458200" y="2423160"/>
+            <a:ext cx="3200400" cy="274320"/>
+          </a:xfrm>
+          <a:prstGeom prst="rect">
+            <a:avLst/>
+          </a:prstGeom>
+          <a:noFill/>
+          <a:ln/>
+        </p:spPr>
+        <p:txBody>
+          <a:bodyPr wrap="square" rtlCol="0" anchor="ctr"/>
+          <a:lstStyle/>
+          <a:p>
+            <a:pPr indent="0" marL="0">
+              <a:buNone/>
+            </a:pPr>
+            <a:r>
+              <a:rPr lang="en-US" sz="900" b="1" spc="400" kern="0" dirty="0">
+                <a:solidFill>
+                  <a:srgbClr val="64748B"/>
+                </a:solidFill>
+                <a:latin typeface="Inter" pitchFamily="34" charset="0"/>
+                <a:ea typeface="Inter" pitchFamily="34" charset="-122"/>
+                <a:cs typeface="Inter" pitchFamily="34" charset="-120"/>
+              </a:rPr>
+              <a:t>ENTERPRISE</a:t>
+            </a:r>
+            <a:endParaRPr lang="en-US" sz="900" dirty="0"/>
+          </a:p>
+        </p:txBody>
+      </p:sp>
+      <p:sp>
+        <p:nvSpPr>
+          <p:cNvPr id="14" name="Text 12"/>
+          <p:cNvSpPr/>
+          <p:nvPr/>
+        </p:nvSpPr>
+        <p:spPr>
+          <a:xfrm>
+            <a:off x="8458200" y="2743200"/>
+            <a:ext cx="3200400" cy="548640"/>
+          </a:xfrm>
+          <a:prstGeom prst="rect">
+            <a:avLst/>
+          </a:prstGeom>
+          <a:noFill/>
+          <a:ln/>
+        </p:spPr>
+        <p:txBody>
+          <a:bodyPr wrap="square" rtlCol="0" anchor="ctr"/>
+          <a:lstStyle/>
+          <a:p>
+            <a:pPr indent="0" marL="0">
+              <a:buNone/>
+            </a:pPr>
+            <a:r>
+              <a:rPr lang="en-US" sz="2200" b="1" dirty="0">
+                <a:solidFill>
+                  <a:srgbClr val="0F172A"/>
+                </a:solidFill>
+                <a:latin typeface="Inter" pitchFamily="34" charset="0"/>
+                <a:ea typeface="Inter" pitchFamily="34" charset="-122"/>
+                <a:cs typeface="Inter" pitchFamily="34" charset="-120"/>
+              </a:rPr>
+              <a:t>Everything</a:t>
+            </a:r>
+            <a:endParaRPr lang="en-US" sz="2200" dirty="0"/>
+          </a:p>
+        </p:txBody>
+      </p:sp>
+      <p:sp>
+        <p:nvSpPr>
+          <p:cNvPr id="15" name="Text 13"/>
+          <p:cNvSpPr/>
+          <p:nvPr/>
+        </p:nvSpPr>
+        <p:spPr>
+          <a:xfrm>
+            <a:off x="8458200" y="3383280"/>
+            <a:ext cx="3200400" cy="2560320"/>
+          </a:xfrm>
+          <a:prstGeom prst="rect">
+            <a:avLst/>
+          </a:prstGeom>
+          <a:noFill/>
+          <a:ln/>
+        </p:spPr>
+        <p:txBody>
+          <a:bodyPr wrap="square" rtlCol="0" anchor="ctr"/>
+          <a:lstStyle/>
+          <a:p>
+            <a:pPr marL="342900" indent="-342900">
+              <a:lnSpc>
+                <a:spcPts val="1800"/>
+              </a:lnSpc>
+              <a:buSzPct val="100000"/>
+              <a:buChar char="●"/>
+            </a:pPr>
+            <a:r>
+              <a:rPr lang="en-US" sz="1100" dirty="0">
+                <a:solidFill>
+                  <a:srgbClr val="0F172A"/>
+                </a:solidFill>
+                <a:latin typeface="Inter" pitchFamily="34" charset="0"/>
+                <a:ea typeface="Inter" pitchFamily="34" charset="-122"/>
+                <a:cs typeface="Inter" pitchFamily="34" charset="-120"/>
+              </a:rPr>
+              <a:t>Everything in Pro</a:t>
+            </a:r>
+            <a:endParaRPr lang="en-US" sz="1100" dirty="0"/>
+          </a:p>
+          <a:p>
+            <a:pPr marL="342900" indent="-342900">
+              <a:lnSpc>
+                <a:spcPts val="1800"/>
+              </a:lnSpc>
+              <a:buSzPct val="100000"/>
+              <a:buChar char="●"/>
+            </a:pPr>
+            <a:r>
+              <a:rPr lang="en-US" sz="1100" dirty="0">
+                <a:solidFill>
+                  <a:srgbClr val="0F172A"/>
+                </a:solidFill>
+                <a:latin typeface="Inter" pitchFamily="34" charset="0"/>
+                <a:ea typeface="Inter" pitchFamily="34" charset="-122"/>
+                <a:cs typeface="Inter" pitchFamily="34" charset="-120"/>
+              </a:rPr>
+              <a:t>AI Evaluator</a:t>
+            </a:r>
+            <a:endParaRPr lang="en-US" sz="1100" dirty="0"/>
+          </a:p>
+          <a:p>
+            <a:pPr marL="342900" indent="-342900">
+              <a:lnSpc>
+                <a:spcPts val="1800"/>
+              </a:lnSpc>
+              <a:buSzPct val="100000"/>
+              <a:buChar char="●"/>
+            </a:pPr>
+            <a:r>
+              <a:rPr lang="en-US" sz="1100" dirty="0">
+                <a:solidFill>
+                  <a:srgbClr val="0F172A"/>
+                </a:solidFill>
+                <a:latin typeface="Inter" pitchFamily="34" charset="0"/>
+                <a:ea typeface="Inter" pitchFamily="34" charset="-122"/>
+                <a:cs typeface="Inter" pitchFamily="34" charset="-120"/>
+              </a:rPr>
+              <a:t>Face AI Attendance</a:t>
+            </a:r>
+            <a:endParaRPr lang="en-US" sz="1100" dirty="0"/>
+          </a:p>
+          <a:p>
+            <a:pPr marL="342900" indent="-342900">
+              <a:lnSpc>
+                <a:spcPts val="1800"/>
+              </a:lnSpc>
+              <a:buSzPct val="100000"/>
+              <a:buChar char="●"/>
+            </a:pPr>
+            <a:r>
+              <a:rPr lang="en-US" sz="1100" dirty="0">
+                <a:solidFill>
+                  <a:srgbClr val="0F172A"/>
+                </a:solidFill>
+                <a:latin typeface="Inter" pitchFamily="34" charset="0"/>
+                <a:ea typeface="Inter" pitchFamily="34" charset="-122"/>
+                <a:cs typeface="Inter" pitchFamily="34" charset="-120"/>
+              </a:rPr>
+              <a:t>Teacher Assist (2026)</a:t>
+            </a:r>
+            <a:endParaRPr lang="en-US" sz="1100" dirty="0"/>
+          </a:p>
+          <a:p>
+            <a:pPr marL="342900" indent="-342900">
+              <a:lnSpc>
+                <a:spcPts val="1800"/>
+              </a:lnSpc>
+              <a:buSzPct val="100000"/>
+              <a:buChar char="●"/>
+            </a:pPr>
+            <a:r>
+              <a:rPr lang="en-US" sz="1100" dirty="0">
+                <a:solidFill>
+                  <a:srgbClr val="0F172A"/>
+                </a:solidFill>
+                <a:latin typeface="Inter" pitchFamily="34" charset="0"/>
+                <a:ea typeface="Inter" pitchFamily="34" charset="-122"/>
+                <a:cs typeface="Inter" pitchFamily="34" charset="-120"/>
+              </a:rPr>
+              <a:t>Student Surveillance (2026)</a:t>
+            </a:r>
+            <a:endParaRPr lang="en-US" sz="1100" dirty="0"/>
+          </a:p>
+          <a:p>
+            <a:pPr marL="342900" indent="-342900">
+              <a:lnSpc>
+                <a:spcPts val="1800"/>
+              </a:lnSpc>
+              <a:buSzPct val="100000"/>
+              <a:buChar char="●"/>
+            </a:pPr>
+            <a:r>
+              <a:rPr lang="en-US" sz="1100" dirty="0">
+                <a:solidFill>
+                  <a:srgbClr val="0F172A"/>
+                </a:solidFill>
+                <a:latin typeface="Inter" pitchFamily="34" charset="0"/>
+                <a:ea typeface="Inter" pitchFamily="34" charset="-122"/>
+                <a:cs typeface="Inter" pitchFamily="34" charset="-120"/>
+              </a:rPr>
+              <a:t>Dedicated CSM</a:t>
+            </a:r>
+            <a:endParaRPr lang="en-US" sz="1100" dirty="0"/>
+          </a:p>
+        </p:txBody>
+      </p:sp>
+      <p:sp>
+        <p:nvSpPr>
+          <p:cNvPr id="16" name="Text 14"/>
+          <p:cNvSpPr/>
+          <p:nvPr/>
+        </p:nvSpPr>
+        <p:spPr>
+          <a:xfrm>
+            <a:off x="457200" y="6263640"/>
+            <a:ext cx="10972800" cy="457200"/>
+          </a:xfrm>
+          <a:prstGeom prst="rect">
+            <a:avLst/>
+          </a:prstGeom>
+          <a:noFill/>
+          <a:ln/>
+        </p:spPr>
+        <p:txBody>
+          <a:bodyPr wrap="square" rtlCol="0" anchor="ctr"/>
+          <a:lstStyle/>
+          <a:p>
+            <a:pPr indent="0" marL="0">
+              <a:buNone/>
+            </a:pPr>
+            <a:r>
+              <a:rPr lang="en-US" sz="1300" dirty="0">
+                <a:solidFill>
+                  <a:srgbClr val="475569"/>
+                </a:solidFill>
+                <a:latin typeface="Inter" pitchFamily="34" charset="0"/>
+                <a:ea typeface="Inter" pitchFamily="34" charset="-122"/>
+                <a:cs typeface="Inter" pitchFamily="34" charset="-120"/>
+              </a:rPr>
+              <a:t>Pricing scales with student count. We'll send a tailored quote within 48 hours of this demo.</a:t>
+            </a:r>
+            <a:endParaRPr lang="en-US" sz="1300" dirty="0"/>
+          </a:p>
+        </p:txBody>
+      </p:sp>
+    </p:spTree>
+  </p:cSld>
+  <p:clrMapOvr>
+    <a:masterClrMapping/>
+  </p:clrMapOvr>
+</p:sld>
+</file>
+
+<file path=ppt/slides/slide27.xml><?xml version="1.0" encoding="utf-8"?>
+<p:sld xmlns:a="http://schemas.openxmlformats.org/drawingml/2006/main" xmlns:r="http://schemas.openxmlformats.org/officeDocument/2006/relationships" xmlns:p="http://schemas.openxmlformats.org/presentationml/2006/main">
+  <p:cSld name="Slide 27">
+    <p:spTree>
+      <p:nvGrpSpPr>
+        <p:cNvPr id="1" name=""/>
+        <p:cNvGrpSpPr/>
+        <p:nvPr/>
+      </p:nvGrpSpPr>
+      <p:grpSpPr>
+        <a:xfrm>
+          <a:off x="0" y="0"/>
+          <a:ext cx="0" cy="0"/>
+          <a:chOff x="0" y="0"/>
+          <a:chExt cx="0" cy="0"/>
+        </a:xfrm>
+      </p:grpSpPr>
+      <p:sp>
+        <p:nvSpPr>
+          <p:cNvPr id="2" name="Text 0"/>
+          <p:cNvSpPr/>
+          <p:nvPr/>
+        </p:nvSpPr>
+        <p:spPr>
+          <a:xfrm>
+            <a:off x="457200" y="365760"/>
+            <a:ext cx="11247120" cy="274320"/>
+          </a:xfrm>
+          <a:prstGeom prst="rect">
+            <a:avLst/>
+          </a:prstGeom>
+          <a:noFill/>
+          <a:ln/>
+        </p:spPr>
+        <p:txBody>
+          <a:bodyPr wrap="square" rtlCol="0" anchor="ctr"/>
+          <a:lstStyle/>
+          <a:p>
+            <a:pPr indent="0" marL="0">
+              <a:buNone/>
+            </a:pPr>
+            <a:r>
+              <a:rPr lang="en-US" sz="1100" b="1" spc="600" kern="0" dirty="0">
+                <a:solidFill>
+                  <a:srgbClr val="A855F7"/>
+                </a:solidFill>
+                <a:latin typeface="Inter" pitchFamily="34" charset="0"/>
+                <a:ea typeface="Inter" pitchFamily="34" charset="-122"/>
+                <a:cs typeface="Inter" pitchFamily="34" charset="-120"/>
+              </a:rPr>
+              <a:t>ONBOARDING</a:t>
+            </a:r>
+            <a:endParaRPr lang="en-US" sz="1100" dirty="0"/>
+          </a:p>
+        </p:txBody>
+      </p:sp>
+      <p:sp>
+        <p:nvSpPr>
+          <p:cNvPr id="3" name="Text 1"/>
+          <p:cNvSpPr/>
+          <p:nvPr/>
+        </p:nvSpPr>
+        <p:spPr>
+          <a:xfrm>
+            <a:off x="457200" y="640080"/>
+            <a:ext cx="11247120" cy="1280160"/>
+          </a:xfrm>
+          <a:prstGeom prst="rect">
+            <a:avLst/>
+          </a:prstGeom>
+          <a:noFill/>
+          <a:ln/>
+        </p:spPr>
+        <p:txBody>
+          <a:bodyPr wrap="square" rtlCol="0" anchor="ctr"/>
+          <a:lstStyle/>
+          <a:p>
+            <a:pPr indent="0" marL="0">
+              <a:buNone/>
+            </a:pPr>
+            <a:r>
+              <a:rPr lang="en-US" sz="3600" b="1" dirty="0">
+                <a:solidFill>
+                  <a:srgbClr val="0F172A"/>
+                </a:solidFill>
+                <a:latin typeface="Inter" pitchFamily="34" charset="0"/>
+                <a:ea typeface="Inter" pitchFamily="34" charset="-122"/>
+                <a:cs typeface="Inter" pitchFamily="34" charset="-120"/>
+              </a:rPr>
+              <a:t>From contract to live in 14 days.</a:t>
+            </a:r>
+            <a:endParaRPr lang="en-US" sz="3600" dirty="0"/>
+          </a:p>
+        </p:txBody>
+      </p:sp>
+      <p:sp>
+        <p:nvSpPr>
+          <p:cNvPr id="4" name="Shape 2"/>
+          <p:cNvSpPr/>
+          <p:nvPr/>
+        </p:nvSpPr>
+        <p:spPr>
+          <a:xfrm>
+            <a:off x="457200" y="2286000"/>
+            <a:ext cx="2743200" cy="2560320"/>
+          </a:xfrm>
+          <a:prstGeom prst="roundRect">
+            <a:avLst>
+              <a:gd name="adj" fmla="val 5357"/>
+            </a:avLst>
+          </a:prstGeom>
+          <a:solidFill>
+            <a:srgbClr val="FFFFFF"/>
+          </a:solidFill>
+          <a:ln w="12700">
+            <a:solidFill>
+              <a:srgbClr val="E2E8F0"/>
+            </a:solidFill>
+            <a:prstDash val="solid"/>
+          </a:ln>
+        </p:spPr>
+      </p:sp>
+      <p:sp>
+        <p:nvSpPr>
+          <p:cNvPr id="5" name="Text 3"/>
+          <p:cNvSpPr/>
+          <p:nvPr/>
+        </p:nvSpPr>
+        <p:spPr>
+          <a:xfrm>
+            <a:off x="640080" y="2423160"/>
+            <a:ext cx="2377440" cy="274320"/>
+          </a:xfrm>
+          <a:prstGeom prst="rect">
+            <a:avLst/>
+          </a:prstGeom>
+          <a:noFill/>
+          <a:ln/>
+        </p:spPr>
+        <p:txBody>
+          <a:bodyPr wrap="square" rtlCol="0" anchor="ctr"/>
+          <a:lstStyle/>
+          <a:p>
+            <a:pPr indent="0" marL="0">
+              <a:buNone/>
+            </a:pPr>
+            <a:r>
+              <a:rPr lang="en-US" sz="900" b="1" spc="400" kern="0" dirty="0">
+                <a:solidFill>
+                  <a:srgbClr val="64748B"/>
+                </a:solidFill>
+                <a:latin typeface="Inter" pitchFamily="34" charset="0"/>
+                <a:ea typeface="Inter" pitchFamily="34" charset="-122"/>
+                <a:cs typeface="Inter" pitchFamily="34" charset="-120"/>
+              </a:rPr>
+              <a:t>DAY 1-3</a:t>
+            </a:r>
+            <a:endParaRPr lang="en-US" sz="900" dirty="0"/>
+          </a:p>
+        </p:txBody>
+      </p:sp>
+      <p:sp>
+        <p:nvSpPr>
+          <p:cNvPr id="6" name="Text 4"/>
+          <p:cNvSpPr/>
+          <p:nvPr/>
+        </p:nvSpPr>
+        <p:spPr>
+          <a:xfrm>
+            <a:off x="640080" y="2743200"/>
+            <a:ext cx="2377440" cy="457200"/>
+          </a:xfrm>
+          <a:prstGeom prst="rect">
+            <a:avLst/>
+          </a:prstGeom>
+          <a:noFill/>
+          <a:ln/>
+        </p:spPr>
+        <p:txBody>
+          <a:bodyPr wrap="square" rtlCol="0" anchor="ctr"/>
+          <a:lstStyle/>
+          <a:p>
+            <a:pPr indent="0" marL="0">
+              <a:buNone/>
+            </a:pPr>
+            <a:r>
+              <a:rPr lang="en-US" sz="1600" b="1" dirty="0">
+                <a:solidFill>
+                  <a:srgbClr val="0F172A"/>
+                </a:solidFill>
+                <a:latin typeface="Inter" pitchFamily="34" charset="0"/>
+                <a:ea typeface="Inter" pitchFamily="34" charset="-122"/>
+                <a:cs typeface="Inter" pitchFamily="34" charset="-120"/>
+              </a:rPr>
+              <a:t>Setup</a:t>
+            </a:r>
+            <a:endParaRPr lang="en-US" sz="1600" dirty="0"/>
+          </a:p>
+        </p:txBody>
+      </p:sp>
+      <p:sp>
+        <p:nvSpPr>
+          <p:cNvPr id="7" name="Text 5"/>
+          <p:cNvSpPr/>
+          <p:nvPr/>
+        </p:nvSpPr>
+        <p:spPr>
+          <a:xfrm>
+            <a:off x="640080" y="3200400"/>
+            <a:ext cx="2377440" cy="1463040"/>
+          </a:xfrm>
+          <a:prstGeom prst="rect">
+            <a:avLst/>
+          </a:prstGeom>
+          <a:noFill/>
+          <a:ln/>
+        </p:spPr>
+        <p:txBody>
+          <a:bodyPr wrap="square" rtlCol="0" anchor="ctr"/>
+          <a:lstStyle/>
+          <a:p>
+            <a:pPr indent="0" marL="0">
+              <a:lnSpc>
+                <a:spcPts val="1600"/>
+              </a:lnSpc>
+              <a:buNone/>
+            </a:pPr>
+            <a:r>
+              <a:rPr lang="en-US" sz="1100" dirty="0">
+                <a:solidFill>
+                  <a:srgbClr val="475569"/>
+                </a:solidFill>
+                <a:latin typeface="Inter" pitchFamily="34" charset="0"/>
+                <a:ea typeface="Inter" pitchFamily="34" charset="-122"/>
+                <a:cs typeface="Inter" pitchFamily="34" charset="-120"/>
+              </a:rPr>
+              <a:t>Tenant provisioned. Branding, classes, sections, fee structure imported.</a:t>
+            </a:r>
+            <a:endParaRPr lang="en-US" sz="1100" dirty="0"/>
+          </a:p>
+        </p:txBody>
+      </p:sp>
+      <p:sp>
+        <p:nvSpPr>
+          <p:cNvPr id="8" name="Shape 6"/>
+          <p:cNvSpPr/>
+          <p:nvPr/>
+        </p:nvSpPr>
+        <p:spPr>
+          <a:xfrm>
+            <a:off x="3364992" y="2286000"/>
+            <a:ext cx="2743200" cy="2560320"/>
+          </a:xfrm>
+          <a:prstGeom prst="roundRect">
+            <a:avLst>
+              <a:gd name="adj" fmla="val 5357"/>
+            </a:avLst>
+          </a:prstGeom>
+          <a:solidFill>
+            <a:srgbClr val="FFFFFF"/>
+          </a:solidFill>
+          <a:ln w="12700">
+            <a:solidFill>
+              <a:srgbClr val="E2E8F0"/>
+            </a:solidFill>
+            <a:prstDash val="solid"/>
+          </a:ln>
+        </p:spPr>
+      </p:sp>
+      <p:sp>
+        <p:nvSpPr>
+          <p:cNvPr id="9" name="Text 7"/>
+          <p:cNvSpPr/>
+          <p:nvPr/>
+        </p:nvSpPr>
+        <p:spPr>
+          <a:xfrm>
+            <a:off x="3547872" y="2423160"/>
+            <a:ext cx="2377440" cy="274320"/>
+          </a:xfrm>
+          <a:prstGeom prst="rect">
+            <a:avLst/>
+          </a:prstGeom>
+          <a:noFill/>
+          <a:ln/>
+        </p:spPr>
+        <p:txBody>
+          <a:bodyPr wrap="square" rtlCol="0" anchor="ctr"/>
+          <a:lstStyle/>
+          <a:p>
+            <a:pPr indent="0" marL="0">
+              <a:buNone/>
+            </a:pPr>
+            <a:r>
+              <a:rPr lang="en-US" sz="900" b="1" spc="400" kern="0" dirty="0">
+                <a:solidFill>
+                  <a:srgbClr val="64748B"/>
+                </a:solidFill>
+                <a:latin typeface="Inter" pitchFamily="34" charset="0"/>
+                <a:ea typeface="Inter" pitchFamily="34" charset="-122"/>
+                <a:cs typeface="Inter" pitchFamily="34" charset="-120"/>
+              </a:rPr>
+              <a:t>DAY 4-7</a:t>
+            </a:r>
+            <a:endParaRPr lang="en-US" sz="900" dirty="0"/>
+          </a:p>
+        </p:txBody>
+      </p:sp>
+      <p:sp>
+        <p:nvSpPr>
+          <p:cNvPr id="10" name="Text 8"/>
+          <p:cNvSpPr/>
+          <p:nvPr/>
+        </p:nvSpPr>
+        <p:spPr>
+          <a:xfrm>
+            <a:off x="3547872" y="2743200"/>
+            <a:ext cx="2377440" cy="457200"/>
+          </a:xfrm>
+          <a:prstGeom prst="rect">
+            <a:avLst/>
+          </a:prstGeom>
+          <a:noFill/>
+          <a:ln/>
+        </p:spPr>
+        <p:txBody>
+          <a:bodyPr wrap="square" rtlCol="0" anchor="ctr"/>
+          <a:lstStyle/>
+          <a:p>
+            <a:pPr indent="0" marL="0">
+              <a:buNone/>
+            </a:pPr>
+            <a:r>
+              <a:rPr lang="en-US" sz="1600" b="1" dirty="0">
+                <a:solidFill>
+                  <a:srgbClr val="0F172A"/>
+                </a:solidFill>
+                <a:latin typeface="Inter" pitchFamily="34" charset="0"/>
+                <a:ea typeface="Inter" pitchFamily="34" charset="-122"/>
+                <a:cs typeface="Inter" pitchFamily="34" charset="-120"/>
+              </a:rPr>
+              <a:t>Data migration</a:t>
+            </a:r>
+            <a:endParaRPr lang="en-US" sz="1600" dirty="0"/>
+          </a:p>
+        </p:txBody>
+      </p:sp>
+      <p:sp>
+        <p:nvSpPr>
+          <p:cNvPr id="11" name="Text 9"/>
+          <p:cNvSpPr/>
+          <p:nvPr/>
+        </p:nvSpPr>
+        <p:spPr>
+          <a:xfrm>
+            <a:off x="3547872" y="3200400"/>
+            <a:ext cx="2377440" cy="1463040"/>
+          </a:xfrm>
+          <a:prstGeom prst="rect">
+            <a:avLst/>
+          </a:prstGeom>
+          <a:noFill/>
+          <a:ln/>
+        </p:spPr>
+        <p:txBody>
+          <a:bodyPr wrap="square" rtlCol="0" anchor="ctr"/>
+          <a:lstStyle/>
+          <a:p>
+            <a:pPr indent="0" marL="0">
+              <a:lnSpc>
+                <a:spcPts val="1600"/>
+              </a:lnSpc>
+              <a:buNone/>
+            </a:pPr>
+            <a:r>
+              <a:rPr lang="en-US" sz="1100" dirty="0">
+                <a:solidFill>
+                  <a:srgbClr val="475569"/>
+                </a:solidFill>
+                <a:latin typeface="Inter" pitchFamily="34" charset="0"/>
+                <a:ea typeface="Inter" pitchFamily="34" charset="-122"/>
+                <a:cs typeface="Inter" pitchFamily="34" charset="-120"/>
+              </a:rPr>
+              <a:t>Student &amp; staff records imported from your existing system. Validated by AIvenX team.</a:t>
+            </a:r>
+            <a:endParaRPr lang="en-US" sz="1100" dirty="0"/>
+          </a:p>
+        </p:txBody>
+      </p:sp>
+      <p:sp>
+        <p:nvSpPr>
+          <p:cNvPr id="12" name="Shape 10"/>
+          <p:cNvSpPr/>
+          <p:nvPr/>
+        </p:nvSpPr>
+        <p:spPr>
+          <a:xfrm>
+            <a:off x="6272784" y="2286000"/>
+            <a:ext cx="2743200" cy="2560320"/>
+          </a:xfrm>
+          <a:prstGeom prst="roundRect">
+            <a:avLst>
+              <a:gd name="adj" fmla="val 5357"/>
+            </a:avLst>
+          </a:prstGeom>
+          <a:solidFill>
+            <a:srgbClr val="FFFFFF"/>
+          </a:solidFill>
+          <a:ln w="12700">
+            <a:solidFill>
+              <a:srgbClr val="E2E8F0"/>
+            </a:solidFill>
+            <a:prstDash val="solid"/>
+          </a:ln>
+        </p:spPr>
+      </p:sp>
+      <p:sp>
+        <p:nvSpPr>
+          <p:cNvPr id="13" name="Text 11"/>
+          <p:cNvSpPr/>
+          <p:nvPr/>
+        </p:nvSpPr>
+        <p:spPr>
+          <a:xfrm>
+            <a:off x="6455664" y="2423160"/>
+            <a:ext cx="2377440" cy="274320"/>
+          </a:xfrm>
+          <a:prstGeom prst="rect">
+            <a:avLst/>
+          </a:prstGeom>
+          <a:noFill/>
+          <a:ln/>
+        </p:spPr>
+        <p:txBody>
+          <a:bodyPr wrap="square" rtlCol="0" anchor="ctr"/>
+          <a:lstStyle/>
+          <a:p>
+            <a:pPr indent="0" marL="0">
+              <a:buNone/>
+            </a:pPr>
+            <a:r>
+              <a:rPr lang="en-US" sz="900" b="1" spc="400" kern="0" dirty="0">
+                <a:solidFill>
+                  <a:srgbClr val="64748B"/>
+                </a:solidFill>
+                <a:latin typeface="Inter" pitchFamily="34" charset="0"/>
+                <a:ea typeface="Inter" pitchFamily="34" charset="-122"/>
+                <a:cs typeface="Inter" pitchFamily="34" charset="-120"/>
+              </a:rPr>
+              <a:t>DAY 8-11</a:t>
+            </a:r>
+            <a:endParaRPr lang="en-US" sz="900" dirty="0"/>
+          </a:p>
+        </p:txBody>
+      </p:sp>
+      <p:sp>
+        <p:nvSpPr>
+          <p:cNvPr id="14" name="Text 12"/>
+          <p:cNvSpPr/>
+          <p:nvPr/>
+        </p:nvSpPr>
+        <p:spPr>
+          <a:xfrm>
+            <a:off x="6455664" y="2743200"/>
+            <a:ext cx="2377440" cy="457200"/>
+          </a:xfrm>
+          <a:prstGeom prst="rect">
+            <a:avLst/>
+          </a:prstGeom>
+          <a:noFill/>
+          <a:ln/>
+        </p:spPr>
+        <p:txBody>
+          <a:bodyPr wrap="square" rtlCol="0" anchor="ctr"/>
+          <a:lstStyle/>
+          <a:p>
+            <a:pPr indent="0" marL="0">
+              <a:buNone/>
+            </a:pPr>
+            <a:r>
+              <a:rPr lang="en-US" sz="1600" b="1" dirty="0">
+                <a:solidFill>
+                  <a:srgbClr val="0F172A"/>
+                </a:solidFill>
+                <a:latin typeface="Inter" pitchFamily="34" charset="0"/>
+                <a:ea typeface="Inter" pitchFamily="34" charset="-122"/>
+                <a:cs typeface="Inter" pitchFamily="34" charset="-120"/>
+              </a:rPr>
+              <a:t>Training</a:t>
+            </a:r>
+            <a:endParaRPr lang="en-US" sz="1600" dirty="0"/>
+          </a:p>
+        </p:txBody>
+      </p:sp>
+      <p:sp>
+        <p:nvSpPr>
+          <p:cNvPr id="15" name="Text 13"/>
+          <p:cNvSpPr/>
+          <p:nvPr/>
+        </p:nvSpPr>
+        <p:spPr>
+          <a:xfrm>
+            <a:off x="6455664" y="3200400"/>
+            <a:ext cx="2377440" cy="1463040"/>
+          </a:xfrm>
+          <a:prstGeom prst="rect">
+            <a:avLst/>
+          </a:prstGeom>
+          <a:noFill/>
+          <a:ln/>
+        </p:spPr>
+        <p:txBody>
+          <a:bodyPr wrap="square" rtlCol="0" anchor="ctr"/>
+          <a:lstStyle/>
+          <a:p>
+            <a:pPr indent="0" marL="0">
+              <a:lnSpc>
+                <a:spcPts val="1600"/>
+              </a:lnSpc>
+              <a:buNone/>
+            </a:pPr>
+            <a:r>
+              <a:rPr lang="en-US" sz="1100" dirty="0">
+                <a:solidFill>
+                  <a:srgbClr val="475569"/>
+                </a:solidFill>
+                <a:latin typeface="Inter" pitchFamily="34" charset="0"/>
+                <a:ea typeface="Inter" pitchFamily="34" charset="-122"/>
+                <a:cs typeface="Inter" pitchFamily="34" charset="-120"/>
+              </a:rPr>
+              <a:t>Admin · Principal · Teacher · Parent walkthroughs. Recorded, role-specific.</a:t>
+            </a:r>
+            <a:endParaRPr lang="en-US" sz="1100" dirty="0"/>
+          </a:p>
+        </p:txBody>
+      </p:sp>
+      <p:sp>
+        <p:nvSpPr>
+          <p:cNvPr id="16" name="Shape 14"/>
+          <p:cNvSpPr/>
+          <p:nvPr/>
+        </p:nvSpPr>
+        <p:spPr>
+          <a:xfrm>
+            <a:off x="9180576" y="2286000"/>
+            <a:ext cx="2743200" cy="2560320"/>
+          </a:xfrm>
+          <a:prstGeom prst="roundRect">
+            <a:avLst>
+              <a:gd name="adj" fmla="val 5357"/>
+            </a:avLst>
+          </a:prstGeom>
+          <a:solidFill>
+            <a:srgbClr val="FFFFFF"/>
+          </a:solidFill>
+          <a:ln w="12700">
+            <a:solidFill>
+              <a:srgbClr val="E2E8F0"/>
+            </a:solidFill>
+            <a:prstDash val="solid"/>
+          </a:ln>
+        </p:spPr>
+      </p:sp>
+      <p:sp>
+        <p:nvSpPr>
+          <p:cNvPr id="17" name="Text 15"/>
+          <p:cNvSpPr/>
+          <p:nvPr/>
+        </p:nvSpPr>
+        <p:spPr>
+          <a:xfrm>
+            <a:off x="9363456" y="2423160"/>
+            <a:ext cx="2377440" cy="274320"/>
+          </a:xfrm>
+          <a:prstGeom prst="rect">
+            <a:avLst/>
+          </a:prstGeom>
+          <a:noFill/>
+          <a:ln/>
+        </p:spPr>
+        <p:txBody>
+          <a:bodyPr wrap="square" rtlCol="0" anchor="ctr"/>
+          <a:lstStyle/>
+          <a:p>
+            <a:pPr indent="0" marL="0">
+              <a:buNone/>
+            </a:pPr>
+            <a:r>
+              <a:rPr lang="en-US" sz="900" b="1" spc="400" kern="0" dirty="0">
+                <a:solidFill>
+                  <a:srgbClr val="64748B"/>
+                </a:solidFill>
+                <a:latin typeface="Inter" pitchFamily="34" charset="0"/>
+                <a:ea typeface="Inter" pitchFamily="34" charset="-122"/>
+                <a:cs typeface="Inter" pitchFamily="34" charset="-120"/>
+              </a:rPr>
+              <a:t>DAY 12-14</a:t>
+            </a:r>
+            <a:endParaRPr lang="en-US" sz="900" dirty="0"/>
+          </a:p>
+        </p:txBody>
+      </p:sp>
+      <p:sp>
+        <p:nvSpPr>
+          <p:cNvPr id="18" name="Text 16"/>
+          <p:cNvSpPr/>
+          <p:nvPr/>
+        </p:nvSpPr>
+        <p:spPr>
+          <a:xfrm>
+            <a:off x="9363456" y="2743200"/>
+            <a:ext cx="2377440" cy="457200"/>
+          </a:xfrm>
+          <a:prstGeom prst="rect">
+            <a:avLst/>
+          </a:prstGeom>
+          <a:noFill/>
+          <a:ln/>
+        </p:spPr>
+        <p:txBody>
+          <a:bodyPr wrap="square" rtlCol="0" anchor="ctr"/>
+          <a:lstStyle/>
+          <a:p>
+            <a:pPr indent="0" marL="0">
+              <a:buNone/>
+            </a:pPr>
+            <a:r>
+              <a:rPr lang="en-US" sz="1600" b="1" dirty="0">
+                <a:solidFill>
+                  <a:srgbClr val="0F172A"/>
+                </a:solidFill>
+                <a:latin typeface="Inter" pitchFamily="34" charset="0"/>
+                <a:ea typeface="Inter" pitchFamily="34" charset="-122"/>
+                <a:cs typeface="Inter" pitchFamily="34" charset="-120"/>
+              </a:rPr>
+              <a:t>Go-live</a:t>
+            </a:r>
+            <a:endParaRPr lang="en-US" sz="1600" dirty="0"/>
+          </a:p>
+        </p:txBody>
+      </p:sp>
+      <p:sp>
+        <p:nvSpPr>
+          <p:cNvPr id="19" name="Text 17"/>
+          <p:cNvSpPr/>
+          <p:nvPr/>
+        </p:nvSpPr>
+        <p:spPr>
+          <a:xfrm>
+            <a:off x="9363456" y="3200400"/>
+            <a:ext cx="2377440" cy="1463040"/>
+          </a:xfrm>
+          <a:prstGeom prst="rect">
+            <a:avLst/>
+          </a:prstGeom>
+          <a:noFill/>
+          <a:ln/>
+        </p:spPr>
+        <p:txBody>
+          <a:bodyPr wrap="square" rtlCol="0" anchor="ctr"/>
+          <a:lstStyle/>
+          <a:p>
+            <a:pPr indent="0" marL="0">
+              <a:lnSpc>
+                <a:spcPts val="1600"/>
+              </a:lnSpc>
+              <a:buNone/>
+            </a:pPr>
+            <a:r>
+              <a:rPr lang="en-US" sz="1100" dirty="0">
+                <a:solidFill>
+                  <a:srgbClr val="475569"/>
+                </a:solidFill>
+                <a:latin typeface="Inter" pitchFamily="34" charset="0"/>
+                <a:ea typeface="Inter" pitchFamily="34" charset="-122"/>
+                <a:cs typeface="Inter" pitchFamily="34" charset="-120"/>
+              </a:rPr>
+              <a:t>Soft launch with one class → full rollout. Dedicated CSM on call.</a:t>
+            </a:r>
+            <a:endParaRPr lang="en-US" sz="1100" dirty="0"/>
+          </a:p>
+        </p:txBody>
+      </p:sp>
+      <p:sp>
+        <p:nvSpPr>
+          <p:cNvPr id="20" name="Shape 18"/>
+          <p:cNvSpPr/>
+          <p:nvPr/>
+        </p:nvSpPr>
+        <p:spPr>
+          <a:xfrm>
+            <a:off x="457200" y="5212080"/>
+            <a:ext cx="11292840" cy="1005840"/>
+          </a:xfrm>
+          <a:prstGeom prst="roundRect">
+            <a:avLst>
+              <a:gd name="adj" fmla="val 9091"/>
+            </a:avLst>
+          </a:prstGeom>
+          <a:solidFill>
+            <a:srgbClr val="F8FAFC"/>
+          </a:solidFill>
+          <a:ln w="12700">
+            <a:solidFill>
+              <a:srgbClr val="E2E8F0"/>
+            </a:solidFill>
+            <a:prstDash val="solid"/>
+          </a:ln>
+        </p:spPr>
+      </p:sp>
+      <p:sp>
+        <p:nvSpPr>
+          <p:cNvPr id="21" name="Text 19"/>
+          <p:cNvSpPr/>
+          <p:nvPr/>
+        </p:nvSpPr>
+        <p:spPr>
+          <a:xfrm>
+            <a:off x="640080" y="5349240"/>
+            <a:ext cx="10972800" cy="777240"/>
+          </a:xfrm>
+          <a:prstGeom prst="rect">
+            <a:avLst/>
+          </a:prstGeom>
+          <a:noFill/>
+          <a:ln/>
+        </p:spPr>
+        <p:txBody>
+          <a:bodyPr wrap="square" rtlCol="0" anchor="ctr"/>
+          <a:lstStyle/>
+          <a:p>
+            <a:pPr indent="0" marL="0">
+              <a:buNone/>
+            </a:pPr>
+            <a:r>
+              <a:rPr lang="en-US" sz="1300" dirty="0">
+                <a:solidFill>
+                  <a:srgbClr val="0F172A"/>
+                </a:solidFill>
+                <a:latin typeface="Inter" pitchFamily="34" charset="0"/>
+                <a:ea typeface="Inter" pitchFamily="34" charset="-122"/>
+                <a:cs typeface="Inter" pitchFamily="34" charset="-120"/>
+              </a:rPr>
+              <a:t>White-glove migration is included. We handle CSV imports from your current ERP / LMS — your team isn't stuck reformatting spreadsheets.</a:t>
+            </a:r>
+            <a:endParaRPr lang="en-US" sz="1300" dirty="0"/>
+          </a:p>
+        </p:txBody>
+      </p:sp>
+    </p:spTree>
+  </p:cSld>
+  <p:clrMapOvr>
+    <a:masterClrMapping/>
+  </p:clrMapOvr>
+</p:sld>
+</file>
+
+<file path=ppt/slides/slide28.xml><?xml version="1.0" encoding="utf-8"?>
+<p:sld xmlns:a="http://schemas.openxmlformats.org/drawingml/2006/main" xmlns:r="http://schemas.openxmlformats.org/officeDocument/2006/relationships" xmlns:p="http://schemas.openxmlformats.org/presentationml/2006/main">
+  <p:cSld name="Slide 28">
     <p:bg>
       <p:bgPr>
         <a:solidFill>
@@ -13024,9 +15531,9 @@
 </p:sld>
 </file>
 
-<file path=ppt/slides/slide25.xml><?xml version="1.0" encoding="utf-8"?>
+<file path=ppt/slides/slide29.xml><?xml version="1.0" encoding="utf-8"?>
 <p:sld xmlns:a="http://schemas.openxmlformats.org/drawingml/2006/main" xmlns:r="http://schemas.openxmlformats.org/officeDocument/2006/relationships" xmlns:p="http://schemas.openxmlformats.org/presentationml/2006/main">
-  <p:cSld name="Slide 25">
+  <p:cSld name="Slide 29">
     <p:bg>
       <p:bgPr>
         <a:solidFill>
